--- a/04-Deliverables/Stakeholder_Map_Mill_River.pptx
+++ b/04-Deliverables/Stakeholder_Map_Mill_River.pptx
@@ -10,9 +10,17 @@
     <p:sldId id="258" r:id="rId4"/>
     <p:sldId id="259" r:id="rId5"/>
     <p:sldId id="260" r:id="rId6"/>
+    <p:sldId id="261" r:id="rId7"/>
+    <p:sldId id="262" r:id="rId8"/>
+    <p:sldId id="263" r:id="rId9"/>
+    <p:sldId id="264" r:id="rId10"/>
+    <p:sldId id="265" r:id="rId11"/>
+    <p:sldId id="266" r:id="rId12"/>
+    <p:sldId id="267" r:id="rId13"/>
+    <p:sldId id="268" r:id="rId14"/>
   </p:sldIdLst>
   <p:notesMasterIdLst>
-    <p:notesMasterId r:id="rId7"/>
+    <p:notesMasterId r:id="rId15"/>
   </p:notesMasterIdLst>
   <p:sldSz cx="12192000" cy="6858000"/>
   <p:notesSz cx="6858000" cy="12192000"/>
@@ -548,6 +556,358 @@
 </p:notes>
 </file>
 
+<file path=ppt/notesSlides/notesSlide10.xml><?xml version="1.0" encoding="utf-8"?>
+<p:notes xmlns:a="http://schemas.openxmlformats.org/drawingml/2006/main" xmlns:r="http://schemas.openxmlformats.org/officeDocument/2006/relationships" xmlns:p="http://schemas.openxmlformats.org/presentationml/2006/main">
+  <p:cSld>
+    <p:spTree>
+      <p:nvGrpSpPr>
+        <p:cNvPr id="1" name=""/>
+        <p:cNvGrpSpPr/>
+        <p:nvPr/>
+      </p:nvGrpSpPr>
+      <p:grpSpPr>
+        <a:xfrm>
+          <a:off x="0" y="0"/>
+          <a:ext cx="0" cy="0"/>
+          <a:chOff x="0" y="0"/>
+          <a:chExt cx="0" cy="0"/>
+        </a:xfrm>
+      </p:grpSpPr>
+      <p:sp>
+        <p:nvSpPr>
+          <p:cNvPr id="2" name="Slide Image Placeholder 1"/>
+          <p:cNvSpPr>
+            <a:spLocks noGrp="1" noRot="1" noChangeAspect="1"/>
+          </p:cNvSpPr>
+          <p:nvPr>
+            <p:ph type="sldImg"/>
+          </p:nvPr>
+        </p:nvSpPr>
+        <p:spPr/>
+      </p:sp>
+      <p:sp>
+        <p:nvSpPr>
+          <p:cNvPr id="3" name="Notes Placeholder 2"/>
+          <p:cNvSpPr>
+            <a:spLocks noGrp="1"/>
+          </p:cNvSpPr>
+          <p:nvPr>
+            <p:ph type="body" idx="1"/>
+          </p:nvPr>
+        </p:nvSpPr>
+        <p:spPr/>
+        <p:txBody>
+          <a:bodyPr/>
+          <a:lstStyle/>
+          <a:p>
+            <a:r>
+              <a:rPr lang="en-US" dirty="0"/>
+              <a:t/>
+            </a:r>
+            <a:endParaRPr lang="en-US" dirty="0"/>
+          </a:p>
+        </p:txBody>
+      </p:sp>
+      <p:sp>
+        <p:nvSpPr>
+          <p:cNvPr id="4" name="Slide Number Placeholder 3"/>
+          <p:cNvSpPr>
+            <a:spLocks noGrp="1"/>
+          </p:cNvSpPr>
+          <p:nvPr>
+            <p:ph type="sldNum" sz="quarter" idx="10"/>
+          </p:nvPr>
+        </p:nvSpPr>
+        <p:spPr/>
+        <p:txBody>
+          <a:bodyPr/>
+          <a:lstStyle/>
+          <a:p>
+            <a:fld id="{F7021451-1387-4CA6-816F-3879F97B5CBC}" type="slidenum">
+              <a:rPr lang="en-US"/>
+              <a:t>10</a:t>
+            </a:fld>
+            <a:endParaRPr lang="en-US"/>
+          </a:p>
+        </p:txBody>
+      </p:sp>
+    </p:spTree>
+    <p:extLst>
+      <p:ext uri="{BB962C8B-B14F-4D97-AF65-F5344CB8AC3E}">
+        <p14:creationId xmlns:p14="http://schemas.microsoft.com/office/powerpoint/2010/main" val="1024086991"/>
+      </p:ext>
+    </p:extLst>
+  </p:cSld>
+  <p:clrMapOvr>
+    <a:masterClrMapping/>
+  </p:clrMapOvr>
+</p:notes>
+</file>
+
+<file path=ppt/notesSlides/notesSlide11.xml><?xml version="1.0" encoding="utf-8"?>
+<p:notes xmlns:a="http://schemas.openxmlformats.org/drawingml/2006/main" xmlns:r="http://schemas.openxmlformats.org/officeDocument/2006/relationships" xmlns:p="http://schemas.openxmlformats.org/presentationml/2006/main">
+  <p:cSld>
+    <p:spTree>
+      <p:nvGrpSpPr>
+        <p:cNvPr id="1" name=""/>
+        <p:cNvGrpSpPr/>
+        <p:nvPr/>
+      </p:nvGrpSpPr>
+      <p:grpSpPr>
+        <a:xfrm>
+          <a:off x="0" y="0"/>
+          <a:ext cx="0" cy="0"/>
+          <a:chOff x="0" y="0"/>
+          <a:chExt cx="0" cy="0"/>
+        </a:xfrm>
+      </p:grpSpPr>
+      <p:sp>
+        <p:nvSpPr>
+          <p:cNvPr id="2" name="Slide Image Placeholder 1"/>
+          <p:cNvSpPr>
+            <a:spLocks noGrp="1" noRot="1" noChangeAspect="1"/>
+          </p:cNvSpPr>
+          <p:nvPr>
+            <p:ph type="sldImg"/>
+          </p:nvPr>
+        </p:nvSpPr>
+        <p:spPr/>
+      </p:sp>
+      <p:sp>
+        <p:nvSpPr>
+          <p:cNvPr id="3" name="Notes Placeholder 2"/>
+          <p:cNvSpPr>
+            <a:spLocks noGrp="1"/>
+          </p:cNvSpPr>
+          <p:nvPr>
+            <p:ph type="body" idx="1"/>
+          </p:nvPr>
+        </p:nvSpPr>
+        <p:spPr/>
+        <p:txBody>
+          <a:bodyPr/>
+          <a:lstStyle/>
+          <a:p>
+            <a:r>
+              <a:rPr lang="en-US" dirty="0"/>
+              <a:t/>
+            </a:r>
+            <a:endParaRPr lang="en-US" dirty="0"/>
+          </a:p>
+        </p:txBody>
+      </p:sp>
+      <p:sp>
+        <p:nvSpPr>
+          <p:cNvPr id="4" name="Slide Number Placeholder 3"/>
+          <p:cNvSpPr>
+            <a:spLocks noGrp="1"/>
+          </p:cNvSpPr>
+          <p:nvPr>
+            <p:ph type="sldNum" sz="quarter" idx="10"/>
+          </p:nvPr>
+        </p:nvSpPr>
+        <p:spPr/>
+        <p:txBody>
+          <a:bodyPr/>
+          <a:lstStyle/>
+          <a:p>
+            <a:fld id="{F7021451-1387-4CA6-816F-3879F97B5CBC}" type="slidenum">
+              <a:rPr lang="en-US"/>
+              <a:t>11</a:t>
+            </a:fld>
+            <a:endParaRPr lang="en-US"/>
+          </a:p>
+        </p:txBody>
+      </p:sp>
+    </p:spTree>
+    <p:extLst>
+      <p:ext uri="{BB962C8B-B14F-4D97-AF65-F5344CB8AC3E}">
+        <p14:creationId xmlns:p14="http://schemas.microsoft.com/office/powerpoint/2010/main" val="1024086991"/>
+      </p:ext>
+    </p:extLst>
+  </p:cSld>
+  <p:clrMapOvr>
+    <a:masterClrMapping/>
+  </p:clrMapOvr>
+</p:notes>
+</file>
+
+<file path=ppt/notesSlides/notesSlide12.xml><?xml version="1.0" encoding="utf-8"?>
+<p:notes xmlns:a="http://schemas.openxmlformats.org/drawingml/2006/main" xmlns:r="http://schemas.openxmlformats.org/officeDocument/2006/relationships" xmlns:p="http://schemas.openxmlformats.org/presentationml/2006/main">
+  <p:cSld>
+    <p:spTree>
+      <p:nvGrpSpPr>
+        <p:cNvPr id="1" name=""/>
+        <p:cNvGrpSpPr/>
+        <p:nvPr/>
+      </p:nvGrpSpPr>
+      <p:grpSpPr>
+        <a:xfrm>
+          <a:off x="0" y="0"/>
+          <a:ext cx="0" cy="0"/>
+          <a:chOff x="0" y="0"/>
+          <a:chExt cx="0" cy="0"/>
+        </a:xfrm>
+      </p:grpSpPr>
+      <p:sp>
+        <p:nvSpPr>
+          <p:cNvPr id="2" name="Slide Image Placeholder 1"/>
+          <p:cNvSpPr>
+            <a:spLocks noGrp="1" noRot="1" noChangeAspect="1"/>
+          </p:cNvSpPr>
+          <p:nvPr>
+            <p:ph type="sldImg"/>
+          </p:nvPr>
+        </p:nvSpPr>
+        <p:spPr/>
+      </p:sp>
+      <p:sp>
+        <p:nvSpPr>
+          <p:cNvPr id="3" name="Notes Placeholder 2"/>
+          <p:cNvSpPr>
+            <a:spLocks noGrp="1"/>
+          </p:cNvSpPr>
+          <p:nvPr>
+            <p:ph type="body" idx="1"/>
+          </p:nvPr>
+        </p:nvSpPr>
+        <p:spPr/>
+        <p:txBody>
+          <a:bodyPr/>
+          <a:lstStyle/>
+          <a:p>
+            <a:r>
+              <a:rPr lang="en-US" dirty="0"/>
+              <a:t/>
+            </a:r>
+            <a:endParaRPr lang="en-US" dirty="0"/>
+          </a:p>
+        </p:txBody>
+      </p:sp>
+      <p:sp>
+        <p:nvSpPr>
+          <p:cNvPr id="4" name="Slide Number Placeholder 3"/>
+          <p:cNvSpPr>
+            <a:spLocks noGrp="1"/>
+          </p:cNvSpPr>
+          <p:nvPr>
+            <p:ph type="sldNum" sz="quarter" idx="10"/>
+          </p:nvPr>
+        </p:nvSpPr>
+        <p:spPr/>
+        <p:txBody>
+          <a:bodyPr/>
+          <a:lstStyle/>
+          <a:p>
+            <a:fld id="{F7021451-1387-4CA6-816F-3879F97B5CBC}" type="slidenum">
+              <a:rPr lang="en-US"/>
+              <a:t>12</a:t>
+            </a:fld>
+            <a:endParaRPr lang="en-US"/>
+          </a:p>
+        </p:txBody>
+      </p:sp>
+    </p:spTree>
+    <p:extLst>
+      <p:ext uri="{BB962C8B-B14F-4D97-AF65-F5344CB8AC3E}">
+        <p14:creationId xmlns:p14="http://schemas.microsoft.com/office/powerpoint/2010/main" val="1024086991"/>
+      </p:ext>
+    </p:extLst>
+  </p:cSld>
+  <p:clrMapOvr>
+    <a:masterClrMapping/>
+  </p:clrMapOvr>
+</p:notes>
+</file>
+
+<file path=ppt/notesSlides/notesSlide13.xml><?xml version="1.0" encoding="utf-8"?>
+<p:notes xmlns:a="http://schemas.openxmlformats.org/drawingml/2006/main" xmlns:r="http://schemas.openxmlformats.org/officeDocument/2006/relationships" xmlns:p="http://schemas.openxmlformats.org/presentationml/2006/main">
+  <p:cSld>
+    <p:spTree>
+      <p:nvGrpSpPr>
+        <p:cNvPr id="1" name=""/>
+        <p:cNvGrpSpPr/>
+        <p:nvPr/>
+      </p:nvGrpSpPr>
+      <p:grpSpPr>
+        <a:xfrm>
+          <a:off x="0" y="0"/>
+          <a:ext cx="0" cy="0"/>
+          <a:chOff x="0" y="0"/>
+          <a:chExt cx="0" cy="0"/>
+        </a:xfrm>
+      </p:grpSpPr>
+      <p:sp>
+        <p:nvSpPr>
+          <p:cNvPr id="2" name="Slide Image Placeholder 1"/>
+          <p:cNvSpPr>
+            <a:spLocks noGrp="1" noRot="1" noChangeAspect="1"/>
+          </p:cNvSpPr>
+          <p:nvPr>
+            <p:ph type="sldImg"/>
+          </p:nvPr>
+        </p:nvSpPr>
+        <p:spPr/>
+      </p:sp>
+      <p:sp>
+        <p:nvSpPr>
+          <p:cNvPr id="3" name="Notes Placeholder 2"/>
+          <p:cNvSpPr>
+            <a:spLocks noGrp="1"/>
+          </p:cNvSpPr>
+          <p:nvPr>
+            <p:ph type="body" idx="1"/>
+          </p:nvPr>
+        </p:nvSpPr>
+        <p:spPr/>
+        <p:txBody>
+          <a:bodyPr/>
+          <a:lstStyle/>
+          <a:p>
+            <a:r>
+              <a:rPr lang="en-US" dirty="0"/>
+              <a:t/>
+            </a:r>
+            <a:endParaRPr lang="en-US" dirty="0"/>
+          </a:p>
+        </p:txBody>
+      </p:sp>
+      <p:sp>
+        <p:nvSpPr>
+          <p:cNvPr id="4" name="Slide Number Placeholder 3"/>
+          <p:cNvSpPr>
+            <a:spLocks noGrp="1"/>
+          </p:cNvSpPr>
+          <p:nvPr>
+            <p:ph type="sldNum" sz="quarter" idx="10"/>
+          </p:nvPr>
+        </p:nvSpPr>
+        <p:spPr/>
+        <p:txBody>
+          <a:bodyPr/>
+          <a:lstStyle/>
+          <a:p>
+            <a:fld id="{F7021451-1387-4CA6-816F-3879F97B5CBC}" type="slidenum">
+              <a:rPr lang="en-US"/>
+              <a:t>13</a:t>
+            </a:fld>
+            <a:endParaRPr lang="en-US"/>
+          </a:p>
+        </p:txBody>
+      </p:sp>
+    </p:spTree>
+    <p:extLst>
+      <p:ext uri="{BB962C8B-B14F-4D97-AF65-F5344CB8AC3E}">
+        <p14:creationId xmlns:p14="http://schemas.microsoft.com/office/powerpoint/2010/main" val="1024086991"/>
+      </p:ext>
+    </p:extLst>
+  </p:cSld>
+  <p:clrMapOvr>
+    <a:masterClrMapping/>
+  </p:clrMapOvr>
+</p:notes>
+</file>
+
 <file path=ppt/notesSlides/notesSlide2.xml><?xml version="1.0" encoding="utf-8"?>
 <p:notes xmlns:a="http://schemas.openxmlformats.org/drawingml/2006/main" xmlns:r="http://schemas.openxmlformats.org/officeDocument/2006/relationships" xmlns:p="http://schemas.openxmlformats.org/presentationml/2006/main">
   <p:cSld>
@@ -882,6 +1242,358 @@
             <a:fld id="{F7021451-1387-4CA6-816F-3879F97B5CBC}" type="slidenum">
               <a:rPr lang="en-US"/>
               <a:t>5</a:t>
+            </a:fld>
+            <a:endParaRPr lang="en-US"/>
+          </a:p>
+        </p:txBody>
+      </p:sp>
+    </p:spTree>
+    <p:extLst>
+      <p:ext uri="{BB962C8B-B14F-4D97-AF65-F5344CB8AC3E}">
+        <p14:creationId xmlns:p14="http://schemas.microsoft.com/office/powerpoint/2010/main" val="1024086991"/>
+      </p:ext>
+    </p:extLst>
+  </p:cSld>
+  <p:clrMapOvr>
+    <a:masterClrMapping/>
+  </p:clrMapOvr>
+</p:notes>
+</file>
+
+<file path=ppt/notesSlides/notesSlide6.xml><?xml version="1.0" encoding="utf-8"?>
+<p:notes xmlns:a="http://schemas.openxmlformats.org/drawingml/2006/main" xmlns:r="http://schemas.openxmlformats.org/officeDocument/2006/relationships" xmlns:p="http://schemas.openxmlformats.org/presentationml/2006/main">
+  <p:cSld>
+    <p:spTree>
+      <p:nvGrpSpPr>
+        <p:cNvPr id="1" name=""/>
+        <p:cNvGrpSpPr/>
+        <p:nvPr/>
+      </p:nvGrpSpPr>
+      <p:grpSpPr>
+        <a:xfrm>
+          <a:off x="0" y="0"/>
+          <a:ext cx="0" cy="0"/>
+          <a:chOff x="0" y="0"/>
+          <a:chExt cx="0" cy="0"/>
+        </a:xfrm>
+      </p:grpSpPr>
+      <p:sp>
+        <p:nvSpPr>
+          <p:cNvPr id="2" name="Slide Image Placeholder 1"/>
+          <p:cNvSpPr>
+            <a:spLocks noGrp="1" noRot="1" noChangeAspect="1"/>
+          </p:cNvSpPr>
+          <p:nvPr>
+            <p:ph type="sldImg"/>
+          </p:nvPr>
+        </p:nvSpPr>
+        <p:spPr/>
+      </p:sp>
+      <p:sp>
+        <p:nvSpPr>
+          <p:cNvPr id="3" name="Notes Placeholder 2"/>
+          <p:cNvSpPr>
+            <a:spLocks noGrp="1"/>
+          </p:cNvSpPr>
+          <p:nvPr>
+            <p:ph type="body" idx="1"/>
+          </p:nvPr>
+        </p:nvSpPr>
+        <p:spPr/>
+        <p:txBody>
+          <a:bodyPr/>
+          <a:lstStyle/>
+          <a:p>
+            <a:r>
+              <a:rPr lang="en-US" dirty="0"/>
+              <a:t/>
+            </a:r>
+            <a:endParaRPr lang="en-US" dirty="0"/>
+          </a:p>
+        </p:txBody>
+      </p:sp>
+      <p:sp>
+        <p:nvSpPr>
+          <p:cNvPr id="4" name="Slide Number Placeholder 3"/>
+          <p:cNvSpPr>
+            <a:spLocks noGrp="1"/>
+          </p:cNvSpPr>
+          <p:nvPr>
+            <p:ph type="sldNum" sz="quarter" idx="10"/>
+          </p:nvPr>
+        </p:nvSpPr>
+        <p:spPr/>
+        <p:txBody>
+          <a:bodyPr/>
+          <a:lstStyle/>
+          <a:p>
+            <a:fld id="{F7021451-1387-4CA6-816F-3879F97B5CBC}" type="slidenum">
+              <a:rPr lang="en-US"/>
+              <a:t>6</a:t>
+            </a:fld>
+            <a:endParaRPr lang="en-US"/>
+          </a:p>
+        </p:txBody>
+      </p:sp>
+    </p:spTree>
+    <p:extLst>
+      <p:ext uri="{BB962C8B-B14F-4D97-AF65-F5344CB8AC3E}">
+        <p14:creationId xmlns:p14="http://schemas.microsoft.com/office/powerpoint/2010/main" val="1024086991"/>
+      </p:ext>
+    </p:extLst>
+  </p:cSld>
+  <p:clrMapOvr>
+    <a:masterClrMapping/>
+  </p:clrMapOvr>
+</p:notes>
+</file>
+
+<file path=ppt/notesSlides/notesSlide7.xml><?xml version="1.0" encoding="utf-8"?>
+<p:notes xmlns:a="http://schemas.openxmlformats.org/drawingml/2006/main" xmlns:r="http://schemas.openxmlformats.org/officeDocument/2006/relationships" xmlns:p="http://schemas.openxmlformats.org/presentationml/2006/main">
+  <p:cSld>
+    <p:spTree>
+      <p:nvGrpSpPr>
+        <p:cNvPr id="1" name=""/>
+        <p:cNvGrpSpPr/>
+        <p:nvPr/>
+      </p:nvGrpSpPr>
+      <p:grpSpPr>
+        <a:xfrm>
+          <a:off x="0" y="0"/>
+          <a:ext cx="0" cy="0"/>
+          <a:chOff x="0" y="0"/>
+          <a:chExt cx="0" cy="0"/>
+        </a:xfrm>
+      </p:grpSpPr>
+      <p:sp>
+        <p:nvSpPr>
+          <p:cNvPr id="2" name="Slide Image Placeholder 1"/>
+          <p:cNvSpPr>
+            <a:spLocks noGrp="1" noRot="1" noChangeAspect="1"/>
+          </p:cNvSpPr>
+          <p:nvPr>
+            <p:ph type="sldImg"/>
+          </p:nvPr>
+        </p:nvSpPr>
+        <p:spPr/>
+      </p:sp>
+      <p:sp>
+        <p:nvSpPr>
+          <p:cNvPr id="3" name="Notes Placeholder 2"/>
+          <p:cNvSpPr>
+            <a:spLocks noGrp="1"/>
+          </p:cNvSpPr>
+          <p:nvPr>
+            <p:ph type="body" idx="1"/>
+          </p:nvPr>
+        </p:nvSpPr>
+        <p:spPr/>
+        <p:txBody>
+          <a:bodyPr/>
+          <a:lstStyle/>
+          <a:p>
+            <a:r>
+              <a:rPr lang="en-US" dirty="0"/>
+              <a:t/>
+            </a:r>
+            <a:endParaRPr lang="en-US" dirty="0"/>
+          </a:p>
+        </p:txBody>
+      </p:sp>
+      <p:sp>
+        <p:nvSpPr>
+          <p:cNvPr id="4" name="Slide Number Placeholder 3"/>
+          <p:cNvSpPr>
+            <a:spLocks noGrp="1"/>
+          </p:cNvSpPr>
+          <p:nvPr>
+            <p:ph type="sldNum" sz="quarter" idx="10"/>
+          </p:nvPr>
+        </p:nvSpPr>
+        <p:spPr/>
+        <p:txBody>
+          <a:bodyPr/>
+          <a:lstStyle/>
+          <a:p>
+            <a:fld id="{F7021451-1387-4CA6-816F-3879F97B5CBC}" type="slidenum">
+              <a:rPr lang="en-US"/>
+              <a:t>7</a:t>
+            </a:fld>
+            <a:endParaRPr lang="en-US"/>
+          </a:p>
+        </p:txBody>
+      </p:sp>
+    </p:spTree>
+    <p:extLst>
+      <p:ext uri="{BB962C8B-B14F-4D97-AF65-F5344CB8AC3E}">
+        <p14:creationId xmlns:p14="http://schemas.microsoft.com/office/powerpoint/2010/main" val="1024086991"/>
+      </p:ext>
+    </p:extLst>
+  </p:cSld>
+  <p:clrMapOvr>
+    <a:masterClrMapping/>
+  </p:clrMapOvr>
+</p:notes>
+</file>
+
+<file path=ppt/notesSlides/notesSlide8.xml><?xml version="1.0" encoding="utf-8"?>
+<p:notes xmlns:a="http://schemas.openxmlformats.org/drawingml/2006/main" xmlns:r="http://schemas.openxmlformats.org/officeDocument/2006/relationships" xmlns:p="http://schemas.openxmlformats.org/presentationml/2006/main">
+  <p:cSld>
+    <p:spTree>
+      <p:nvGrpSpPr>
+        <p:cNvPr id="1" name=""/>
+        <p:cNvGrpSpPr/>
+        <p:nvPr/>
+      </p:nvGrpSpPr>
+      <p:grpSpPr>
+        <a:xfrm>
+          <a:off x="0" y="0"/>
+          <a:ext cx="0" cy="0"/>
+          <a:chOff x="0" y="0"/>
+          <a:chExt cx="0" cy="0"/>
+        </a:xfrm>
+      </p:grpSpPr>
+      <p:sp>
+        <p:nvSpPr>
+          <p:cNvPr id="2" name="Slide Image Placeholder 1"/>
+          <p:cNvSpPr>
+            <a:spLocks noGrp="1" noRot="1" noChangeAspect="1"/>
+          </p:cNvSpPr>
+          <p:nvPr>
+            <p:ph type="sldImg"/>
+          </p:nvPr>
+        </p:nvSpPr>
+        <p:spPr/>
+      </p:sp>
+      <p:sp>
+        <p:nvSpPr>
+          <p:cNvPr id="3" name="Notes Placeholder 2"/>
+          <p:cNvSpPr>
+            <a:spLocks noGrp="1"/>
+          </p:cNvSpPr>
+          <p:nvPr>
+            <p:ph type="body" idx="1"/>
+          </p:nvPr>
+        </p:nvSpPr>
+        <p:spPr/>
+        <p:txBody>
+          <a:bodyPr/>
+          <a:lstStyle/>
+          <a:p>
+            <a:r>
+              <a:rPr lang="en-US" dirty="0"/>
+              <a:t/>
+            </a:r>
+            <a:endParaRPr lang="en-US" dirty="0"/>
+          </a:p>
+        </p:txBody>
+      </p:sp>
+      <p:sp>
+        <p:nvSpPr>
+          <p:cNvPr id="4" name="Slide Number Placeholder 3"/>
+          <p:cNvSpPr>
+            <a:spLocks noGrp="1"/>
+          </p:cNvSpPr>
+          <p:nvPr>
+            <p:ph type="sldNum" sz="quarter" idx="10"/>
+          </p:nvPr>
+        </p:nvSpPr>
+        <p:spPr/>
+        <p:txBody>
+          <a:bodyPr/>
+          <a:lstStyle/>
+          <a:p>
+            <a:fld id="{F7021451-1387-4CA6-816F-3879F97B5CBC}" type="slidenum">
+              <a:rPr lang="en-US"/>
+              <a:t>8</a:t>
+            </a:fld>
+            <a:endParaRPr lang="en-US"/>
+          </a:p>
+        </p:txBody>
+      </p:sp>
+    </p:spTree>
+    <p:extLst>
+      <p:ext uri="{BB962C8B-B14F-4D97-AF65-F5344CB8AC3E}">
+        <p14:creationId xmlns:p14="http://schemas.microsoft.com/office/powerpoint/2010/main" val="1024086991"/>
+      </p:ext>
+    </p:extLst>
+  </p:cSld>
+  <p:clrMapOvr>
+    <a:masterClrMapping/>
+  </p:clrMapOvr>
+</p:notes>
+</file>
+
+<file path=ppt/notesSlides/notesSlide9.xml><?xml version="1.0" encoding="utf-8"?>
+<p:notes xmlns:a="http://schemas.openxmlformats.org/drawingml/2006/main" xmlns:r="http://schemas.openxmlformats.org/officeDocument/2006/relationships" xmlns:p="http://schemas.openxmlformats.org/presentationml/2006/main">
+  <p:cSld>
+    <p:spTree>
+      <p:nvGrpSpPr>
+        <p:cNvPr id="1" name=""/>
+        <p:cNvGrpSpPr/>
+        <p:nvPr/>
+      </p:nvGrpSpPr>
+      <p:grpSpPr>
+        <a:xfrm>
+          <a:off x="0" y="0"/>
+          <a:ext cx="0" cy="0"/>
+          <a:chOff x="0" y="0"/>
+          <a:chExt cx="0" cy="0"/>
+        </a:xfrm>
+      </p:grpSpPr>
+      <p:sp>
+        <p:nvSpPr>
+          <p:cNvPr id="2" name="Slide Image Placeholder 1"/>
+          <p:cNvSpPr>
+            <a:spLocks noGrp="1" noRot="1" noChangeAspect="1"/>
+          </p:cNvSpPr>
+          <p:nvPr>
+            <p:ph type="sldImg"/>
+          </p:nvPr>
+        </p:nvSpPr>
+        <p:spPr/>
+      </p:sp>
+      <p:sp>
+        <p:nvSpPr>
+          <p:cNvPr id="3" name="Notes Placeholder 2"/>
+          <p:cNvSpPr>
+            <a:spLocks noGrp="1"/>
+          </p:cNvSpPr>
+          <p:nvPr>
+            <p:ph type="body" idx="1"/>
+          </p:nvPr>
+        </p:nvSpPr>
+        <p:spPr/>
+        <p:txBody>
+          <a:bodyPr/>
+          <a:lstStyle/>
+          <a:p>
+            <a:r>
+              <a:rPr lang="en-US" dirty="0"/>
+              <a:t/>
+            </a:r>
+            <a:endParaRPr lang="en-US" dirty="0"/>
+          </a:p>
+        </p:txBody>
+      </p:sp>
+      <p:sp>
+        <p:nvSpPr>
+          <p:cNvPr id="4" name="Slide Number Placeholder 3"/>
+          <p:cNvSpPr>
+            <a:spLocks noGrp="1"/>
+          </p:cNvSpPr>
+          <p:nvPr>
+            <p:ph type="sldNum" sz="quarter" idx="10"/>
+          </p:nvPr>
+        </p:nvSpPr>
+        <p:spPr/>
+        <p:txBody>
+          <a:bodyPr/>
+          <a:lstStyle/>
+          <a:p>
+            <a:fld id="{F7021451-1387-4CA6-816F-3879F97B5CBC}" type="slidenum">
+              <a:rPr lang="en-US"/>
+              <a:t>9</a:t>
             </a:fld>
             <a:endParaRPr lang="en-US"/>
           </a:p>
@@ -1232,8 +1944,8 @@
         </p:nvSpPr>
         <p:spPr>
           <a:xfrm>
-            <a:off x="457200" y="365760"/>
-            <a:ext cx="10972800" cy="914400"/>
+            <a:off x="365760" y="274320"/>
+            <a:ext cx="11430000" cy="914400"/>
           </a:xfrm>
           <a:prstGeom prst="rect">
             <a:avLst/>
@@ -1249,28 +1961,28 @@
               <a:buNone/>
             </a:pPr>
             <a:r>
-              <a:rPr lang="en-US" sz="3000" b="1" dirty="0">
+              <a:rPr lang="en-US" sz="2800" b="1" dirty="0">
                 <a:solidFill>
                   <a:srgbClr val="000000"/>
                 </a:solidFill>
               </a:rPr>
               <a:t>Mill River Salt-Pile Relocation</a:t>
             </a:r>
-            <a:endParaRPr lang="en-US" sz="3000" dirty="0"/>
+            <a:endParaRPr lang="en-US" sz="2800" dirty="0"/>
           </a:p>
           <a:p>
             <a:pPr indent="0" marL="0">
               <a:buNone/>
             </a:pPr>
             <a:r>
-              <a:rPr lang="en-US" sz="3000" b="1" dirty="0">
+              <a:rPr lang="en-US" sz="2800" b="1" dirty="0">
                 <a:solidFill>
                   <a:srgbClr val="000000"/>
                 </a:solidFill>
               </a:rPr>
-              <a:t>Stakeholder Map</a:t>
-            </a:r>
-            <a:endParaRPr lang="en-US" sz="3000" dirty="0"/>
+              <a:t>Stakeholder Map (DOCX-style fields)</a:t>
+            </a:r>
+            <a:endParaRPr lang="en-US" sz="2800" dirty="0"/>
           </a:p>
         </p:txBody>
       </p:sp>
@@ -1282,8 +1994,8 @@
         </p:nvSpPr>
         <p:spPr>
           <a:xfrm>
-            <a:off x="457200" y="1463040"/>
-            <a:ext cx="10972800" cy="548640"/>
+            <a:off x="457200" y="1325880"/>
+            <a:ext cx="10972800" cy="365760"/>
           </a:xfrm>
           <a:prstGeom prst="rect">
             <a:avLst/>
@@ -1299,14 +2011,1302 @@
               <a:buNone/>
             </a:pPr>
             <a:r>
-              <a:rPr lang="en-US" sz="1400" dirty="0">
+              <a:rPr lang="en-US" sz="1300" dirty="0">
                 <a:solidFill>
                   <a:srgbClr val="444444"/>
                 </a:solidFill>
               </a:rPr>
-              <a:t>Influence level, likely position, interests, and source-validated justification</a:t>
-            </a:r>
-            <a:endParaRPr lang="en-US" sz="1400" dirty="0"/>
+              <a:t>Fields: Likely interests | Practical levers | Influence | Notes grounded in record</a:t>
+            </a:r>
+            <a:endParaRPr lang="en-US" sz="1300" dirty="0"/>
+          </a:p>
+        </p:txBody>
+      </p:sp>
+    </p:spTree>
+  </p:cSld>
+  <p:clrMapOvr>
+    <a:masterClrMapping/>
+  </p:clrMapOvr>
+</p:sld>
+</file>
+
+<file path=ppt/slides/slide10.xml><?xml version="1.0" encoding="utf-8"?>
+<p:sld xmlns:a="http://schemas.openxmlformats.org/drawingml/2006/main" xmlns:r="http://schemas.openxmlformats.org/officeDocument/2006/relationships" xmlns:p="http://schemas.openxmlformats.org/presentationml/2006/main">
+  <p:cSld name="Slide 10">
+    <p:spTree>
+      <p:nvGrpSpPr>
+        <p:cNvPr id="1" name=""/>
+        <p:cNvGrpSpPr/>
+        <p:nvPr/>
+      </p:nvGrpSpPr>
+      <p:grpSpPr>
+        <a:xfrm>
+          <a:off x="0" y="0"/>
+          <a:ext cx="0" cy="0"/>
+          <a:chOff x="0" y="0"/>
+          <a:chExt cx="0" cy="0"/>
+        </a:xfrm>
+      </p:grpSpPr>
+      <p:sp>
+        <p:nvSpPr>
+          <p:cNvPr id="2" name="Text 0"/>
+          <p:cNvSpPr/>
+          <p:nvPr/>
+        </p:nvSpPr>
+        <p:spPr>
+          <a:xfrm>
+            <a:off x="274320" y="182880"/>
+            <a:ext cx="11521440" cy="457200"/>
+          </a:xfrm>
+          <a:prstGeom prst="rect">
+            <a:avLst/>
+          </a:prstGeom>
+          <a:noFill/>
+          <a:ln/>
+        </p:spPr>
+        <p:txBody>
+          <a:bodyPr wrap="square" rtlCol="0" anchor="ctr"/>
+          <a:lstStyle/>
+          <a:p>
+            <a:pPr indent="0" marL="0">
+              <a:buNone/>
+            </a:pPr>
+            <a:r>
+              <a:rPr lang="en-US" sz="1800" b="1" dirty="0">
+                <a:solidFill>
+                  <a:srgbClr val="000000"/>
+                </a:solidFill>
+              </a:rPr>
+              <a:t>Justification — CT Port Authority + New Haven Port Authority</a:t>
+            </a:r>
+            <a:endParaRPr lang="en-US" sz="1800" dirty="0"/>
+          </a:p>
+        </p:txBody>
+      </p:sp>
+      <p:sp>
+        <p:nvSpPr>
+          <p:cNvPr id="3" name="Text 1"/>
+          <p:cNvSpPr/>
+          <p:nvPr/>
+        </p:nvSpPr>
+        <p:spPr>
+          <a:xfrm>
+            <a:off x="365760" y="822960"/>
+            <a:ext cx="11155680" cy="914400"/>
+          </a:xfrm>
+          <a:prstGeom prst="rect">
+            <a:avLst/>
+          </a:prstGeom>
+          <a:noFill/>
+          <a:ln/>
+        </p:spPr>
+        <p:txBody>
+          <a:bodyPr wrap="square" rtlCol="0" anchor="ctr"/>
+          <a:lstStyle/>
+          <a:p>
+            <a:pPr indent="0" marL="0">
+              <a:buNone/>
+            </a:pPr>
+            <a:r>
+              <a:rPr lang="en-US" sz="1200" dirty="0">
+                <a:solidFill>
+                  <a:srgbClr val="000000"/>
+                </a:solidFill>
+              </a:rPr>
+              <a:t>Likely interests: Port competitiveness and throughput; infrastructure modernization; reduced conflict between port operations and community expectations.</a:t>
+            </a:r>
+            <a:endParaRPr lang="en-US" sz="1200" dirty="0"/>
+          </a:p>
+        </p:txBody>
+      </p:sp>
+      <p:sp>
+        <p:nvSpPr>
+          <p:cNvPr id="4" name="Text 2"/>
+          <p:cNvSpPr/>
+          <p:nvPr/>
+        </p:nvSpPr>
+        <p:spPr>
+          <a:xfrm>
+            <a:off x="365760" y="1737360"/>
+            <a:ext cx="11155680" cy="1188720"/>
+          </a:xfrm>
+          <a:prstGeom prst="rect">
+            <a:avLst/>
+          </a:prstGeom>
+          <a:noFill/>
+          <a:ln/>
+        </p:spPr>
+        <p:txBody>
+          <a:bodyPr wrap="square" rtlCol="0" anchor="ctr"/>
+          <a:lstStyle/>
+          <a:p>
+            <a:pPr indent="0" marL="0">
+              <a:buNone/>
+            </a:pPr>
+            <a:r>
+              <a:rPr lang="en-US" sz="1200" dirty="0">
+                <a:solidFill>
+                  <a:srgbClr val="000000"/>
+                </a:solidFill>
+              </a:rPr>
+              <a:t>Influence (Medium) rationale: Port authorities appear as partners in funding/implementation context for New Haven port improvements tied to cargo/rail capability.</a:t>
+            </a:r>
+            <a:endParaRPr lang="en-US" sz="1200" dirty="0"/>
+          </a:p>
+        </p:txBody>
+      </p:sp>
+      <p:sp>
+        <p:nvSpPr>
+          <p:cNvPr id="5" name="Text 3"/>
+          <p:cNvSpPr/>
+          <p:nvPr/>
+        </p:nvSpPr>
+        <p:spPr>
+          <a:xfrm>
+            <a:off x="365760" y="2926080"/>
+            <a:ext cx="11155680" cy="914400"/>
+          </a:xfrm>
+          <a:prstGeom prst="rect">
+            <a:avLst/>
+          </a:prstGeom>
+          <a:noFill/>
+          <a:ln/>
+        </p:spPr>
+        <p:txBody>
+          <a:bodyPr wrap="square" rtlCol="0" anchor="ctr"/>
+          <a:lstStyle/>
+          <a:p>
+            <a:pPr indent="0" marL="0">
+              <a:buNone/>
+            </a:pPr>
+            <a:r>
+              <a:rPr lang="en-US" sz="1200" dirty="0">
+                <a:solidFill>
+                  <a:srgbClr val="000000"/>
+                </a:solidFill>
+              </a:rPr>
+              <a:t>Practical levers: Project partnership and infrastructure coordination; influence over port-adjacent capital program sequencing.</a:t>
+            </a:r>
+            <a:endParaRPr lang="en-US" sz="1200" dirty="0"/>
+          </a:p>
+        </p:txBody>
+      </p:sp>
+      <p:sp>
+        <p:nvSpPr>
+          <p:cNvPr id="6" name="Text 4"/>
+          <p:cNvSpPr/>
+          <p:nvPr/>
+        </p:nvSpPr>
+        <p:spPr>
+          <a:xfrm>
+            <a:off x="365760" y="3931920"/>
+            <a:ext cx="1828800" cy="274320"/>
+          </a:xfrm>
+          <a:prstGeom prst="rect">
+            <a:avLst/>
+          </a:prstGeom>
+          <a:noFill/>
+          <a:ln/>
+        </p:spPr>
+        <p:txBody>
+          <a:bodyPr wrap="square" rtlCol="0" anchor="ctr"/>
+          <a:lstStyle/>
+          <a:p>
+            <a:pPr indent="0" marL="0">
+              <a:buNone/>
+            </a:pPr>
+            <a:r>
+              <a:rPr lang="en-US" sz="1200" b="1" dirty="0">
+                <a:solidFill>
+                  <a:srgbClr val="000000"/>
+                </a:solidFill>
+              </a:rPr>
+              <a:t>Sources:</a:t>
+            </a:r>
+            <a:endParaRPr lang="en-US" sz="1200" dirty="0"/>
+          </a:p>
+        </p:txBody>
+      </p:sp>
+      <p:sp>
+        <p:nvSpPr>
+          <p:cNvPr id="7" name="Text 5"/>
+          <p:cNvSpPr/>
+          <p:nvPr/>
+        </p:nvSpPr>
+        <p:spPr>
+          <a:xfrm>
+            <a:off x="548640" y="4206240"/>
+            <a:ext cx="10972800" cy="320040"/>
+          </a:xfrm>
+          <a:prstGeom prst="rect">
+            <a:avLst/>
+          </a:prstGeom>
+          <a:noFill/>
+          <a:ln/>
+        </p:spPr>
+        <p:txBody>
+          <a:bodyPr wrap="square" rtlCol="0" anchor="ctr"/>
+          <a:lstStyle/>
+          <a:p>
+            <a:pPr indent="0" marL="0">
+              <a:buNone/>
+            </a:pPr>
+            <a:r>
+              <a:rPr lang="en-US" sz="1000" dirty="0">
+                <a:solidFill>
+                  <a:srgbClr val="333333"/>
+                </a:solidFill>
+              </a:rPr>
+              <a:t>• https://www.epa.gov/newsreleases/biden-harris-administration-announces-nearly-40-million-clean-ports-investments</a:t>
+            </a:r>
+            <a:endParaRPr lang="en-US" sz="1000" dirty="0"/>
+          </a:p>
+        </p:txBody>
+      </p:sp>
+      <p:sp>
+        <p:nvSpPr>
+          <p:cNvPr id="8" name="Text 6"/>
+          <p:cNvSpPr/>
+          <p:nvPr/>
+        </p:nvSpPr>
+        <p:spPr>
+          <a:xfrm>
+            <a:off x="548640" y="4535424"/>
+            <a:ext cx="10972800" cy="320040"/>
+          </a:xfrm>
+          <a:prstGeom prst="rect">
+            <a:avLst/>
+          </a:prstGeom>
+          <a:noFill/>
+          <a:ln/>
+        </p:spPr>
+        <p:txBody>
+          <a:bodyPr wrap="square" rtlCol="0" anchor="ctr"/>
+          <a:lstStyle/>
+          <a:p>
+            <a:pPr indent="0" marL="0">
+              <a:buNone/>
+            </a:pPr>
+            <a:r>
+              <a:rPr lang="en-US" sz="1000" dirty="0">
+                <a:solidFill>
+                  <a:srgbClr val="333333"/>
+                </a:solidFill>
+              </a:rPr>
+              <a:t>• https://enstructure.com/enstructure-to-receive-11-2-million-federal-grant-to-add-two-new-railyards-and-new-railroad-track-in-new-haven-ct/</a:t>
+            </a:r>
+            <a:endParaRPr lang="en-US" sz="1000" dirty="0"/>
+          </a:p>
+        </p:txBody>
+      </p:sp>
+    </p:spTree>
+  </p:cSld>
+  <p:clrMapOvr>
+    <a:masterClrMapping/>
+  </p:clrMapOvr>
+</p:sld>
+</file>
+
+<file path=ppt/slides/slide11.xml><?xml version="1.0" encoding="utf-8"?>
+<p:sld xmlns:a="http://schemas.openxmlformats.org/drawingml/2006/main" xmlns:r="http://schemas.openxmlformats.org/officeDocument/2006/relationships" xmlns:p="http://schemas.openxmlformats.org/presentationml/2006/main">
+  <p:cSld name="Slide 11">
+    <p:spTree>
+      <p:nvGrpSpPr>
+        <p:cNvPr id="1" name=""/>
+        <p:cNvGrpSpPr/>
+        <p:nvPr/>
+      </p:nvGrpSpPr>
+      <p:grpSpPr>
+        <a:xfrm>
+          <a:off x="0" y="0"/>
+          <a:ext cx="0" cy="0"/>
+          <a:chOff x="0" y="0"/>
+          <a:chExt cx="0" cy="0"/>
+        </a:xfrm>
+      </p:grpSpPr>
+      <p:sp>
+        <p:nvSpPr>
+          <p:cNvPr id="2" name="Text 0"/>
+          <p:cNvSpPr/>
+          <p:nvPr/>
+        </p:nvSpPr>
+        <p:spPr>
+          <a:xfrm>
+            <a:off x="274320" y="182880"/>
+            <a:ext cx="11521440" cy="457200"/>
+          </a:xfrm>
+          <a:prstGeom prst="rect">
+            <a:avLst/>
+          </a:prstGeom>
+          <a:noFill/>
+          <a:ln/>
+        </p:spPr>
+        <p:txBody>
+          <a:bodyPr wrap="square" rtlCol="0" anchor="ctr"/>
+          <a:lstStyle/>
+          <a:p>
+            <a:pPr indent="0" marL="0">
+              <a:buNone/>
+            </a:pPr>
+            <a:r>
+              <a:rPr lang="en-US" sz="1800" b="1" dirty="0">
+                <a:solidFill>
+                  <a:srgbClr val="000000"/>
+                </a:solidFill>
+              </a:rPr>
+              <a:t>Justification — US Army Corps of Engineers (USACE)</a:t>
+            </a:r>
+            <a:endParaRPr lang="en-US" sz="1800" dirty="0"/>
+          </a:p>
+        </p:txBody>
+      </p:sp>
+      <p:sp>
+        <p:nvSpPr>
+          <p:cNvPr id="3" name="Text 1"/>
+          <p:cNvSpPr/>
+          <p:nvPr/>
+        </p:nvSpPr>
+        <p:spPr>
+          <a:xfrm>
+            <a:off x="365760" y="822960"/>
+            <a:ext cx="11155680" cy="914400"/>
+          </a:xfrm>
+          <a:prstGeom prst="rect">
+            <a:avLst/>
+          </a:prstGeom>
+          <a:noFill/>
+          <a:ln/>
+        </p:spPr>
+        <p:txBody>
+          <a:bodyPr wrap="square" rtlCol="0" anchor="ctr"/>
+          <a:lstStyle/>
+          <a:p>
+            <a:pPr indent="0" marL="0">
+              <a:buNone/>
+            </a:pPr>
+            <a:r>
+              <a:rPr lang="en-US" sz="1200" dirty="0">
+                <a:solidFill>
+                  <a:srgbClr val="000000"/>
+                </a:solidFill>
+              </a:rPr>
+              <a:t>Likely interests: Harbor/navigation efficiency and economic performance of commodity flow through New Haven.</a:t>
+            </a:r>
+            <a:endParaRPr lang="en-US" sz="1200" dirty="0"/>
+          </a:p>
+        </p:txBody>
+      </p:sp>
+      <p:sp>
+        <p:nvSpPr>
+          <p:cNvPr id="4" name="Text 2"/>
+          <p:cNvSpPr/>
+          <p:nvPr/>
+        </p:nvSpPr>
+        <p:spPr>
+          <a:xfrm>
+            <a:off x="365760" y="1737360"/>
+            <a:ext cx="11155680" cy="1188720"/>
+          </a:xfrm>
+          <a:prstGeom prst="rect">
+            <a:avLst/>
+          </a:prstGeom>
+          <a:noFill/>
+          <a:ln/>
+        </p:spPr>
+        <p:txBody>
+          <a:bodyPr wrap="square" rtlCol="0" anchor="ctr"/>
+          <a:lstStyle/>
+          <a:p>
+            <a:pPr indent="0" marL="0">
+              <a:buNone/>
+            </a:pPr>
+            <a:r>
+              <a:rPr lang="en-US" sz="1200" dirty="0">
+                <a:solidFill>
+                  <a:srgbClr val="000000"/>
+                </a:solidFill>
+              </a:rPr>
+              <a:t>Influence (Medium) rationale: USACE appendix identifies salt as major imported commodity and references terminal storage role in harbor supply chain.</a:t>
+            </a:r>
+            <a:endParaRPr lang="en-US" sz="1200" dirty="0"/>
+          </a:p>
+        </p:txBody>
+      </p:sp>
+      <p:sp>
+        <p:nvSpPr>
+          <p:cNvPr id="5" name="Text 3"/>
+          <p:cNvSpPr/>
+          <p:nvPr/>
+        </p:nvSpPr>
+        <p:spPr>
+          <a:xfrm>
+            <a:off x="365760" y="2926080"/>
+            <a:ext cx="11155680" cy="914400"/>
+          </a:xfrm>
+          <a:prstGeom prst="rect">
+            <a:avLst/>
+          </a:prstGeom>
+          <a:noFill/>
+          <a:ln/>
+        </p:spPr>
+        <p:txBody>
+          <a:bodyPr wrap="square" rtlCol="0" anchor="ctr"/>
+          <a:lstStyle/>
+          <a:p>
+            <a:pPr indent="0" marL="0">
+              <a:buNone/>
+            </a:pPr>
+            <a:r>
+              <a:rPr lang="en-US" sz="1200" dirty="0">
+                <a:solidFill>
+                  <a:srgbClr val="000000"/>
+                </a:solidFill>
+              </a:rPr>
+              <a:t>Practical levers: Planning and documentation influence for navigation/economic framing; federal harbor project context.</a:t>
+            </a:r>
+            <a:endParaRPr lang="en-US" sz="1200" dirty="0"/>
+          </a:p>
+        </p:txBody>
+      </p:sp>
+      <p:sp>
+        <p:nvSpPr>
+          <p:cNvPr id="6" name="Text 4"/>
+          <p:cNvSpPr/>
+          <p:nvPr/>
+        </p:nvSpPr>
+        <p:spPr>
+          <a:xfrm>
+            <a:off x="365760" y="3931920"/>
+            <a:ext cx="1828800" cy="274320"/>
+          </a:xfrm>
+          <a:prstGeom prst="rect">
+            <a:avLst/>
+          </a:prstGeom>
+          <a:noFill/>
+          <a:ln/>
+        </p:spPr>
+        <p:txBody>
+          <a:bodyPr wrap="square" rtlCol="0" anchor="ctr"/>
+          <a:lstStyle/>
+          <a:p>
+            <a:pPr indent="0" marL="0">
+              <a:buNone/>
+            </a:pPr>
+            <a:r>
+              <a:rPr lang="en-US" sz="1200" b="1" dirty="0">
+                <a:solidFill>
+                  <a:srgbClr val="000000"/>
+                </a:solidFill>
+              </a:rPr>
+              <a:t>Sources:</a:t>
+            </a:r>
+            <a:endParaRPr lang="en-US" sz="1200" dirty="0"/>
+          </a:p>
+        </p:txBody>
+      </p:sp>
+      <p:sp>
+        <p:nvSpPr>
+          <p:cNvPr id="7" name="Text 5"/>
+          <p:cNvSpPr/>
+          <p:nvPr/>
+        </p:nvSpPr>
+        <p:spPr>
+          <a:xfrm>
+            <a:off x="548640" y="4206240"/>
+            <a:ext cx="10972800" cy="320040"/>
+          </a:xfrm>
+          <a:prstGeom prst="rect">
+            <a:avLst/>
+          </a:prstGeom>
+          <a:noFill/>
+          <a:ln/>
+        </p:spPr>
+        <p:txBody>
+          <a:bodyPr wrap="square" rtlCol="0" anchor="ctr"/>
+          <a:lstStyle/>
+          <a:p>
+            <a:pPr indent="0" marL="0">
+              <a:buNone/>
+            </a:pPr>
+            <a:r>
+              <a:rPr lang="en-US" sz="1000" dirty="0">
+                <a:solidFill>
+                  <a:srgbClr val="333333"/>
+                </a:solidFill>
+              </a:rPr>
+              <a:t>• https://www.nae.usace.army.mil/Portals/74/docs/Topics/New%20Haven/2020/05-AppendixCEconomcisNewHavenHarborNavigationImprovementProject%20_FinalJanuary2020.pdf</a:t>
+            </a:r>
+            <a:endParaRPr lang="en-US" sz="1000" dirty="0"/>
+          </a:p>
+        </p:txBody>
+      </p:sp>
+    </p:spTree>
+  </p:cSld>
+  <p:clrMapOvr>
+    <a:masterClrMapping/>
+  </p:clrMapOvr>
+</p:sld>
+</file>
+
+<file path=ppt/slides/slide12.xml><?xml version="1.0" encoding="utf-8"?>
+<p:sld xmlns:a="http://schemas.openxmlformats.org/drawingml/2006/main" xmlns:r="http://schemas.openxmlformats.org/officeDocument/2006/relationships" xmlns:p="http://schemas.openxmlformats.org/presentationml/2006/main">
+  <p:cSld name="Slide 12">
+    <p:spTree>
+      <p:nvGrpSpPr>
+        <p:cNvPr id="1" name=""/>
+        <p:cNvGrpSpPr/>
+        <p:nvPr/>
+      </p:nvGrpSpPr>
+      <p:grpSpPr>
+        <a:xfrm>
+          <a:off x="0" y="0"/>
+          <a:ext cx="0" cy="0"/>
+          <a:chOff x="0" y="0"/>
+          <a:chExt cx="0" cy="0"/>
+        </a:xfrm>
+      </p:grpSpPr>
+      <p:sp>
+        <p:nvSpPr>
+          <p:cNvPr id="2" name="Text 0"/>
+          <p:cNvSpPr/>
+          <p:nvPr/>
+        </p:nvSpPr>
+        <p:spPr>
+          <a:xfrm>
+            <a:off x="274320" y="182880"/>
+            <a:ext cx="11521440" cy="457200"/>
+          </a:xfrm>
+          <a:prstGeom prst="rect">
+            <a:avLst/>
+          </a:prstGeom>
+          <a:noFill/>
+          <a:ln/>
+        </p:spPr>
+        <p:txBody>
+          <a:bodyPr wrap="square" rtlCol="0" anchor="ctr"/>
+          <a:lstStyle/>
+          <a:p>
+            <a:pPr indent="0" marL="0">
+              <a:buNone/>
+            </a:pPr>
+            <a:r>
+              <a:rPr lang="en-US" sz="1800" b="1" dirty="0">
+                <a:solidFill>
+                  <a:srgbClr val="000000"/>
+                </a:solidFill>
+              </a:rPr>
+              <a:t>Justification — Community and advocacy stakeholders (Save the Sound, EAC, nearby residents)</a:t>
+            </a:r>
+            <a:endParaRPr lang="en-US" sz="1800" dirty="0"/>
+          </a:p>
+        </p:txBody>
+      </p:sp>
+      <p:sp>
+        <p:nvSpPr>
+          <p:cNvPr id="3" name="Text 1"/>
+          <p:cNvSpPr/>
+          <p:nvPr/>
+        </p:nvSpPr>
+        <p:spPr>
+          <a:xfrm>
+            <a:off x="365760" y="822960"/>
+            <a:ext cx="11155680" cy="914400"/>
+          </a:xfrm>
+          <a:prstGeom prst="rect">
+            <a:avLst/>
+          </a:prstGeom>
+          <a:noFill/>
+          <a:ln/>
+        </p:spPr>
+        <p:txBody>
+          <a:bodyPr wrap="square" rtlCol="0" anchor="ctr"/>
+          <a:lstStyle/>
+          <a:p>
+            <a:pPr indent="0" marL="0">
+              <a:buNone/>
+            </a:pPr>
+            <a:r>
+              <a:rPr lang="en-US" sz="1200" dirty="0">
+                <a:solidFill>
+                  <a:srgbClr val="000000"/>
+                </a:solidFill>
+              </a:rPr>
+              <a:t>Likely interests: Reduce river-edge exposure and nuisance impacts; stronger controls/monitoring transparency; align use of waterfront with community priorities.</a:t>
+            </a:r>
+            <a:endParaRPr lang="en-US" sz="1200" dirty="0"/>
+          </a:p>
+        </p:txBody>
+      </p:sp>
+      <p:sp>
+        <p:nvSpPr>
+          <p:cNvPr id="4" name="Text 2"/>
+          <p:cNvSpPr/>
+          <p:nvPr/>
+        </p:nvSpPr>
+        <p:spPr>
+          <a:xfrm>
+            <a:off x="365760" y="1737360"/>
+            <a:ext cx="11155680" cy="1188720"/>
+          </a:xfrm>
+          <a:prstGeom prst="rect">
+            <a:avLst/>
+          </a:prstGeom>
+          <a:noFill/>
+          <a:ln/>
+        </p:spPr>
+        <p:txBody>
+          <a:bodyPr wrap="square" rtlCol="0" anchor="ctr"/>
+          <a:lstStyle/>
+          <a:p>
+            <a:pPr indent="0" marL="0">
+              <a:buNone/>
+            </a:pPr>
+            <a:r>
+              <a:rPr lang="en-US" sz="1200" dirty="0">
+                <a:solidFill>
+                  <a:srgbClr val="000000"/>
+                </a:solidFill>
+              </a:rPr>
+              <a:t>Influence (Medium) rationale: Hearing record and reporting capture sustained public comment pressure on siting, coverage quality, and monitoring adequacy.</a:t>
+            </a:r>
+            <a:endParaRPr lang="en-US" sz="1200" dirty="0"/>
+          </a:p>
+        </p:txBody>
+      </p:sp>
+      <p:sp>
+        <p:nvSpPr>
+          <p:cNvPr id="5" name="Text 3"/>
+          <p:cNvSpPr/>
+          <p:nvPr/>
+        </p:nvSpPr>
+        <p:spPr>
+          <a:xfrm>
+            <a:off x="365760" y="2926080"/>
+            <a:ext cx="11155680" cy="914400"/>
+          </a:xfrm>
+          <a:prstGeom prst="rect">
+            <a:avLst/>
+          </a:prstGeom>
+          <a:noFill/>
+          <a:ln/>
+        </p:spPr>
+        <p:txBody>
+          <a:bodyPr wrap="square" rtlCol="0" anchor="ctr"/>
+          <a:lstStyle/>
+          <a:p>
+            <a:pPr indent="0" marL="0">
+              <a:buNone/>
+            </a:pPr>
+            <a:r>
+              <a:rPr lang="en-US" sz="1200" dirty="0">
+                <a:solidFill>
+                  <a:srgbClr val="000000"/>
+                </a:solidFill>
+              </a:rPr>
+              <a:t>Practical levers: Public testimony, comment campaigns, media visibility, issue framing in EJ/community terms.</a:t>
+            </a:r>
+            <a:endParaRPr lang="en-US" sz="1200" dirty="0"/>
+          </a:p>
+        </p:txBody>
+      </p:sp>
+      <p:sp>
+        <p:nvSpPr>
+          <p:cNvPr id="6" name="Text 4"/>
+          <p:cNvSpPr/>
+          <p:nvPr/>
+        </p:nvSpPr>
+        <p:spPr>
+          <a:xfrm>
+            <a:off x="365760" y="3931920"/>
+            <a:ext cx="1828800" cy="274320"/>
+          </a:xfrm>
+          <a:prstGeom prst="rect">
+            <a:avLst/>
+          </a:prstGeom>
+          <a:noFill/>
+          <a:ln/>
+        </p:spPr>
+        <p:txBody>
+          <a:bodyPr wrap="square" rtlCol="0" anchor="ctr"/>
+          <a:lstStyle/>
+          <a:p>
+            <a:pPr indent="0" marL="0">
+              <a:buNone/>
+            </a:pPr>
+            <a:r>
+              <a:rPr lang="en-US" sz="1200" b="1" dirty="0">
+                <a:solidFill>
+                  <a:srgbClr val="000000"/>
+                </a:solidFill>
+              </a:rPr>
+              <a:t>Sources:</a:t>
+            </a:r>
+            <a:endParaRPr lang="en-US" sz="1200" dirty="0"/>
+          </a:p>
+        </p:txBody>
+      </p:sp>
+      <p:sp>
+        <p:nvSpPr>
+          <p:cNvPr id="7" name="Text 5"/>
+          <p:cNvSpPr/>
+          <p:nvPr/>
+        </p:nvSpPr>
+        <p:spPr>
+          <a:xfrm>
+            <a:off x="548640" y="4206240"/>
+            <a:ext cx="10972800" cy="320040"/>
+          </a:xfrm>
+          <a:prstGeom prst="rect">
+            <a:avLst/>
+          </a:prstGeom>
+          <a:noFill/>
+          <a:ln/>
+        </p:spPr>
+        <p:txBody>
+          <a:bodyPr wrap="square" rtlCol="0" anchor="ctr"/>
+          <a:lstStyle/>
+          <a:p>
+            <a:pPr indent="0" marL="0">
+              <a:buNone/>
+            </a:pPr>
+            <a:r>
+              <a:rPr lang="en-US" sz="1000" dirty="0">
+                <a:solidFill>
+                  <a:srgbClr val="333333"/>
+                </a:solidFill>
+              </a:rPr>
+              <a:t>• https://portal.ct.gov/-/media/deep/adjudications/hearing-officer-reports/20251029-industrial-general-permit-ctr05000093-hor.pdf</a:t>
+            </a:r>
+            <a:endParaRPr lang="en-US" sz="1000" dirty="0"/>
+          </a:p>
+        </p:txBody>
+      </p:sp>
+      <p:sp>
+        <p:nvSpPr>
+          <p:cNvPr id="8" name="Text 6"/>
+          <p:cNvSpPr/>
+          <p:nvPr/>
+        </p:nvSpPr>
+        <p:spPr>
+          <a:xfrm>
+            <a:off x="548640" y="4535424"/>
+            <a:ext cx="10972800" cy="320040"/>
+          </a:xfrm>
+          <a:prstGeom prst="rect">
+            <a:avLst/>
+          </a:prstGeom>
+          <a:noFill/>
+          <a:ln/>
+        </p:spPr>
+        <p:txBody>
+          <a:bodyPr wrap="square" rtlCol="0" anchor="ctr"/>
+          <a:lstStyle/>
+          <a:p>
+            <a:pPr indent="0" marL="0">
+              <a:buNone/>
+            </a:pPr>
+            <a:r>
+              <a:rPr lang="en-US" sz="1000" dirty="0">
+                <a:solidFill>
+                  <a:srgbClr val="333333"/>
+                </a:solidFill>
+              </a:rPr>
+              <a:t>• https://www.newhavenindependent.org/2025/05/15/deep_salt_pile_hearing/</a:t>
+            </a:r>
+            <a:endParaRPr lang="en-US" sz="1000" dirty="0"/>
+          </a:p>
+        </p:txBody>
+      </p:sp>
+    </p:spTree>
+  </p:cSld>
+  <p:clrMapOvr>
+    <a:masterClrMapping/>
+  </p:clrMapOvr>
+</p:sld>
+</file>
+
+<file path=ppt/slides/slide13.xml><?xml version="1.0" encoding="utf-8"?>
+<p:sld xmlns:a="http://schemas.openxmlformats.org/drawingml/2006/main" xmlns:r="http://schemas.openxmlformats.org/officeDocument/2006/relationships" xmlns:p="http://schemas.openxmlformats.org/presentationml/2006/main">
+  <p:cSld name="Slide 13">
+    <p:spTree>
+      <p:nvGrpSpPr>
+        <p:cNvPr id="1" name=""/>
+        <p:cNvGrpSpPr/>
+        <p:nvPr/>
+      </p:nvGrpSpPr>
+      <p:grpSpPr>
+        <a:xfrm>
+          <a:off x="0" y="0"/>
+          <a:ext cx="0" cy="0"/>
+          <a:chOff x="0" y="0"/>
+          <a:chExt cx="0" cy="0"/>
+        </a:xfrm>
+      </p:grpSpPr>
+      <p:sp>
+        <p:nvSpPr>
+          <p:cNvPr id="2" name="Text 0"/>
+          <p:cNvSpPr/>
+          <p:nvPr/>
+        </p:nvSpPr>
+        <p:spPr>
+          <a:xfrm>
+            <a:off x="365760" y="274320"/>
+            <a:ext cx="10972800" cy="457200"/>
+          </a:xfrm>
+          <a:prstGeom prst="rect">
+            <a:avLst/>
+          </a:prstGeom>
+          <a:noFill/>
+          <a:ln/>
+        </p:spPr>
+        <p:txBody>
+          <a:bodyPr wrap="square" rtlCol="0" anchor="ctr"/>
+          <a:lstStyle/>
+          <a:p>
+            <a:pPr indent="0" marL="0">
+              <a:buNone/>
+            </a:pPr>
+            <a:r>
+              <a:rPr lang="en-US" sz="2200" b="1" dirty="0">
+                <a:solidFill>
+                  <a:srgbClr val="000000"/>
+                </a:solidFill>
+              </a:rPr>
+              <a:t>Source Index</a:t>
+            </a:r>
+            <a:endParaRPr lang="en-US" sz="2200" dirty="0"/>
+          </a:p>
+        </p:txBody>
+      </p:sp>
+      <p:sp>
+        <p:nvSpPr>
+          <p:cNvPr id="3" name="Text 1"/>
+          <p:cNvSpPr/>
+          <p:nvPr/>
+        </p:nvSpPr>
+        <p:spPr>
+          <a:xfrm>
+            <a:off x="457200" y="822960"/>
+            <a:ext cx="11247120" cy="256032"/>
+          </a:xfrm>
+          <a:prstGeom prst="rect">
+            <a:avLst/>
+          </a:prstGeom>
+          <a:noFill/>
+          <a:ln/>
+        </p:spPr>
+        <p:txBody>
+          <a:bodyPr wrap="square" rtlCol="0" anchor="ctr"/>
+          <a:lstStyle/>
+          <a:p>
+            <a:pPr indent="0" marL="0">
+              <a:buNone/>
+            </a:pPr>
+            <a:r>
+              <a:rPr lang="en-US" sz="1000" dirty="0">
+                <a:solidFill>
+                  <a:srgbClr val="000000"/>
+                </a:solidFill>
+              </a:rPr>
+              <a:t>[1] https://portal.ct.gov/-/media/deep/adjudications/hearing-officer-reports/20251029-industrial-general-permit-ctr05000093-hor.pdf</a:t>
+            </a:r>
+            <a:endParaRPr lang="en-US" sz="1000" dirty="0"/>
+          </a:p>
+        </p:txBody>
+      </p:sp>
+      <p:sp>
+        <p:nvSpPr>
+          <p:cNvPr id="4" name="Text 2"/>
+          <p:cNvSpPr/>
+          <p:nvPr/>
+        </p:nvSpPr>
+        <p:spPr>
+          <a:xfrm>
+            <a:off x="457200" y="1097280"/>
+            <a:ext cx="11247120" cy="256032"/>
+          </a:xfrm>
+          <a:prstGeom prst="rect">
+            <a:avLst/>
+          </a:prstGeom>
+          <a:noFill/>
+          <a:ln/>
+        </p:spPr>
+        <p:txBody>
+          <a:bodyPr wrap="square" rtlCol="0" anchor="ctr"/>
+          <a:lstStyle/>
+          <a:p>
+            <a:pPr indent="0" marL="0">
+              <a:buNone/>
+            </a:pPr>
+            <a:r>
+              <a:rPr lang="en-US" sz="1000" dirty="0">
+                <a:solidFill>
+                  <a:srgbClr val="000000"/>
+                </a:solidFill>
+              </a:rPr>
+              <a:t>[2] https://enstructure.com/network/northeast/</a:t>
+            </a:r>
+            <a:endParaRPr lang="en-US" sz="1000" dirty="0"/>
+          </a:p>
+        </p:txBody>
+      </p:sp>
+      <p:sp>
+        <p:nvSpPr>
+          <p:cNvPr id="5" name="Text 3"/>
+          <p:cNvSpPr/>
+          <p:nvPr/>
+        </p:nvSpPr>
+        <p:spPr>
+          <a:xfrm>
+            <a:off x="457200" y="1371600"/>
+            <a:ext cx="11247120" cy="256032"/>
+          </a:xfrm>
+          <a:prstGeom prst="rect">
+            <a:avLst/>
+          </a:prstGeom>
+          <a:noFill/>
+          <a:ln/>
+        </p:spPr>
+        <p:txBody>
+          <a:bodyPr wrap="square" rtlCol="0" anchor="ctr"/>
+          <a:lstStyle/>
+          <a:p>
+            <a:pPr indent="0" marL="0">
+              <a:buNone/>
+            </a:pPr>
+            <a:r>
+              <a:rPr lang="en-US" sz="1000" dirty="0">
+                <a:solidFill>
+                  <a:srgbClr val="000000"/>
+                </a:solidFill>
+              </a:rPr>
+              <a:t>[3] https://enstructure.com/gateway-terminal-announces-partnership-with-enstructure/</a:t>
+            </a:r>
+            <a:endParaRPr lang="en-US" sz="1000" dirty="0"/>
+          </a:p>
+        </p:txBody>
+      </p:sp>
+      <p:sp>
+        <p:nvSpPr>
+          <p:cNvPr id="6" name="Text 4"/>
+          <p:cNvSpPr/>
+          <p:nvPr/>
+        </p:nvSpPr>
+        <p:spPr>
+          <a:xfrm>
+            <a:off x="457200" y="1645920"/>
+            <a:ext cx="11247120" cy="256032"/>
+          </a:xfrm>
+          <a:prstGeom prst="rect">
+            <a:avLst/>
+          </a:prstGeom>
+          <a:noFill/>
+          <a:ln/>
+        </p:spPr>
+        <p:txBody>
+          <a:bodyPr wrap="square" rtlCol="0" anchor="ctr"/>
+          <a:lstStyle/>
+          <a:p>
+            <a:pPr indent="0" marL="0">
+              <a:buNone/>
+            </a:pPr>
+            <a:r>
+              <a:rPr lang="en-US" sz="1000" dirty="0">
+                <a:solidFill>
+                  <a:srgbClr val="000000"/>
+                </a:solidFill>
+              </a:rPr>
+              <a:t>[4] https://enstructure.com/enstructure-to-receive-11-2-million-federal-grant-to-add-two-new-railyards-and-new-railroad-track-in-new-haven-ct/</a:t>
+            </a:r>
+            <a:endParaRPr lang="en-US" sz="1000" dirty="0"/>
+          </a:p>
+        </p:txBody>
+      </p:sp>
+      <p:sp>
+        <p:nvSpPr>
+          <p:cNvPr id="7" name="Text 5"/>
+          <p:cNvSpPr/>
+          <p:nvPr/>
+        </p:nvSpPr>
+        <p:spPr>
+          <a:xfrm>
+            <a:off x="457200" y="1920240"/>
+            <a:ext cx="11247120" cy="256032"/>
+          </a:xfrm>
+          <a:prstGeom prst="rect">
+            <a:avLst/>
+          </a:prstGeom>
+          <a:noFill/>
+          <a:ln/>
+        </p:spPr>
+        <p:txBody>
+          <a:bodyPr wrap="square" rtlCol="0" anchor="ctr"/>
+          <a:lstStyle/>
+          <a:p>
+            <a:pPr indent="0" marL="0">
+              <a:buNone/>
+            </a:pPr>
+            <a:r>
+              <a:rPr lang="en-US" sz="1000" dirty="0">
+                <a:solidFill>
+                  <a:srgbClr val="000000"/>
+                </a:solidFill>
+              </a:rPr>
+              <a:t>[5] https://www.uinet.com/documents/1678076/1696637/UI_ChapelStreet_FAQ.pdf/c3fe8470-bad2-33fa-e046-e16c975afa0f</a:t>
+            </a:r>
+            <a:endParaRPr lang="en-US" sz="1000" dirty="0"/>
+          </a:p>
+        </p:txBody>
+      </p:sp>
+      <p:sp>
+        <p:nvSpPr>
+          <p:cNvPr id="8" name="Text 6"/>
+          <p:cNvSpPr/>
+          <p:nvPr/>
+        </p:nvSpPr>
+        <p:spPr>
+          <a:xfrm>
+            <a:off x="457200" y="2194560"/>
+            <a:ext cx="11247120" cy="256032"/>
+          </a:xfrm>
+          <a:prstGeom prst="rect">
+            <a:avLst/>
+          </a:prstGeom>
+          <a:noFill/>
+          <a:ln/>
+        </p:spPr>
+        <p:txBody>
+          <a:bodyPr wrap="square" rtlCol="0" anchor="ctr"/>
+          <a:lstStyle/>
+          <a:p>
+            <a:pPr indent="0" marL="0">
+              <a:buNone/>
+            </a:pPr>
+            <a:r>
+              <a:rPr lang="en-US" sz="1000" dirty="0">
+                <a:solidFill>
+                  <a:srgbClr val="000000"/>
+                </a:solidFill>
+              </a:rPr>
+              <a:t>[6] https://portal.ct.gov/-/media/deep/water_regulating_and_discharges/stormwater/industrial/2025-permit-documents/2025-industrial-stormwater-general-permit-part-1--2erc.pdf</a:t>
+            </a:r>
+            <a:endParaRPr lang="en-US" sz="1000" dirty="0"/>
+          </a:p>
+        </p:txBody>
+      </p:sp>
+      <p:sp>
+        <p:nvSpPr>
+          <p:cNvPr id="9" name="Text 7"/>
+          <p:cNvSpPr/>
+          <p:nvPr/>
+        </p:nvSpPr>
+        <p:spPr>
+          <a:xfrm>
+            <a:off x="457200" y="2468880"/>
+            <a:ext cx="11247120" cy="256032"/>
+          </a:xfrm>
+          <a:prstGeom prst="rect">
+            <a:avLst/>
+          </a:prstGeom>
+          <a:noFill/>
+          <a:ln/>
+        </p:spPr>
+        <p:txBody>
+          <a:bodyPr wrap="square" rtlCol="0" anchor="ctr"/>
+          <a:lstStyle/>
+          <a:p>
+            <a:pPr indent="0" marL="0">
+              <a:buNone/>
+            </a:pPr>
+            <a:r>
+              <a:rPr lang="en-US" sz="1000" dirty="0">
+                <a:solidFill>
+                  <a:srgbClr val="000000"/>
+                </a:solidFill>
+              </a:rPr>
+              <a:t>[7] https://portal.ct.gov/DEEP/Water-Regulating-and-Discharges/Stormwater/Industrial-Stormwater-GP</a:t>
+            </a:r>
+            <a:endParaRPr lang="en-US" sz="1000" dirty="0"/>
+          </a:p>
+        </p:txBody>
+      </p:sp>
+      <p:sp>
+        <p:nvSpPr>
+          <p:cNvPr id="10" name="Text 8"/>
+          <p:cNvSpPr/>
+          <p:nvPr/>
+        </p:nvSpPr>
+        <p:spPr>
+          <a:xfrm>
+            <a:off x="457200" y="2743200"/>
+            <a:ext cx="11247120" cy="256032"/>
+          </a:xfrm>
+          <a:prstGeom prst="rect">
+            <a:avLst/>
+          </a:prstGeom>
+          <a:noFill/>
+          <a:ln/>
+        </p:spPr>
+        <p:txBody>
+          <a:bodyPr wrap="square" rtlCol="0" anchor="ctr"/>
+          <a:lstStyle/>
+          <a:p>
+            <a:pPr indent="0" marL="0">
+              <a:buNone/>
+            </a:pPr>
+            <a:r>
+              <a:rPr lang="en-US" sz="1000" dirty="0">
+                <a:solidFill>
+                  <a:srgbClr val="000000"/>
+                </a:solidFill>
+              </a:rPr>
+              <a:t>[8] https://bpb-us-w2.wpmucdn.com/campuspress.yale.edu/dist/a/4311/files/2023/11/New-Haven-Mill-River-Planning-Study-Final-Report-FINAL-web.pdf</a:t>
+            </a:r>
+            <a:endParaRPr lang="en-US" sz="1000" dirty="0"/>
+          </a:p>
+        </p:txBody>
+      </p:sp>
+      <p:sp>
+        <p:nvSpPr>
+          <p:cNvPr id="11" name="Text 9"/>
+          <p:cNvSpPr/>
+          <p:nvPr/>
+        </p:nvSpPr>
+        <p:spPr>
+          <a:xfrm>
+            <a:off x="457200" y="3017520"/>
+            <a:ext cx="11247120" cy="256032"/>
+          </a:xfrm>
+          <a:prstGeom prst="rect">
+            <a:avLst/>
+          </a:prstGeom>
+          <a:noFill/>
+          <a:ln/>
+        </p:spPr>
+        <p:txBody>
+          <a:bodyPr wrap="square" rtlCol="0" anchor="ctr"/>
+          <a:lstStyle/>
+          <a:p>
+            <a:pPr indent="0" marL="0">
+              <a:buNone/>
+            </a:pPr>
+            <a:r>
+              <a:rPr lang="en-US" sz="1000" dirty="0">
+                <a:solidFill>
+                  <a:srgbClr val="000000"/>
+                </a:solidFill>
+              </a:rPr>
+              <a:t>[9] https://www.newhavenindependent.org/2025/05/15/deep_salt_pile_hearing/</a:t>
+            </a:r>
+            <a:endParaRPr lang="en-US" sz="1000" dirty="0"/>
+          </a:p>
+        </p:txBody>
+      </p:sp>
+      <p:sp>
+        <p:nvSpPr>
+          <p:cNvPr id="12" name="Text 10"/>
+          <p:cNvSpPr/>
+          <p:nvPr/>
+        </p:nvSpPr>
+        <p:spPr>
+          <a:xfrm>
+            <a:off x="457200" y="3291840"/>
+            <a:ext cx="11247120" cy="256032"/>
+          </a:xfrm>
+          <a:prstGeom prst="rect">
+            <a:avLst/>
+          </a:prstGeom>
+          <a:noFill/>
+          <a:ln/>
+        </p:spPr>
+        <p:txBody>
+          <a:bodyPr wrap="square" rtlCol="0" anchor="ctr"/>
+          <a:lstStyle/>
+          <a:p>
+            <a:pPr indent="0" marL="0">
+              <a:buNone/>
+            </a:pPr>
+            <a:r>
+              <a:rPr lang="en-US" sz="1000" dirty="0">
+                <a:solidFill>
+                  <a:srgbClr val="000000"/>
+                </a:solidFill>
+              </a:rPr>
+              <a:t>[10] https://www.epa.gov/npdes/npdes-stormwater-program</a:t>
+            </a:r>
+            <a:endParaRPr lang="en-US" sz="1000" dirty="0"/>
+          </a:p>
+        </p:txBody>
+      </p:sp>
+      <p:sp>
+        <p:nvSpPr>
+          <p:cNvPr id="13" name="Text 11"/>
+          <p:cNvSpPr/>
+          <p:nvPr/>
+        </p:nvSpPr>
+        <p:spPr>
+          <a:xfrm>
+            <a:off x="457200" y="3566160"/>
+            <a:ext cx="11247120" cy="256032"/>
+          </a:xfrm>
+          <a:prstGeom prst="rect">
+            <a:avLst/>
+          </a:prstGeom>
+          <a:noFill/>
+          <a:ln/>
+        </p:spPr>
+        <p:txBody>
+          <a:bodyPr wrap="square" rtlCol="0" anchor="ctr"/>
+          <a:lstStyle/>
+          <a:p>
+            <a:pPr indent="0" marL="0">
+              <a:buNone/>
+            </a:pPr>
+            <a:r>
+              <a:rPr lang="en-US" sz="1000" dirty="0">
+                <a:solidFill>
+                  <a:srgbClr val="000000"/>
+                </a:solidFill>
+              </a:rPr>
+              <a:t>[11] https://www.epa.gov/newsreleases/biden-harris-administration-announces-nearly-40-million-clean-ports-investments</a:t>
+            </a:r>
+            <a:endParaRPr lang="en-US" sz="1000" dirty="0"/>
+          </a:p>
+        </p:txBody>
+      </p:sp>
+      <p:sp>
+        <p:nvSpPr>
+          <p:cNvPr id="14" name="Text 12"/>
+          <p:cNvSpPr/>
+          <p:nvPr/>
+        </p:nvSpPr>
+        <p:spPr>
+          <a:xfrm>
+            <a:off x="457200" y="3840480"/>
+            <a:ext cx="11247120" cy="256032"/>
+          </a:xfrm>
+          <a:prstGeom prst="rect">
+            <a:avLst/>
+          </a:prstGeom>
+          <a:noFill/>
+          <a:ln/>
+        </p:spPr>
+        <p:txBody>
+          <a:bodyPr wrap="square" rtlCol="0" anchor="ctr"/>
+          <a:lstStyle/>
+          <a:p>
+            <a:pPr indent="0" marL="0">
+              <a:buNone/>
+            </a:pPr>
+            <a:r>
+              <a:rPr lang="en-US" sz="1000" dirty="0">
+                <a:solidFill>
+                  <a:srgbClr val="000000"/>
+                </a:solidFill>
+              </a:rPr>
+              <a:t>[12] https://www.nae.usace.army.mil/Portals/74/docs/Topics/New%20Haven/2020/05-AppendixCEconomcisNewHavenHarborNavigationImprovementProject%20_FinalJanuary2020.pdf</a:t>
+            </a:r>
+            <a:endParaRPr lang="en-US" sz="1000" dirty="0"/>
           </a:p>
         </p:txBody>
       </p:sp>
@@ -1344,7 +3344,7 @@
         <p:spPr>
           <a:xfrm>
             <a:off x="274320" y="182880"/>
-            <a:ext cx="11430000" cy="365760"/>
+            <a:ext cx="10972800" cy="365760"/>
           </a:xfrm>
           <a:prstGeom prst="rect">
             <a:avLst/>
@@ -1394,12 +3394,11 @@
             <a:tbl>
               <a:tblPr/>
               <a:tblGrid>
-                <a:gridCol w="1554480"/>
-                <a:gridCol w="731520"/>
-                <a:gridCol w="2011680"/>
-                <a:gridCol w="1920240"/>
-                <a:gridCol w="2560320"/>
-                <a:gridCol w="3017520"/>
+                <a:gridCol w="1737360"/>
+                <a:gridCol w="2743200"/>
+                <a:gridCol w="2377440"/>
+                <a:gridCol w="822960"/>
+                <a:gridCol w="4114800"/>
               </a:tblGrid>
               <a:tr h="1417320">
                 <a:tc>
@@ -1458,9 +3457,122 @@
                       <a:headEnd type="none" w="med" len="med"/>
                       <a:tailEnd type="none" w="med" len="med"/>
                     </a:lnB>
-                    <a:solidFill>
-                      <a:srgbClr val="FDFDFD"/>
-                    </a:solidFill>
+                  </a:tcPr>
+                </a:tc>
+                <a:tc>
+                  <a:txBody>
+                    <a:bodyPr/>
+                    <a:lstStyle/>
+                    <a:p>
+                      <a:pPr indent="0" marL="0">
+                        <a:buNone/>
+                      </a:pPr>
+                      <a:r>
+                        <a:rPr lang="en-US" sz="900" dirty="0">
+                          <a:solidFill>
+                            <a:srgbClr val="000000"/>
+                          </a:solidFill>
+                        </a:rPr>
+                        <a:t>Likely interests</a:t>
+                      </a:r>
+                      <a:endParaRPr lang="en-US" sz="900" dirty="0"/>
+                    </a:p>
+                  </a:txBody>
+                  <a:tcPr marL="91440" marR="91440" marT="45720" marB="45720">
+                    <a:lnL w="12700" cap="flat" cmpd="sng" algn="ctr">
+                      <a:solidFill>
+                        <a:srgbClr val="666666"/>
+                      </a:solidFill>
+                      <a:prstDash val="solid"/>
+                      <a:round/>
+                      <a:headEnd type="none" w="med" len="med"/>
+                      <a:tailEnd type="none" w="med" len="med"/>
+                    </a:lnL>
+                    <a:lnR w="12700" cap="flat" cmpd="sng" algn="ctr">
+                      <a:solidFill>
+                        <a:srgbClr val="666666"/>
+                      </a:solidFill>
+                      <a:prstDash val="solid"/>
+                      <a:round/>
+                      <a:headEnd type="none" w="med" len="med"/>
+                      <a:tailEnd type="none" w="med" len="med"/>
+                    </a:lnR>
+                    <a:lnT w="12700" cap="flat" cmpd="sng" algn="ctr">
+                      <a:solidFill>
+                        <a:srgbClr val="666666"/>
+                      </a:solidFill>
+                      <a:prstDash val="solid"/>
+                      <a:round/>
+                      <a:headEnd type="none" w="med" len="med"/>
+                      <a:tailEnd type="none" w="med" len="med"/>
+                    </a:lnT>
+                    <a:lnB w="12700" cap="flat" cmpd="sng" algn="ctr">
+                      <a:solidFill>
+                        <a:srgbClr val="666666"/>
+                      </a:solidFill>
+                      <a:prstDash val="solid"/>
+                      <a:round/>
+                      <a:headEnd type="none" w="med" len="med"/>
+                      <a:tailEnd type="none" w="med" len="med"/>
+                    </a:lnB>
+                  </a:tcPr>
+                </a:tc>
+                <a:tc>
+                  <a:txBody>
+                    <a:bodyPr/>
+                    <a:lstStyle/>
+                    <a:p>
+                      <a:pPr indent="0" marL="0">
+                        <a:buNone/>
+                      </a:pPr>
+                      <a:r>
+                        <a:rPr lang="en-US" sz="900" dirty="0">
+                          <a:solidFill>
+                            <a:srgbClr val="000000"/>
+                          </a:solidFill>
+                        </a:rPr>
+                        <a:t>Practical levers</a:t>
+                      </a:r>
+                      <a:endParaRPr lang="en-US" sz="900" dirty="0"/>
+                    </a:p>
+                  </a:txBody>
+                  <a:tcPr marL="91440" marR="91440" marT="45720" marB="45720">
+                    <a:lnL w="12700" cap="flat" cmpd="sng" algn="ctr">
+                      <a:solidFill>
+                        <a:srgbClr val="666666"/>
+                      </a:solidFill>
+                      <a:prstDash val="solid"/>
+                      <a:round/>
+                      <a:headEnd type="none" w="med" len="med"/>
+                      <a:tailEnd type="none" w="med" len="med"/>
+                    </a:lnL>
+                    <a:lnR w="12700" cap="flat" cmpd="sng" algn="ctr">
+                      <a:solidFill>
+                        <a:srgbClr val="666666"/>
+                      </a:solidFill>
+                      <a:prstDash val="solid"/>
+                      <a:round/>
+                      <a:headEnd type="none" w="med" len="med"/>
+                      <a:tailEnd type="none" w="med" len="med"/>
+                    </a:lnR>
+                    <a:lnT w="12700" cap="flat" cmpd="sng" algn="ctr">
+                      <a:solidFill>
+                        <a:srgbClr val="666666"/>
+                      </a:solidFill>
+                      <a:prstDash val="solid"/>
+                      <a:round/>
+                      <a:headEnd type="none" w="med" len="med"/>
+                      <a:tailEnd type="none" w="med" len="med"/>
+                    </a:lnT>
+                    <a:lnB w="12700" cap="flat" cmpd="sng" algn="ctr">
+                      <a:solidFill>
+                        <a:srgbClr val="666666"/>
+                      </a:solidFill>
+                      <a:prstDash val="solid"/>
+                      <a:round/>
+                      <a:headEnd type="none" w="med" len="med"/>
+                      <a:tailEnd type="none" w="med" len="med"/>
+                    </a:lnB>
                   </a:tcPr>
                 </a:tc>
                 <a:tc>
@@ -1519,9 +3631,6 @@
                       <a:headEnd type="none" w="med" len="med"/>
                       <a:tailEnd type="none" w="med" len="med"/>
                     </a:lnB>
-                    <a:solidFill>
-                      <a:srgbClr val="FDFDFD"/>
-                    </a:solidFill>
                   </a:tcPr>
                 </a:tc>
                 <a:tc>
@@ -1538,7 +3647,7 @@
                             <a:srgbClr val="000000"/>
                           </a:solidFill>
                         </a:rPr>
-                        <a:t>Likely position</a:t>
+                        <a:t>Notes grounded in record</a:t>
                       </a:r>
                       <a:endParaRPr lang="en-US" sz="900" dirty="0"/>
                     </a:p>
@@ -1580,192 +3689,6 @@
                       <a:headEnd type="none" w="med" len="med"/>
                       <a:tailEnd type="none" w="med" len="med"/>
                     </a:lnB>
-                    <a:solidFill>
-                      <a:srgbClr val="FDFDFD"/>
-                    </a:solidFill>
-                  </a:tcPr>
-                </a:tc>
-                <a:tc>
-                  <a:txBody>
-                    <a:bodyPr/>
-                    <a:lstStyle/>
-                    <a:p>
-                      <a:pPr indent="0" marL="0">
-                        <a:buNone/>
-                      </a:pPr>
-                      <a:r>
-                        <a:rPr lang="en-US" sz="900" dirty="0">
-                          <a:solidFill>
-                            <a:srgbClr val="000000"/>
-                          </a:solidFill>
-                        </a:rPr>
-                        <a:t>Core interests</a:t>
-                      </a:r>
-                      <a:endParaRPr lang="en-US" sz="900" dirty="0"/>
-                    </a:p>
-                  </a:txBody>
-                  <a:tcPr marL="91440" marR="91440" marT="45720" marB="45720">
-                    <a:lnL w="12700" cap="flat" cmpd="sng" algn="ctr">
-                      <a:solidFill>
-                        <a:srgbClr val="666666"/>
-                      </a:solidFill>
-                      <a:prstDash val="solid"/>
-                      <a:round/>
-                      <a:headEnd type="none" w="med" len="med"/>
-                      <a:tailEnd type="none" w="med" len="med"/>
-                    </a:lnL>
-                    <a:lnR w="12700" cap="flat" cmpd="sng" algn="ctr">
-                      <a:solidFill>
-                        <a:srgbClr val="666666"/>
-                      </a:solidFill>
-                      <a:prstDash val="solid"/>
-                      <a:round/>
-                      <a:headEnd type="none" w="med" len="med"/>
-                      <a:tailEnd type="none" w="med" len="med"/>
-                    </a:lnR>
-                    <a:lnT w="12700" cap="flat" cmpd="sng" algn="ctr">
-                      <a:solidFill>
-                        <a:srgbClr val="666666"/>
-                      </a:solidFill>
-                      <a:prstDash val="solid"/>
-                      <a:round/>
-                      <a:headEnd type="none" w="med" len="med"/>
-                      <a:tailEnd type="none" w="med" len="med"/>
-                    </a:lnT>
-                    <a:lnB w="12700" cap="flat" cmpd="sng" algn="ctr">
-                      <a:solidFill>
-                        <a:srgbClr val="666666"/>
-                      </a:solidFill>
-                      <a:prstDash val="solid"/>
-                      <a:round/>
-                      <a:headEnd type="none" w="med" len="med"/>
-                      <a:tailEnd type="none" w="med" len="med"/>
-                    </a:lnB>
-                    <a:solidFill>
-                      <a:srgbClr val="FDFDFD"/>
-                    </a:solidFill>
-                  </a:tcPr>
-                </a:tc>
-                <a:tc>
-                  <a:txBody>
-                    <a:bodyPr/>
-                    <a:lstStyle/>
-                    <a:p>
-                      <a:pPr indent="0" marL="0">
-                        <a:buNone/>
-                      </a:pPr>
-                      <a:r>
-                        <a:rPr lang="en-US" sz="900" dirty="0">
-                          <a:solidFill>
-                            <a:srgbClr val="000000"/>
-                          </a:solidFill>
-                        </a:rPr>
-                        <a:t>Justification</a:t>
-                      </a:r>
-                      <a:endParaRPr lang="en-US" sz="900" dirty="0"/>
-                    </a:p>
-                  </a:txBody>
-                  <a:tcPr marL="91440" marR="91440" marT="45720" marB="45720">
-                    <a:lnL w="12700" cap="flat" cmpd="sng" algn="ctr">
-                      <a:solidFill>
-                        <a:srgbClr val="666666"/>
-                      </a:solidFill>
-                      <a:prstDash val="solid"/>
-                      <a:round/>
-                      <a:headEnd type="none" w="med" len="med"/>
-                      <a:tailEnd type="none" w="med" len="med"/>
-                    </a:lnL>
-                    <a:lnR w="12700" cap="flat" cmpd="sng" algn="ctr">
-                      <a:solidFill>
-                        <a:srgbClr val="666666"/>
-                      </a:solidFill>
-                      <a:prstDash val="solid"/>
-                      <a:round/>
-                      <a:headEnd type="none" w="med" len="med"/>
-                      <a:tailEnd type="none" w="med" len="med"/>
-                    </a:lnR>
-                    <a:lnT w="12700" cap="flat" cmpd="sng" algn="ctr">
-                      <a:solidFill>
-                        <a:srgbClr val="666666"/>
-                      </a:solidFill>
-                      <a:prstDash val="solid"/>
-                      <a:round/>
-                      <a:headEnd type="none" w="med" len="med"/>
-                      <a:tailEnd type="none" w="med" len="med"/>
-                    </a:lnT>
-                    <a:lnB w="12700" cap="flat" cmpd="sng" algn="ctr">
-                      <a:solidFill>
-                        <a:srgbClr val="666666"/>
-                      </a:solidFill>
-                      <a:prstDash val="solid"/>
-                      <a:round/>
-                      <a:headEnd type="none" w="med" len="med"/>
-                      <a:tailEnd type="none" w="med" len="med"/>
-                    </a:lnB>
-                    <a:solidFill>
-                      <a:srgbClr val="FDFDFD"/>
-                    </a:solidFill>
-                  </a:tcPr>
-                </a:tc>
-                <a:tc>
-                  <a:txBody>
-                    <a:bodyPr/>
-                    <a:lstStyle/>
-                    <a:p>
-                      <a:pPr indent="0" marL="0">
-                        <a:buNone/>
-                      </a:pPr>
-                      <a:r>
-                        <a:rPr lang="en-US" sz="900" dirty="0">
-                          <a:solidFill>
-                            <a:srgbClr val="000000"/>
-                          </a:solidFill>
-                        </a:rPr>
-                        <a:t>Sources</a:t>
-                      </a:r>
-                      <a:endParaRPr lang="en-US" sz="900" dirty="0"/>
-                    </a:p>
-                  </a:txBody>
-                  <a:tcPr marL="91440" marR="91440" marT="45720" marB="45720">
-                    <a:lnL w="12700" cap="flat" cmpd="sng" algn="ctr">
-                      <a:solidFill>
-                        <a:srgbClr val="666666"/>
-                      </a:solidFill>
-                      <a:prstDash val="solid"/>
-                      <a:round/>
-                      <a:headEnd type="none" w="med" len="med"/>
-                      <a:tailEnd type="none" w="med" len="med"/>
-                    </a:lnL>
-                    <a:lnR w="12700" cap="flat" cmpd="sng" algn="ctr">
-                      <a:solidFill>
-                        <a:srgbClr val="666666"/>
-                      </a:solidFill>
-                      <a:prstDash val="solid"/>
-                      <a:round/>
-                      <a:headEnd type="none" w="med" len="med"/>
-                      <a:tailEnd type="none" w="med" len="med"/>
-                    </a:lnR>
-                    <a:lnT w="12700" cap="flat" cmpd="sng" algn="ctr">
-                      <a:solidFill>
-                        <a:srgbClr val="666666"/>
-                      </a:solidFill>
-                      <a:prstDash val="solid"/>
-                      <a:round/>
-                      <a:headEnd type="none" w="med" len="med"/>
-                      <a:tailEnd type="none" w="med" len="med"/>
-                    </a:lnT>
-                    <a:lnB w="12700" cap="flat" cmpd="sng" algn="ctr">
-                      <a:solidFill>
-                        <a:srgbClr val="666666"/>
-                      </a:solidFill>
-                      <a:prstDash val="solid"/>
-                      <a:round/>
-                      <a:headEnd type="none" w="med" len="med"/>
-                      <a:tailEnd type="none" w="med" len="med"/>
-                    </a:lnB>
-                    <a:solidFill>
-                      <a:srgbClr val="FDFDFD"/>
-                    </a:solidFill>
                   </a:tcPr>
                 </a:tc>
               </a:tr>
@@ -1784,7 +3707,7 @@
                             <a:srgbClr val="000000"/>
                           </a:solidFill>
                         </a:rPr>
-                        <a:t>CT DEEP</a:t>
+                        <a:t>Enstructure / Gateway Terminal</a:t>
                       </a:r>
                       <a:endParaRPr lang="en-US" sz="900" dirty="0"/>
                     </a:p>
@@ -1826,9 +3749,122 @@
                       <a:headEnd type="none" w="med" len="med"/>
                       <a:tailEnd type="none" w="med" len="med"/>
                     </a:lnB>
-                    <a:solidFill>
-                      <a:srgbClr val="FDFDFD"/>
-                    </a:solidFill>
+                  </a:tcPr>
+                </a:tc>
+                <a:tc>
+                  <a:txBody>
+                    <a:bodyPr/>
+                    <a:lstStyle/>
+                    <a:p>
+                      <a:pPr indent="0" marL="0">
+                        <a:buNone/>
+                      </a:pPr>
+                      <a:r>
+                        <a:rPr lang="en-US" sz="900" dirty="0">
+                          <a:solidFill>
+                            <a:srgbClr val="000000"/>
+                          </a:solidFill>
+                        </a:rPr>
+                        <a:t>Maintain centralized salt distribution role; preserve ship-barge-truck-rail connectivity; limit capex and operational disruption; protect permit coverage and reputation.</a:t>
+                      </a:r>
+                      <a:endParaRPr lang="en-US" sz="900" dirty="0"/>
+                    </a:p>
+                  </a:txBody>
+                  <a:tcPr marL="91440" marR="91440" marT="45720" marB="45720">
+                    <a:lnL w="12700" cap="flat" cmpd="sng" algn="ctr">
+                      <a:solidFill>
+                        <a:srgbClr val="666666"/>
+                      </a:solidFill>
+                      <a:prstDash val="solid"/>
+                      <a:round/>
+                      <a:headEnd type="none" w="med" len="med"/>
+                      <a:tailEnd type="none" w="med" len="med"/>
+                    </a:lnL>
+                    <a:lnR w="12700" cap="flat" cmpd="sng" algn="ctr">
+                      <a:solidFill>
+                        <a:srgbClr val="666666"/>
+                      </a:solidFill>
+                      <a:prstDash val="solid"/>
+                      <a:round/>
+                      <a:headEnd type="none" w="med" len="med"/>
+                      <a:tailEnd type="none" w="med" len="med"/>
+                    </a:lnR>
+                    <a:lnT w="12700" cap="flat" cmpd="sng" algn="ctr">
+                      <a:solidFill>
+                        <a:srgbClr val="666666"/>
+                      </a:solidFill>
+                      <a:prstDash val="solid"/>
+                      <a:round/>
+                      <a:headEnd type="none" w="med" len="med"/>
+                      <a:tailEnd type="none" w="med" len="med"/>
+                    </a:lnT>
+                    <a:lnB w="12700" cap="flat" cmpd="sng" algn="ctr">
+                      <a:solidFill>
+                        <a:srgbClr val="666666"/>
+                      </a:solidFill>
+                      <a:prstDash val="solid"/>
+                      <a:round/>
+                      <a:headEnd type="none" w="med" len="med"/>
+                      <a:tailEnd type="none" w="med" len="med"/>
+                    </a:lnB>
+                  </a:tcPr>
+                </a:tc>
+                <a:tc>
+                  <a:txBody>
+                    <a:bodyPr/>
+                    <a:lstStyle/>
+                    <a:p>
+                      <a:pPr indent="0" marL="0">
+                        <a:buNone/>
+                      </a:pPr>
+                      <a:r>
+                        <a:rPr lang="en-US" sz="900" dirty="0">
+                          <a:solidFill>
+                            <a:srgbClr val="000000"/>
+                          </a:solidFill>
+                        </a:rPr>
+                        <a:t>Operational control of stockpiles; SWPPP/BMP execution; capital investment decisions; contract terms with municipal buyers and transporters.</a:t>
+                      </a:r>
+                      <a:endParaRPr lang="en-US" sz="900" dirty="0"/>
+                    </a:p>
+                  </a:txBody>
+                  <a:tcPr marL="91440" marR="91440" marT="45720" marB="45720">
+                    <a:lnL w="12700" cap="flat" cmpd="sng" algn="ctr">
+                      <a:solidFill>
+                        <a:srgbClr val="666666"/>
+                      </a:solidFill>
+                      <a:prstDash val="solid"/>
+                      <a:round/>
+                      <a:headEnd type="none" w="med" len="med"/>
+                      <a:tailEnd type="none" w="med" len="med"/>
+                    </a:lnL>
+                    <a:lnR w="12700" cap="flat" cmpd="sng" algn="ctr">
+                      <a:solidFill>
+                        <a:srgbClr val="666666"/>
+                      </a:solidFill>
+                      <a:prstDash val="solid"/>
+                      <a:round/>
+                      <a:headEnd type="none" w="med" len="med"/>
+                      <a:tailEnd type="none" w="med" len="med"/>
+                    </a:lnR>
+                    <a:lnT w="12700" cap="flat" cmpd="sng" algn="ctr">
+                      <a:solidFill>
+                        <a:srgbClr val="666666"/>
+                      </a:solidFill>
+                      <a:prstDash val="solid"/>
+                      <a:round/>
+                      <a:headEnd type="none" w="med" len="med"/>
+                      <a:tailEnd type="none" w="med" len="med"/>
+                    </a:lnT>
+                    <a:lnB w="12700" cap="flat" cmpd="sng" algn="ctr">
+                      <a:solidFill>
+                        <a:srgbClr val="666666"/>
+                      </a:solidFill>
+                      <a:prstDash val="solid"/>
+                      <a:round/>
+                      <a:headEnd type="none" w="med" len="med"/>
+                      <a:tailEnd type="none" w="med" len="med"/>
+                    </a:lnB>
                   </a:tcPr>
                 </a:tc>
                 <a:tc>
@@ -1887,9 +3923,6 @@
                       <a:headEnd type="none" w="med" len="med"/>
                       <a:tailEnd type="none" w="med" len="med"/>
                     </a:lnB>
-                    <a:solidFill>
-                      <a:srgbClr val="FDFDFD"/>
-                    </a:solidFill>
                   </a:tcPr>
                 </a:tc>
                 <a:tc>
@@ -1906,7 +3939,7 @@
                             <a:srgbClr val="000000"/>
                           </a:solidFill>
                         </a:rPr>
-                        <a:t>Supportive of stronger controls; cautious on relocation unless legal/permit basis is clear.</a:t>
+                        <a:t>Named in DEEP hearing context as the operating salt-pile entity under industrial stormwater permit discussions; corporate materials emphasize multimodal logistics and New Haven rail investment.</a:t>
                       </a:r>
                       <a:endParaRPr lang="en-US" sz="900" dirty="0"/>
                     </a:p>
@@ -1948,206 +3981,6 @@
                       <a:headEnd type="none" w="med" len="med"/>
                       <a:tailEnd type="none" w="med" len="med"/>
                     </a:lnB>
-                    <a:solidFill>
-                      <a:srgbClr val="FDFDFD"/>
-                    </a:solidFill>
-                  </a:tcPr>
-                </a:tc>
-                <a:tc>
-                  <a:txBody>
-                    <a:bodyPr/>
-                    <a:lstStyle/>
-                    <a:p>
-                      <a:pPr indent="0" marL="0">
-                        <a:buNone/>
-                      </a:pPr>
-                      <a:r>
-                        <a:rPr lang="en-US" sz="900" dirty="0">
-                          <a:solidFill>
-                            <a:srgbClr val="000000"/>
-                          </a:solidFill>
-                        </a:rPr>
-                        <a:t>Protect water quality and enforce stormwater compliance.</a:t>
-                      </a:r>
-                      <a:endParaRPr lang="en-US" sz="900" dirty="0"/>
-                    </a:p>
-                  </a:txBody>
-                  <a:tcPr marL="91440" marR="91440" marT="45720" marB="45720">
-                    <a:lnL w="12700" cap="flat" cmpd="sng" algn="ctr">
-                      <a:solidFill>
-                        <a:srgbClr val="666666"/>
-                      </a:solidFill>
-                      <a:prstDash val="solid"/>
-                      <a:round/>
-                      <a:headEnd type="none" w="med" len="med"/>
-                      <a:tailEnd type="none" w="med" len="med"/>
-                    </a:lnL>
-                    <a:lnR w="12700" cap="flat" cmpd="sng" algn="ctr">
-                      <a:solidFill>
-                        <a:srgbClr val="666666"/>
-                      </a:solidFill>
-                      <a:prstDash val="solid"/>
-                      <a:round/>
-                      <a:headEnd type="none" w="med" len="med"/>
-                      <a:tailEnd type="none" w="med" len="med"/>
-                    </a:lnR>
-                    <a:lnT w="12700" cap="flat" cmpd="sng" algn="ctr">
-                      <a:solidFill>
-                        <a:srgbClr val="666666"/>
-                      </a:solidFill>
-                      <a:prstDash val="solid"/>
-                      <a:round/>
-                      <a:headEnd type="none" w="med" len="med"/>
-                      <a:tailEnd type="none" w="med" len="med"/>
-                    </a:lnT>
-                    <a:lnB w="12700" cap="flat" cmpd="sng" algn="ctr">
-                      <a:solidFill>
-                        <a:srgbClr val="666666"/>
-                      </a:solidFill>
-                      <a:prstDash val="solid"/>
-                      <a:round/>
-                      <a:headEnd type="none" w="med" len="med"/>
-                      <a:tailEnd type="none" w="med" len="med"/>
-                    </a:lnB>
-                    <a:solidFill>
-                      <a:srgbClr val="FDFDFD"/>
-                    </a:solidFill>
-                  </a:tcPr>
-                </a:tc>
-                <a:tc>
-                  <a:txBody>
-                    <a:bodyPr/>
-                    <a:lstStyle/>
-                    <a:p>
-                      <a:pPr indent="0" marL="0">
-                        <a:buNone/>
-                      </a:pPr>
-                      <a:r>
-                        <a:rPr lang="en-US" sz="900" dirty="0">
-                          <a:solidFill>
-                            <a:srgbClr val="000000"/>
-                          </a:solidFill>
-                        </a:rPr>
-                        <a:t>Administers Industrial Stormwater GP and hearing process; direct permit/enforcement leverage.</a:t>
-                      </a:r>
-                      <a:endParaRPr lang="en-US" sz="900" dirty="0"/>
-                    </a:p>
-                  </a:txBody>
-                  <a:tcPr marL="91440" marR="91440" marT="45720" marB="45720">
-                    <a:lnL w="12700" cap="flat" cmpd="sng" algn="ctr">
-                      <a:solidFill>
-                        <a:srgbClr val="666666"/>
-                      </a:solidFill>
-                      <a:prstDash val="solid"/>
-                      <a:round/>
-                      <a:headEnd type="none" w="med" len="med"/>
-                      <a:tailEnd type="none" w="med" len="med"/>
-                    </a:lnL>
-                    <a:lnR w="12700" cap="flat" cmpd="sng" algn="ctr">
-                      <a:solidFill>
-                        <a:srgbClr val="666666"/>
-                      </a:solidFill>
-                      <a:prstDash val="solid"/>
-                      <a:round/>
-                      <a:headEnd type="none" w="med" len="med"/>
-                      <a:tailEnd type="none" w="med" len="med"/>
-                    </a:lnR>
-                    <a:lnT w="12700" cap="flat" cmpd="sng" algn="ctr">
-                      <a:solidFill>
-                        <a:srgbClr val="666666"/>
-                      </a:solidFill>
-                      <a:prstDash val="solid"/>
-                      <a:round/>
-                      <a:headEnd type="none" w="med" len="med"/>
-                      <a:tailEnd type="none" w="med" len="med"/>
-                    </a:lnT>
-                    <a:lnB w="12700" cap="flat" cmpd="sng" algn="ctr">
-                      <a:solidFill>
-                        <a:srgbClr val="666666"/>
-                      </a:solidFill>
-                      <a:prstDash val="solid"/>
-                      <a:round/>
-                      <a:headEnd type="none" w="med" len="med"/>
-                      <a:tailEnd type="none" w="med" len="med"/>
-                    </a:lnB>
-                    <a:solidFill>
-                      <a:srgbClr val="FDFDFD"/>
-                    </a:solidFill>
-                  </a:tcPr>
-                </a:tc>
-                <a:tc>
-                  <a:txBody>
-                    <a:bodyPr/>
-                    <a:lstStyle/>
-                    <a:p>
-                      <a:pPr indent="0" marL="0">
-                        <a:buNone/>
-                      </a:pPr>
-                      <a:r>
-                        <a:rPr lang="en-US" sz="900" dirty="0">
-                          <a:solidFill>
-                            <a:srgbClr val="000000"/>
-                          </a:solidFill>
-                        </a:rPr>
-                        <a:t>https://portal.ct.gov/-/media/deep/water_regulating_and_discharges/stormwater/industrial/2025-permit-documents/2025-industrial-stormwater-general-permit-part-1--2erc.pdf</a:t>
-                      </a:r>
-                      <a:endParaRPr lang="en-US" sz="900" dirty="0"/>
-                    </a:p>
-                    <a:p>
-                      <a:pPr indent="0" marL="0">
-                        <a:buNone/>
-                      </a:pPr>
-                      <a:r>
-                        <a:rPr lang="en-US" sz="900" dirty="0">
-                          <a:solidFill>
-                            <a:srgbClr val="000000"/>
-                          </a:solidFill>
-                        </a:rPr>
-                        <a:t>https://portal.ct.gov/-/media/deep/adjudications/hearing-officer-reports/20251029-industrial-general-permit-ctr05000093-hor.pdf</a:t>
-                      </a:r>
-                      <a:endParaRPr lang="en-US" sz="900" dirty="0"/>
-                    </a:p>
-                  </a:txBody>
-                  <a:tcPr marL="91440" marR="91440" marT="45720" marB="45720">
-                    <a:lnL w="12700" cap="flat" cmpd="sng" algn="ctr">
-                      <a:solidFill>
-                        <a:srgbClr val="666666"/>
-                      </a:solidFill>
-                      <a:prstDash val="solid"/>
-                      <a:round/>
-                      <a:headEnd type="none" w="med" len="med"/>
-                      <a:tailEnd type="none" w="med" len="med"/>
-                    </a:lnL>
-                    <a:lnR w="12700" cap="flat" cmpd="sng" algn="ctr">
-                      <a:solidFill>
-                        <a:srgbClr val="666666"/>
-                      </a:solidFill>
-                      <a:prstDash val="solid"/>
-                      <a:round/>
-                      <a:headEnd type="none" w="med" len="med"/>
-                      <a:tailEnd type="none" w="med" len="med"/>
-                    </a:lnR>
-                    <a:lnT w="12700" cap="flat" cmpd="sng" algn="ctr">
-                      <a:solidFill>
-                        <a:srgbClr val="666666"/>
-                      </a:solidFill>
-                      <a:prstDash val="solid"/>
-                      <a:round/>
-                      <a:headEnd type="none" w="med" len="med"/>
-                      <a:tailEnd type="none" w="med" len="med"/>
-                    </a:lnT>
-                    <a:lnB w="12700" cap="flat" cmpd="sng" algn="ctr">
-                      <a:solidFill>
-                        <a:srgbClr val="666666"/>
-                      </a:solidFill>
-                      <a:prstDash val="solid"/>
-                      <a:round/>
-                      <a:headEnd type="none" w="med" len="med"/>
-                      <a:tailEnd type="none" w="med" len="med"/>
-                    </a:lnB>
-                    <a:solidFill>
-                      <a:srgbClr val="FDFDFD"/>
-                    </a:solidFill>
                   </a:tcPr>
                 </a:tc>
               </a:tr>
@@ -2166,7 +3999,7 @@
                             <a:srgbClr val="000000"/>
                           </a:solidFill>
                         </a:rPr>
-                        <a:t>Gateway Terminal / Enstructure</a:t>
+                        <a:t>Southern Connecticut Gas / UI (property owner context)</a:t>
                       </a:r>
                       <a:endParaRPr lang="en-US" sz="900" dirty="0"/>
                     </a:p>
@@ -2208,9 +4041,414 @@
                       <a:headEnd type="none" w="med" len="med"/>
                       <a:tailEnd type="none" w="med" len="med"/>
                     </a:lnB>
-                    <a:solidFill>
-                      <a:srgbClr val="FDFDFD"/>
-                    </a:solidFill>
+                  </a:tcPr>
+                </a:tc>
+                <a:tc>
+                  <a:txBody>
+                    <a:bodyPr/>
+                    <a:lstStyle/>
+                    <a:p>
+                      <a:pPr indent="0" marL="0">
+                        <a:buNone/>
+                      </a:pPr>
+                      <a:r>
+                        <a:rPr lang="en-US" sz="900" dirty="0">
+                          <a:solidFill>
+                            <a:srgbClr val="000000"/>
+                          </a:solidFill>
+                        </a:rPr>
+                        <a:t>Limit liability and remediation conflicts; preserve lease value; reduce legal/community pressure around shoreline use.</a:t>
+                      </a:r>
+                      <a:endParaRPr lang="en-US" sz="900" dirty="0"/>
+                    </a:p>
+                  </a:txBody>
+                  <a:tcPr marL="91440" marR="91440" marT="45720" marB="45720">
+                    <a:lnL w="12700" cap="flat" cmpd="sng" algn="ctr">
+                      <a:solidFill>
+                        <a:srgbClr val="666666"/>
+                      </a:solidFill>
+                      <a:prstDash val="solid"/>
+                      <a:round/>
+                      <a:headEnd type="none" w="med" len="med"/>
+                      <a:tailEnd type="none" w="med" len="med"/>
+                    </a:lnL>
+                    <a:lnR w="12700" cap="flat" cmpd="sng" algn="ctr">
+                      <a:solidFill>
+                        <a:srgbClr val="666666"/>
+                      </a:solidFill>
+                      <a:prstDash val="solid"/>
+                      <a:round/>
+                      <a:headEnd type="none" w="med" len="med"/>
+                      <a:tailEnd type="none" w="med" len="med"/>
+                    </a:lnR>
+                    <a:lnT w="12700" cap="flat" cmpd="sng" algn="ctr">
+                      <a:solidFill>
+                        <a:srgbClr val="666666"/>
+                      </a:solidFill>
+                      <a:prstDash val="solid"/>
+                      <a:round/>
+                      <a:headEnd type="none" w="med" len="med"/>
+                      <a:tailEnd type="none" w="med" len="med"/>
+                    </a:lnT>
+                    <a:lnB w="12700" cap="flat" cmpd="sng" algn="ctr">
+                      <a:solidFill>
+                        <a:srgbClr val="666666"/>
+                      </a:solidFill>
+                      <a:prstDash val="solid"/>
+                      <a:round/>
+                      <a:headEnd type="none" w="med" len="med"/>
+                      <a:tailEnd type="none" w="med" len="med"/>
+                    </a:lnB>
+                  </a:tcPr>
+                </a:tc>
+                <a:tc>
+                  <a:txBody>
+                    <a:bodyPr/>
+                    <a:lstStyle/>
+                    <a:p>
+                      <a:pPr indent="0" marL="0">
+                        <a:buNone/>
+                      </a:pPr>
+                      <a:r>
+                        <a:rPr lang="en-US" sz="900" dirty="0">
+                          <a:solidFill>
+                            <a:srgbClr val="000000"/>
+                          </a:solidFill>
+                        </a:rPr>
+                        <a:t>Property rights and lease terms; coordination with remediation obligations and site access constraints.</a:t>
+                      </a:r>
+                      <a:endParaRPr lang="en-US" sz="900" dirty="0"/>
+                    </a:p>
+                  </a:txBody>
+                  <a:tcPr marL="91440" marR="91440" marT="45720" marB="45720">
+                    <a:lnL w="12700" cap="flat" cmpd="sng" algn="ctr">
+                      <a:solidFill>
+                        <a:srgbClr val="666666"/>
+                      </a:solidFill>
+                      <a:prstDash val="solid"/>
+                      <a:round/>
+                      <a:headEnd type="none" w="med" len="med"/>
+                      <a:tailEnd type="none" w="med" len="med"/>
+                    </a:lnL>
+                    <a:lnR w="12700" cap="flat" cmpd="sng" algn="ctr">
+                      <a:solidFill>
+                        <a:srgbClr val="666666"/>
+                      </a:solidFill>
+                      <a:prstDash val="solid"/>
+                      <a:round/>
+                      <a:headEnd type="none" w="med" len="med"/>
+                      <a:tailEnd type="none" w="med" len="med"/>
+                    </a:lnR>
+                    <a:lnT w="12700" cap="flat" cmpd="sng" algn="ctr">
+                      <a:solidFill>
+                        <a:srgbClr val="666666"/>
+                      </a:solidFill>
+                      <a:prstDash val="solid"/>
+                      <a:round/>
+                      <a:headEnd type="none" w="med" len="med"/>
+                      <a:tailEnd type="none" w="med" len="med"/>
+                    </a:lnT>
+                    <a:lnB w="12700" cap="flat" cmpd="sng" algn="ctr">
+                      <a:solidFill>
+                        <a:srgbClr val="666666"/>
+                      </a:solidFill>
+                      <a:prstDash val="solid"/>
+                      <a:round/>
+                      <a:headEnd type="none" w="med" len="med"/>
+                      <a:tailEnd type="none" w="med" len="med"/>
+                    </a:lnB>
+                  </a:tcPr>
+                </a:tc>
+                <a:tc>
+                  <a:txBody>
+                    <a:bodyPr/>
+                    <a:lstStyle/>
+                    <a:p>
+                      <a:pPr indent="0" marL="0">
+                        <a:buNone/>
+                      </a:pPr>
+                      <a:r>
+                        <a:rPr lang="en-US" sz="900" dirty="0">
+                          <a:solidFill>
+                            <a:srgbClr val="000000"/>
+                          </a:solidFill>
+                        </a:rPr>
+                        <a:t>Medium-High</a:t>
+                      </a:r>
+                      <a:endParaRPr lang="en-US" sz="900" dirty="0"/>
+                    </a:p>
+                  </a:txBody>
+                  <a:tcPr marL="91440" marR="91440" marT="45720" marB="45720">
+                    <a:lnL w="12700" cap="flat" cmpd="sng" algn="ctr">
+                      <a:solidFill>
+                        <a:srgbClr val="666666"/>
+                      </a:solidFill>
+                      <a:prstDash val="solid"/>
+                      <a:round/>
+                      <a:headEnd type="none" w="med" len="med"/>
+                      <a:tailEnd type="none" w="med" len="med"/>
+                    </a:lnL>
+                    <a:lnR w="12700" cap="flat" cmpd="sng" algn="ctr">
+                      <a:solidFill>
+                        <a:srgbClr val="666666"/>
+                      </a:solidFill>
+                      <a:prstDash val="solid"/>
+                      <a:round/>
+                      <a:headEnd type="none" w="med" len="med"/>
+                      <a:tailEnd type="none" w="med" len="med"/>
+                    </a:lnR>
+                    <a:lnT w="12700" cap="flat" cmpd="sng" algn="ctr">
+                      <a:solidFill>
+                        <a:srgbClr val="666666"/>
+                      </a:solidFill>
+                      <a:prstDash val="solid"/>
+                      <a:round/>
+                      <a:headEnd type="none" w="med" len="med"/>
+                      <a:tailEnd type="none" w="med" len="med"/>
+                    </a:lnT>
+                    <a:lnB w="12700" cap="flat" cmpd="sng" algn="ctr">
+                      <a:solidFill>
+                        <a:srgbClr val="666666"/>
+                      </a:solidFill>
+                      <a:prstDash val="solid"/>
+                      <a:round/>
+                      <a:headEnd type="none" w="med" len="med"/>
+                      <a:tailEnd type="none" w="med" len="med"/>
+                    </a:lnB>
+                  </a:tcPr>
+                </a:tc>
+                <a:tc>
+                  <a:txBody>
+                    <a:bodyPr/>
+                    <a:lstStyle/>
+                    <a:p>
+                      <a:pPr indent="0" marL="0">
+                        <a:buNone/>
+                      </a:pPr>
+                      <a:r>
+                        <a:rPr lang="en-US" sz="900" dirty="0">
+                          <a:solidFill>
+                            <a:srgbClr val="000000"/>
+                          </a:solidFill>
+                        </a:rPr>
+                        <a:t>UI/SCG FAQ identifies parcel ownership and lease use for bulk salt/aggregate storage and describes remediation setting of the site.</a:t>
+                      </a:r>
+                      <a:endParaRPr lang="en-US" sz="900" dirty="0"/>
+                    </a:p>
+                  </a:txBody>
+                  <a:tcPr marL="91440" marR="91440" marT="45720" marB="45720">
+                    <a:lnL w="12700" cap="flat" cmpd="sng" algn="ctr">
+                      <a:solidFill>
+                        <a:srgbClr val="666666"/>
+                      </a:solidFill>
+                      <a:prstDash val="solid"/>
+                      <a:round/>
+                      <a:headEnd type="none" w="med" len="med"/>
+                      <a:tailEnd type="none" w="med" len="med"/>
+                    </a:lnL>
+                    <a:lnR w="12700" cap="flat" cmpd="sng" algn="ctr">
+                      <a:solidFill>
+                        <a:srgbClr val="666666"/>
+                      </a:solidFill>
+                      <a:prstDash val="solid"/>
+                      <a:round/>
+                      <a:headEnd type="none" w="med" len="med"/>
+                      <a:tailEnd type="none" w="med" len="med"/>
+                    </a:lnR>
+                    <a:lnT w="12700" cap="flat" cmpd="sng" algn="ctr">
+                      <a:solidFill>
+                        <a:srgbClr val="666666"/>
+                      </a:solidFill>
+                      <a:prstDash val="solid"/>
+                      <a:round/>
+                      <a:headEnd type="none" w="med" len="med"/>
+                      <a:tailEnd type="none" w="med" len="med"/>
+                    </a:lnT>
+                    <a:lnB w="12700" cap="flat" cmpd="sng" algn="ctr">
+                      <a:solidFill>
+                        <a:srgbClr val="666666"/>
+                      </a:solidFill>
+                      <a:prstDash val="solid"/>
+                      <a:round/>
+                      <a:headEnd type="none" w="med" len="med"/>
+                      <a:tailEnd type="none" w="med" len="med"/>
+                    </a:lnB>
+                  </a:tcPr>
+                </a:tc>
+              </a:tr>
+              <a:tr h="1417320">
+                <a:tc>
+                  <a:txBody>
+                    <a:bodyPr/>
+                    <a:lstStyle/>
+                    <a:p>
+                      <a:pPr indent="0" marL="0">
+                        <a:buNone/>
+                      </a:pPr>
+                      <a:r>
+                        <a:rPr lang="en-US" sz="900" dirty="0">
+                          <a:solidFill>
+                            <a:srgbClr val="000000"/>
+                          </a:solidFill>
+                        </a:rPr>
+                        <a:t>Connecticut DEEP</a:t>
+                      </a:r>
+                      <a:endParaRPr lang="en-US" sz="900" dirty="0"/>
+                    </a:p>
+                  </a:txBody>
+                  <a:tcPr marL="91440" marR="91440" marT="45720" marB="45720">
+                    <a:lnL w="12700" cap="flat" cmpd="sng" algn="ctr">
+                      <a:solidFill>
+                        <a:srgbClr val="666666"/>
+                      </a:solidFill>
+                      <a:prstDash val="solid"/>
+                      <a:round/>
+                      <a:headEnd type="none" w="med" len="med"/>
+                      <a:tailEnd type="none" w="med" len="med"/>
+                    </a:lnL>
+                    <a:lnR w="12700" cap="flat" cmpd="sng" algn="ctr">
+                      <a:solidFill>
+                        <a:srgbClr val="666666"/>
+                      </a:solidFill>
+                      <a:prstDash val="solid"/>
+                      <a:round/>
+                      <a:headEnd type="none" w="med" len="med"/>
+                      <a:tailEnd type="none" w="med" len="med"/>
+                    </a:lnR>
+                    <a:lnT w="12700" cap="flat" cmpd="sng" algn="ctr">
+                      <a:solidFill>
+                        <a:srgbClr val="666666"/>
+                      </a:solidFill>
+                      <a:prstDash val="solid"/>
+                      <a:round/>
+                      <a:headEnd type="none" w="med" len="med"/>
+                      <a:tailEnd type="none" w="med" len="med"/>
+                    </a:lnT>
+                    <a:lnB w="12700" cap="flat" cmpd="sng" algn="ctr">
+                      <a:solidFill>
+                        <a:srgbClr val="666666"/>
+                      </a:solidFill>
+                      <a:prstDash val="solid"/>
+                      <a:round/>
+                      <a:headEnd type="none" w="med" len="med"/>
+                      <a:tailEnd type="none" w="med" len="med"/>
+                    </a:lnB>
+                  </a:tcPr>
+                </a:tc>
+                <a:tc>
+                  <a:txBody>
+                    <a:bodyPr/>
+                    <a:lstStyle/>
+                    <a:p>
+                      <a:pPr indent="0" marL="0">
+                        <a:buNone/>
+                      </a:pPr>
+                      <a:r>
+                        <a:rPr lang="en-US" sz="900" dirty="0">
+                          <a:solidFill>
+                            <a:srgbClr val="000000"/>
+                          </a:solidFill>
+                        </a:rPr>
+                        <a:t>Prevent pollutant discharge to waters; enforce permit compliance; maintain defensible permitting process under public scrutiny.</a:t>
+                      </a:r>
+                      <a:endParaRPr lang="en-US" sz="900" dirty="0"/>
+                    </a:p>
+                  </a:txBody>
+                  <a:tcPr marL="91440" marR="91440" marT="45720" marB="45720">
+                    <a:lnL w="12700" cap="flat" cmpd="sng" algn="ctr">
+                      <a:solidFill>
+                        <a:srgbClr val="666666"/>
+                      </a:solidFill>
+                      <a:prstDash val="solid"/>
+                      <a:round/>
+                      <a:headEnd type="none" w="med" len="med"/>
+                      <a:tailEnd type="none" w="med" len="med"/>
+                    </a:lnL>
+                    <a:lnR w="12700" cap="flat" cmpd="sng" algn="ctr">
+                      <a:solidFill>
+                        <a:srgbClr val="666666"/>
+                      </a:solidFill>
+                      <a:prstDash val="solid"/>
+                      <a:round/>
+                      <a:headEnd type="none" w="med" len="med"/>
+                      <a:tailEnd type="none" w="med" len="med"/>
+                    </a:lnR>
+                    <a:lnT w="12700" cap="flat" cmpd="sng" algn="ctr">
+                      <a:solidFill>
+                        <a:srgbClr val="666666"/>
+                      </a:solidFill>
+                      <a:prstDash val="solid"/>
+                      <a:round/>
+                      <a:headEnd type="none" w="med" len="med"/>
+                      <a:tailEnd type="none" w="med" len="med"/>
+                    </a:lnT>
+                    <a:lnB w="12700" cap="flat" cmpd="sng" algn="ctr">
+                      <a:solidFill>
+                        <a:srgbClr val="666666"/>
+                      </a:solidFill>
+                      <a:prstDash val="solid"/>
+                      <a:round/>
+                      <a:headEnd type="none" w="med" len="med"/>
+                      <a:tailEnd type="none" w="med" len="med"/>
+                    </a:lnB>
+                  </a:tcPr>
+                </a:tc>
+                <a:tc>
+                  <a:txBody>
+                    <a:bodyPr/>
+                    <a:lstStyle/>
+                    <a:p>
+                      <a:pPr indent="0" marL="0">
+                        <a:buNone/>
+                      </a:pPr>
+                      <a:r>
+                        <a:rPr lang="en-US" sz="900" dirty="0">
+                          <a:solidFill>
+                            <a:srgbClr val="000000"/>
+                          </a:solidFill>
+                        </a:rPr>
+                        <a:t>Industrial stormwater permit conditions (CTR050000 / Sector AE); inspections; corrective-action orders; enforcement discretion.</a:t>
+                      </a:r>
+                      <a:endParaRPr lang="en-US" sz="900" dirty="0"/>
+                    </a:p>
+                  </a:txBody>
+                  <a:tcPr marL="91440" marR="91440" marT="45720" marB="45720">
+                    <a:lnL w="12700" cap="flat" cmpd="sng" algn="ctr">
+                      <a:solidFill>
+                        <a:srgbClr val="666666"/>
+                      </a:solidFill>
+                      <a:prstDash val="solid"/>
+                      <a:round/>
+                      <a:headEnd type="none" w="med" len="med"/>
+                      <a:tailEnd type="none" w="med" len="med"/>
+                    </a:lnL>
+                    <a:lnR w="12700" cap="flat" cmpd="sng" algn="ctr">
+                      <a:solidFill>
+                        <a:srgbClr val="666666"/>
+                      </a:solidFill>
+                      <a:prstDash val="solid"/>
+                      <a:round/>
+                      <a:headEnd type="none" w="med" len="med"/>
+                      <a:tailEnd type="none" w="med" len="med"/>
+                    </a:lnR>
+                    <a:lnT w="12700" cap="flat" cmpd="sng" algn="ctr">
+                      <a:solidFill>
+                        <a:srgbClr val="666666"/>
+                      </a:solidFill>
+                      <a:prstDash val="solid"/>
+                      <a:round/>
+                      <a:headEnd type="none" w="med" len="med"/>
+                      <a:tailEnd type="none" w="med" len="med"/>
+                    </a:lnT>
+                    <a:lnB w="12700" cap="flat" cmpd="sng" algn="ctr">
+                      <a:solidFill>
+                        <a:srgbClr val="666666"/>
+                      </a:solidFill>
+                      <a:prstDash val="solid"/>
+                      <a:round/>
+                      <a:headEnd type="none" w="med" len="med"/>
+                      <a:tailEnd type="none" w="med" len="med"/>
+                    </a:lnB>
                   </a:tcPr>
                 </a:tc>
                 <a:tc>
@@ -2269,9 +4507,6 @@
                       <a:headEnd type="none" w="med" len="med"/>
                       <a:tailEnd type="none" w="med" len="med"/>
                     </a:lnB>
-                    <a:solidFill>
-                      <a:srgbClr val="FDFDFD"/>
-                    </a:solidFill>
                   </a:tcPr>
                 </a:tc>
                 <a:tc>
@@ -2288,7 +4523,7 @@
                             <a:srgbClr val="000000"/>
                           </a:solidFill>
                         </a:rPr>
-                        <a:t>Likely supports phased transition; likely resists disruptive relocation that breaks logistics economics.</a:t>
+                        <a:t>DEEP is the permit/enforcement authority; permit text sets operational constraints and hearing record captures regulator position and process boundaries.</a:t>
                       </a:r>
                       <a:endParaRPr lang="en-US" sz="900" dirty="0"/>
                     </a:p>
@@ -2330,588 +4565,6 @@
                       <a:headEnd type="none" w="med" len="med"/>
                       <a:tailEnd type="none" w="med" len="med"/>
                     </a:lnB>
-                    <a:solidFill>
-                      <a:srgbClr val="FDFDFD"/>
-                    </a:solidFill>
-                  </a:tcPr>
-                </a:tc>
-                <a:tc>
-                  <a:txBody>
-                    <a:bodyPr/>
-                    <a:lstStyle/>
-                    <a:p>
-                      <a:pPr indent="0" marL="0">
-                        <a:buNone/>
-                      </a:pPr>
-                      <a:r>
-                        <a:rPr lang="en-US" sz="900" dirty="0">
-                          <a:solidFill>
-                            <a:srgbClr val="000000"/>
-                          </a:solidFill>
-                        </a:rPr>
-                        <a:t>Maintain reliable low-cost multimodal salt logistics.</a:t>
-                      </a:r>
-                      <a:endParaRPr lang="en-US" sz="900" dirty="0"/>
-                    </a:p>
-                  </a:txBody>
-                  <a:tcPr marL="91440" marR="91440" marT="45720" marB="45720">
-                    <a:lnL w="12700" cap="flat" cmpd="sng" algn="ctr">
-                      <a:solidFill>
-                        <a:srgbClr val="666666"/>
-                      </a:solidFill>
-                      <a:prstDash val="solid"/>
-                      <a:round/>
-                      <a:headEnd type="none" w="med" len="med"/>
-                      <a:tailEnd type="none" w="med" len="med"/>
-                    </a:lnL>
-                    <a:lnR w="12700" cap="flat" cmpd="sng" algn="ctr">
-                      <a:solidFill>
-                        <a:srgbClr val="666666"/>
-                      </a:solidFill>
-                      <a:prstDash val="solid"/>
-                      <a:round/>
-                      <a:headEnd type="none" w="med" len="med"/>
-                      <a:tailEnd type="none" w="med" len="med"/>
-                    </a:lnR>
-                    <a:lnT w="12700" cap="flat" cmpd="sng" algn="ctr">
-                      <a:solidFill>
-                        <a:srgbClr val="666666"/>
-                      </a:solidFill>
-                      <a:prstDash val="solid"/>
-                      <a:round/>
-                      <a:headEnd type="none" w="med" len="med"/>
-                      <a:tailEnd type="none" w="med" len="med"/>
-                    </a:lnT>
-                    <a:lnB w="12700" cap="flat" cmpd="sng" algn="ctr">
-                      <a:solidFill>
-                        <a:srgbClr val="666666"/>
-                      </a:solidFill>
-                      <a:prstDash val="solid"/>
-                      <a:round/>
-                      <a:headEnd type="none" w="med" len="med"/>
-                      <a:tailEnd type="none" w="med" len="med"/>
-                    </a:lnB>
-                    <a:solidFill>
-                      <a:srgbClr val="FDFDFD"/>
-                    </a:solidFill>
-                  </a:tcPr>
-                </a:tc>
-                <a:tc>
-                  <a:txBody>
-                    <a:bodyPr/>
-                    <a:lstStyle/>
-                    <a:p>
-                      <a:pPr indent="0" marL="0">
-                        <a:buNone/>
-                      </a:pPr>
-                      <a:r>
-                        <a:rPr lang="en-US" sz="900" dirty="0">
-                          <a:solidFill>
-                            <a:srgbClr val="000000"/>
-                          </a:solidFill>
-                        </a:rPr>
-                        <a:t>Operator role and network/logistics disclosures; New Haven rail investment signals operating leverage.</a:t>
-                      </a:r>
-                      <a:endParaRPr lang="en-US" sz="900" dirty="0"/>
-                    </a:p>
-                  </a:txBody>
-                  <a:tcPr marL="91440" marR="91440" marT="45720" marB="45720">
-                    <a:lnL w="12700" cap="flat" cmpd="sng" algn="ctr">
-                      <a:solidFill>
-                        <a:srgbClr val="666666"/>
-                      </a:solidFill>
-                      <a:prstDash val="solid"/>
-                      <a:round/>
-                      <a:headEnd type="none" w="med" len="med"/>
-                      <a:tailEnd type="none" w="med" len="med"/>
-                    </a:lnL>
-                    <a:lnR w="12700" cap="flat" cmpd="sng" algn="ctr">
-                      <a:solidFill>
-                        <a:srgbClr val="666666"/>
-                      </a:solidFill>
-                      <a:prstDash val="solid"/>
-                      <a:round/>
-                      <a:headEnd type="none" w="med" len="med"/>
-                      <a:tailEnd type="none" w="med" len="med"/>
-                    </a:lnR>
-                    <a:lnT w="12700" cap="flat" cmpd="sng" algn="ctr">
-                      <a:solidFill>
-                        <a:srgbClr val="666666"/>
-                      </a:solidFill>
-                      <a:prstDash val="solid"/>
-                      <a:round/>
-                      <a:headEnd type="none" w="med" len="med"/>
-                      <a:tailEnd type="none" w="med" len="med"/>
-                    </a:lnT>
-                    <a:lnB w="12700" cap="flat" cmpd="sng" algn="ctr">
-                      <a:solidFill>
-                        <a:srgbClr val="666666"/>
-                      </a:solidFill>
-                      <a:prstDash val="solid"/>
-                      <a:round/>
-                      <a:headEnd type="none" w="med" len="med"/>
-                      <a:tailEnd type="none" w="med" len="med"/>
-                    </a:lnB>
-                    <a:solidFill>
-                      <a:srgbClr val="FDFDFD"/>
-                    </a:solidFill>
-                  </a:tcPr>
-                </a:tc>
-                <a:tc>
-                  <a:txBody>
-                    <a:bodyPr/>
-                    <a:lstStyle/>
-                    <a:p>
-                      <a:pPr indent="0" marL="0">
-                        <a:buNone/>
-                      </a:pPr>
-                      <a:r>
-                        <a:rPr lang="en-US" sz="900" dirty="0">
-                          <a:solidFill>
-                            <a:srgbClr val="000000"/>
-                          </a:solidFill>
-                        </a:rPr>
-                        <a:t>https://enstructure.com/network/northeast/</a:t>
-                      </a:r>
-                      <a:endParaRPr lang="en-US" sz="900" dirty="0"/>
-                    </a:p>
-                    <a:p>
-                      <a:pPr indent="0" marL="0">
-                        <a:buNone/>
-                      </a:pPr>
-                      <a:r>
-                        <a:rPr lang="en-US" sz="900" dirty="0">
-                          <a:solidFill>
-                            <a:srgbClr val="000000"/>
-                          </a:solidFill>
-                        </a:rPr>
-                        <a:t>https://enstructure.com/gateway-terminal-announces-partnership-with-enstructure/</a:t>
-                      </a:r>
-                      <a:endParaRPr lang="en-US" sz="900" dirty="0"/>
-                    </a:p>
-                    <a:p>
-                      <a:pPr indent="0" marL="0">
-                        <a:buNone/>
-                      </a:pPr>
-                      <a:r>
-                        <a:rPr lang="en-US" sz="900" dirty="0">
-                          <a:solidFill>
-                            <a:srgbClr val="000000"/>
-                          </a:solidFill>
-                        </a:rPr>
-                        <a:t>https://enstructure.com/enstructure-to-receive-11-2-million-federal-grant-to-add-two-new-railyards-and-new-railroad-track-in-new-haven-ct/</a:t>
-                      </a:r>
-                      <a:endParaRPr lang="en-US" sz="900" dirty="0"/>
-                    </a:p>
-                  </a:txBody>
-                  <a:tcPr marL="91440" marR="91440" marT="45720" marB="45720">
-                    <a:lnL w="12700" cap="flat" cmpd="sng" algn="ctr">
-                      <a:solidFill>
-                        <a:srgbClr val="666666"/>
-                      </a:solidFill>
-                      <a:prstDash val="solid"/>
-                      <a:round/>
-                      <a:headEnd type="none" w="med" len="med"/>
-                      <a:tailEnd type="none" w="med" len="med"/>
-                    </a:lnL>
-                    <a:lnR w="12700" cap="flat" cmpd="sng" algn="ctr">
-                      <a:solidFill>
-                        <a:srgbClr val="666666"/>
-                      </a:solidFill>
-                      <a:prstDash val="solid"/>
-                      <a:round/>
-                      <a:headEnd type="none" w="med" len="med"/>
-                      <a:tailEnd type="none" w="med" len="med"/>
-                    </a:lnR>
-                    <a:lnT w="12700" cap="flat" cmpd="sng" algn="ctr">
-                      <a:solidFill>
-                        <a:srgbClr val="666666"/>
-                      </a:solidFill>
-                      <a:prstDash val="solid"/>
-                      <a:round/>
-                      <a:headEnd type="none" w="med" len="med"/>
-                      <a:tailEnd type="none" w="med" len="med"/>
-                    </a:lnT>
-                    <a:lnB w="12700" cap="flat" cmpd="sng" algn="ctr">
-                      <a:solidFill>
-                        <a:srgbClr val="666666"/>
-                      </a:solidFill>
-                      <a:prstDash val="solid"/>
-                      <a:round/>
-                      <a:headEnd type="none" w="med" len="med"/>
-                      <a:tailEnd type="none" w="med" len="med"/>
-                    </a:lnB>
-                    <a:solidFill>
-                      <a:srgbClr val="FDFDFD"/>
-                    </a:solidFill>
-                  </a:tcPr>
-                </a:tc>
-              </a:tr>
-              <a:tr h="1417320">
-                <a:tc>
-                  <a:txBody>
-                    <a:bodyPr/>
-                    <a:lstStyle/>
-                    <a:p>
-                      <a:pPr indent="0" marL="0">
-                        <a:buNone/>
-                      </a:pPr>
-                      <a:r>
-                        <a:rPr lang="en-US" sz="900" dirty="0">
-                          <a:solidFill>
-                            <a:srgbClr val="000000"/>
-                          </a:solidFill>
-                        </a:rPr>
-                        <a:t>Southern Connecticut Gas (property owner context)</a:t>
-                      </a:r>
-                      <a:endParaRPr lang="en-US" sz="900" dirty="0"/>
-                    </a:p>
-                  </a:txBody>
-                  <a:tcPr marL="91440" marR="91440" marT="45720" marB="45720">
-                    <a:lnL w="12700" cap="flat" cmpd="sng" algn="ctr">
-                      <a:solidFill>
-                        <a:srgbClr val="666666"/>
-                      </a:solidFill>
-                      <a:prstDash val="solid"/>
-                      <a:round/>
-                      <a:headEnd type="none" w="med" len="med"/>
-                      <a:tailEnd type="none" w="med" len="med"/>
-                    </a:lnL>
-                    <a:lnR w="12700" cap="flat" cmpd="sng" algn="ctr">
-                      <a:solidFill>
-                        <a:srgbClr val="666666"/>
-                      </a:solidFill>
-                      <a:prstDash val="solid"/>
-                      <a:round/>
-                      <a:headEnd type="none" w="med" len="med"/>
-                      <a:tailEnd type="none" w="med" len="med"/>
-                    </a:lnR>
-                    <a:lnT w="12700" cap="flat" cmpd="sng" algn="ctr">
-                      <a:solidFill>
-                        <a:srgbClr val="666666"/>
-                      </a:solidFill>
-                      <a:prstDash val="solid"/>
-                      <a:round/>
-                      <a:headEnd type="none" w="med" len="med"/>
-                      <a:tailEnd type="none" w="med" len="med"/>
-                    </a:lnT>
-                    <a:lnB w="12700" cap="flat" cmpd="sng" algn="ctr">
-                      <a:solidFill>
-                        <a:srgbClr val="666666"/>
-                      </a:solidFill>
-                      <a:prstDash val="solid"/>
-                      <a:round/>
-                      <a:headEnd type="none" w="med" len="med"/>
-                      <a:tailEnd type="none" w="med" len="med"/>
-                    </a:lnB>
-                    <a:solidFill>
-                      <a:srgbClr val="FDFDFD"/>
-                    </a:solidFill>
-                  </a:tcPr>
-                </a:tc>
-                <a:tc>
-                  <a:txBody>
-                    <a:bodyPr/>
-                    <a:lstStyle/>
-                    <a:p>
-                      <a:pPr indent="0" marL="0">
-                        <a:buNone/>
-                      </a:pPr>
-                      <a:r>
-                        <a:rPr lang="en-US" sz="900" dirty="0">
-                          <a:solidFill>
-                            <a:srgbClr val="000000"/>
-                          </a:solidFill>
-                        </a:rPr>
-                        <a:t>Medium-High</a:t>
-                      </a:r>
-                      <a:endParaRPr lang="en-US" sz="900" dirty="0"/>
-                    </a:p>
-                  </a:txBody>
-                  <a:tcPr marL="91440" marR="91440" marT="45720" marB="45720">
-                    <a:lnL w="12700" cap="flat" cmpd="sng" algn="ctr">
-                      <a:solidFill>
-                        <a:srgbClr val="666666"/>
-                      </a:solidFill>
-                      <a:prstDash val="solid"/>
-                      <a:round/>
-                      <a:headEnd type="none" w="med" len="med"/>
-                      <a:tailEnd type="none" w="med" len="med"/>
-                    </a:lnL>
-                    <a:lnR w="12700" cap="flat" cmpd="sng" algn="ctr">
-                      <a:solidFill>
-                        <a:srgbClr val="666666"/>
-                      </a:solidFill>
-                      <a:prstDash val="solid"/>
-                      <a:round/>
-                      <a:headEnd type="none" w="med" len="med"/>
-                      <a:tailEnd type="none" w="med" len="med"/>
-                    </a:lnR>
-                    <a:lnT w="12700" cap="flat" cmpd="sng" algn="ctr">
-                      <a:solidFill>
-                        <a:srgbClr val="666666"/>
-                      </a:solidFill>
-                      <a:prstDash val="solid"/>
-                      <a:round/>
-                      <a:headEnd type="none" w="med" len="med"/>
-                      <a:tailEnd type="none" w="med" len="med"/>
-                    </a:lnT>
-                    <a:lnB w="12700" cap="flat" cmpd="sng" algn="ctr">
-                      <a:solidFill>
-                        <a:srgbClr val="666666"/>
-                      </a:solidFill>
-                      <a:prstDash val="solid"/>
-                      <a:round/>
-                      <a:headEnd type="none" w="med" len="med"/>
-                      <a:tailEnd type="none" w="med" len="med"/>
-                    </a:lnB>
-                    <a:solidFill>
-                      <a:srgbClr val="FDFDFD"/>
-                    </a:solidFill>
-                  </a:tcPr>
-                </a:tc>
-                <a:tc>
-                  <a:txBody>
-                    <a:bodyPr/>
-                    <a:lstStyle/>
-                    <a:p>
-                      <a:pPr indent="0" marL="0">
-                        <a:buNone/>
-                      </a:pPr>
-                      <a:r>
-                        <a:rPr lang="en-US" sz="900" dirty="0">
-                          <a:solidFill>
-                            <a:srgbClr val="000000"/>
-                          </a:solidFill>
-                        </a:rPr>
-                        <a:t>Likely supports risk-reducing options that preserve land value and manageable transition costs.</a:t>
-                      </a:r>
-                      <a:endParaRPr lang="en-US" sz="900" dirty="0"/>
-                    </a:p>
-                  </a:txBody>
-                  <a:tcPr marL="91440" marR="91440" marT="45720" marB="45720">
-                    <a:lnL w="12700" cap="flat" cmpd="sng" algn="ctr">
-                      <a:solidFill>
-                        <a:srgbClr val="666666"/>
-                      </a:solidFill>
-                      <a:prstDash val="solid"/>
-                      <a:round/>
-                      <a:headEnd type="none" w="med" len="med"/>
-                      <a:tailEnd type="none" w="med" len="med"/>
-                    </a:lnL>
-                    <a:lnR w="12700" cap="flat" cmpd="sng" algn="ctr">
-                      <a:solidFill>
-                        <a:srgbClr val="666666"/>
-                      </a:solidFill>
-                      <a:prstDash val="solid"/>
-                      <a:round/>
-                      <a:headEnd type="none" w="med" len="med"/>
-                      <a:tailEnd type="none" w="med" len="med"/>
-                    </a:lnR>
-                    <a:lnT w="12700" cap="flat" cmpd="sng" algn="ctr">
-                      <a:solidFill>
-                        <a:srgbClr val="666666"/>
-                      </a:solidFill>
-                      <a:prstDash val="solid"/>
-                      <a:round/>
-                      <a:headEnd type="none" w="med" len="med"/>
-                      <a:tailEnd type="none" w="med" len="med"/>
-                    </a:lnT>
-                    <a:lnB w="12700" cap="flat" cmpd="sng" algn="ctr">
-                      <a:solidFill>
-                        <a:srgbClr val="666666"/>
-                      </a:solidFill>
-                      <a:prstDash val="solid"/>
-                      <a:round/>
-                      <a:headEnd type="none" w="med" len="med"/>
-                      <a:tailEnd type="none" w="med" len="med"/>
-                    </a:lnB>
-                    <a:solidFill>
-                      <a:srgbClr val="FDFDFD"/>
-                    </a:solidFill>
-                  </a:tcPr>
-                </a:tc>
-                <a:tc>
-                  <a:txBody>
-                    <a:bodyPr/>
-                    <a:lstStyle/>
-                    <a:p>
-                      <a:pPr indent="0" marL="0">
-                        <a:buNone/>
-                      </a:pPr>
-                      <a:r>
-                        <a:rPr lang="en-US" sz="900" dirty="0">
-                          <a:solidFill>
-                            <a:srgbClr val="000000"/>
-                          </a:solidFill>
-                        </a:rPr>
-                        <a:t>Manage property/remediation obligations, lease value, liability exposure.</a:t>
-                      </a:r>
-                      <a:endParaRPr lang="en-US" sz="900" dirty="0"/>
-                    </a:p>
-                  </a:txBody>
-                  <a:tcPr marL="91440" marR="91440" marT="45720" marB="45720">
-                    <a:lnL w="12700" cap="flat" cmpd="sng" algn="ctr">
-                      <a:solidFill>
-                        <a:srgbClr val="666666"/>
-                      </a:solidFill>
-                      <a:prstDash val="solid"/>
-                      <a:round/>
-                      <a:headEnd type="none" w="med" len="med"/>
-                      <a:tailEnd type="none" w="med" len="med"/>
-                    </a:lnL>
-                    <a:lnR w="12700" cap="flat" cmpd="sng" algn="ctr">
-                      <a:solidFill>
-                        <a:srgbClr val="666666"/>
-                      </a:solidFill>
-                      <a:prstDash val="solid"/>
-                      <a:round/>
-                      <a:headEnd type="none" w="med" len="med"/>
-                      <a:tailEnd type="none" w="med" len="med"/>
-                    </a:lnR>
-                    <a:lnT w="12700" cap="flat" cmpd="sng" algn="ctr">
-                      <a:solidFill>
-                        <a:srgbClr val="666666"/>
-                      </a:solidFill>
-                      <a:prstDash val="solid"/>
-                      <a:round/>
-                      <a:headEnd type="none" w="med" len="med"/>
-                      <a:tailEnd type="none" w="med" len="med"/>
-                    </a:lnT>
-                    <a:lnB w="12700" cap="flat" cmpd="sng" algn="ctr">
-                      <a:solidFill>
-                        <a:srgbClr val="666666"/>
-                      </a:solidFill>
-                      <a:prstDash val="solid"/>
-                      <a:round/>
-                      <a:headEnd type="none" w="med" len="med"/>
-                      <a:tailEnd type="none" w="med" len="med"/>
-                    </a:lnB>
-                    <a:solidFill>
-                      <a:srgbClr val="FDFDFD"/>
-                    </a:solidFill>
-                  </a:tcPr>
-                </a:tc>
-                <a:tc>
-                  <a:txBody>
-                    <a:bodyPr/>
-                    <a:lstStyle/>
-                    <a:p>
-                      <a:pPr indent="0" marL="0">
-                        <a:buNone/>
-                      </a:pPr>
-                      <a:r>
-                        <a:rPr lang="en-US" sz="900" dirty="0">
-                          <a:solidFill>
-                            <a:srgbClr val="000000"/>
-                          </a:solidFill>
-                        </a:rPr>
-                        <a:t>UI/SCG site FAQ describes parcel ownership and lease use for bulk salt storage under remediation context.</a:t>
-                      </a:r>
-                      <a:endParaRPr lang="en-US" sz="900" dirty="0"/>
-                    </a:p>
-                  </a:txBody>
-                  <a:tcPr marL="91440" marR="91440" marT="45720" marB="45720">
-                    <a:lnL w="12700" cap="flat" cmpd="sng" algn="ctr">
-                      <a:solidFill>
-                        <a:srgbClr val="666666"/>
-                      </a:solidFill>
-                      <a:prstDash val="solid"/>
-                      <a:round/>
-                      <a:headEnd type="none" w="med" len="med"/>
-                      <a:tailEnd type="none" w="med" len="med"/>
-                    </a:lnL>
-                    <a:lnR w="12700" cap="flat" cmpd="sng" algn="ctr">
-                      <a:solidFill>
-                        <a:srgbClr val="666666"/>
-                      </a:solidFill>
-                      <a:prstDash val="solid"/>
-                      <a:round/>
-                      <a:headEnd type="none" w="med" len="med"/>
-                      <a:tailEnd type="none" w="med" len="med"/>
-                    </a:lnR>
-                    <a:lnT w="12700" cap="flat" cmpd="sng" algn="ctr">
-                      <a:solidFill>
-                        <a:srgbClr val="666666"/>
-                      </a:solidFill>
-                      <a:prstDash val="solid"/>
-                      <a:round/>
-                      <a:headEnd type="none" w="med" len="med"/>
-                      <a:tailEnd type="none" w="med" len="med"/>
-                    </a:lnT>
-                    <a:lnB w="12700" cap="flat" cmpd="sng" algn="ctr">
-                      <a:solidFill>
-                        <a:srgbClr val="666666"/>
-                      </a:solidFill>
-                      <a:prstDash val="solid"/>
-                      <a:round/>
-                      <a:headEnd type="none" w="med" len="med"/>
-                      <a:tailEnd type="none" w="med" len="med"/>
-                    </a:lnB>
-                    <a:solidFill>
-                      <a:srgbClr val="FDFDFD"/>
-                    </a:solidFill>
-                  </a:tcPr>
-                </a:tc>
-                <a:tc>
-                  <a:txBody>
-                    <a:bodyPr/>
-                    <a:lstStyle/>
-                    <a:p>
-                      <a:pPr indent="0" marL="0">
-                        <a:buNone/>
-                      </a:pPr>
-                      <a:r>
-                        <a:rPr lang="en-US" sz="900" dirty="0">
-                          <a:solidFill>
-                            <a:srgbClr val="000000"/>
-                          </a:solidFill>
-                        </a:rPr>
-                        <a:t>https://www.uinet.com/documents/1678076/1696637/UI_ChapelStreet_FAQ.pdf/c3fe8470-bad2-33fa-e046-e16c975afa0f</a:t>
-                      </a:r>
-                      <a:endParaRPr lang="en-US" sz="900" dirty="0"/>
-                    </a:p>
-                  </a:txBody>
-                  <a:tcPr marL="91440" marR="91440" marT="45720" marB="45720">
-                    <a:lnL w="12700" cap="flat" cmpd="sng" algn="ctr">
-                      <a:solidFill>
-                        <a:srgbClr val="666666"/>
-                      </a:solidFill>
-                      <a:prstDash val="solid"/>
-                      <a:round/>
-                      <a:headEnd type="none" w="med" len="med"/>
-                      <a:tailEnd type="none" w="med" len="med"/>
-                    </a:lnL>
-                    <a:lnR w="12700" cap="flat" cmpd="sng" algn="ctr">
-                      <a:solidFill>
-                        <a:srgbClr val="666666"/>
-                      </a:solidFill>
-                      <a:prstDash val="solid"/>
-                      <a:round/>
-                      <a:headEnd type="none" w="med" len="med"/>
-                      <a:tailEnd type="none" w="med" len="med"/>
-                    </a:lnR>
-                    <a:lnT w="12700" cap="flat" cmpd="sng" algn="ctr">
-                      <a:solidFill>
-                        <a:srgbClr val="666666"/>
-                      </a:solidFill>
-                      <a:prstDash val="solid"/>
-                      <a:round/>
-                      <a:headEnd type="none" w="med" len="med"/>
-                      <a:tailEnd type="none" w="med" len="med"/>
-                    </a:lnT>
-                    <a:lnB w="12700" cap="flat" cmpd="sng" algn="ctr">
-                      <a:solidFill>
-                        <a:srgbClr val="666666"/>
-                      </a:solidFill>
-                      <a:prstDash val="solid"/>
-                      <a:round/>
-                      <a:headEnd type="none" w="med" len="med"/>
-                      <a:tailEnd type="none" w="med" len="med"/>
-                    </a:lnB>
-                    <a:solidFill>
-                      <a:srgbClr val="FDFDFD"/>
-                    </a:solidFill>
                   </a:tcPr>
                 </a:tc>
               </a:tr>
@@ -2953,7 +4606,7 @@
         <p:spPr>
           <a:xfrm>
             <a:off x="274320" y="182880"/>
-            <a:ext cx="11430000" cy="365760"/>
+            <a:ext cx="10972800" cy="365760"/>
           </a:xfrm>
           <a:prstGeom prst="rect">
             <a:avLst/>
@@ -3003,12 +4656,11 @@
             <a:tbl>
               <a:tblPr/>
               <a:tblGrid>
-                <a:gridCol w="1554480"/>
-                <a:gridCol w="731520"/>
-                <a:gridCol w="2011680"/>
-                <a:gridCol w="1920240"/>
-                <a:gridCol w="2560320"/>
-                <a:gridCol w="3017520"/>
+                <a:gridCol w="1737360"/>
+                <a:gridCol w="2743200"/>
+                <a:gridCol w="2377440"/>
+                <a:gridCol w="822960"/>
+                <a:gridCol w="4114800"/>
               </a:tblGrid>
               <a:tr h="1417320">
                 <a:tc>
@@ -3067,9 +4719,122 @@
                       <a:headEnd type="none" w="med" len="med"/>
                       <a:tailEnd type="none" w="med" len="med"/>
                     </a:lnB>
-                    <a:solidFill>
-                      <a:srgbClr val="FDFDFD"/>
-                    </a:solidFill>
+                  </a:tcPr>
+                </a:tc>
+                <a:tc>
+                  <a:txBody>
+                    <a:bodyPr/>
+                    <a:lstStyle/>
+                    <a:p>
+                      <a:pPr indent="0" marL="0">
+                        <a:buNone/>
+                      </a:pPr>
+                      <a:r>
+                        <a:rPr lang="en-US" sz="900" dirty="0">
+                          <a:solidFill>
+                            <a:srgbClr val="000000"/>
+                          </a:solidFill>
+                        </a:rPr>
+                        <a:t>Likely interests</a:t>
+                      </a:r>
+                      <a:endParaRPr lang="en-US" sz="900" dirty="0"/>
+                    </a:p>
+                  </a:txBody>
+                  <a:tcPr marL="91440" marR="91440" marT="45720" marB="45720">
+                    <a:lnL w="12700" cap="flat" cmpd="sng" algn="ctr">
+                      <a:solidFill>
+                        <a:srgbClr val="666666"/>
+                      </a:solidFill>
+                      <a:prstDash val="solid"/>
+                      <a:round/>
+                      <a:headEnd type="none" w="med" len="med"/>
+                      <a:tailEnd type="none" w="med" len="med"/>
+                    </a:lnL>
+                    <a:lnR w="12700" cap="flat" cmpd="sng" algn="ctr">
+                      <a:solidFill>
+                        <a:srgbClr val="666666"/>
+                      </a:solidFill>
+                      <a:prstDash val="solid"/>
+                      <a:round/>
+                      <a:headEnd type="none" w="med" len="med"/>
+                      <a:tailEnd type="none" w="med" len="med"/>
+                    </a:lnR>
+                    <a:lnT w="12700" cap="flat" cmpd="sng" algn="ctr">
+                      <a:solidFill>
+                        <a:srgbClr val="666666"/>
+                      </a:solidFill>
+                      <a:prstDash val="solid"/>
+                      <a:round/>
+                      <a:headEnd type="none" w="med" len="med"/>
+                      <a:tailEnd type="none" w="med" len="med"/>
+                    </a:lnT>
+                    <a:lnB w="12700" cap="flat" cmpd="sng" algn="ctr">
+                      <a:solidFill>
+                        <a:srgbClr val="666666"/>
+                      </a:solidFill>
+                      <a:prstDash val="solid"/>
+                      <a:round/>
+                      <a:headEnd type="none" w="med" len="med"/>
+                      <a:tailEnd type="none" w="med" len="med"/>
+                    </a:lnB>
+                  </a:tcPr>
+                </a:tc>
+                <a:tc>
+                  <a:txBody>
+                    <a:bodyPr/>
+                    <a:lstStyle/>
+                    <a:p>
+                      <a:pPr indent="0" marL="0">
+                        <a:buNone/>
+                      </a:pPr>
+                      <a:r>
+                        <a:rPr lang="en-US" sz="900" dirty="0">
+                          <a:solidFill>
+                            <a:srgbClr val="000000"/>
+                          </a:solidFill>
+                        </a:rPr>
+                        <a:t>Practical levers</a:t>
+                      </a:r>
+                      <a:endParaRPr lang="en-US" sz="900" dirty="0"/>
+                    </a:p>
+                  </a:txBody>
+                  <a:tcPr marL="91440" marR="91440" marT="45720" marB="45720">
+                    <a:lnL w="12700" cap="flat" cmpd="sng" algn="ctr">
+                      <a:solidFill>
+                        <a:srgbClr val="666666"/>
+                      </a:solidFill>
+                      <a:prstDash val="solid"/>
+                      <a:round/>
+                      <a:headEnd type="none" w="med" len="med"/>
+                      <a:tailEnd type="none" w="med" len="med"/>
+                    </a:lnL>
+                    <a:lnR w="12700" cap="flat" cmpd="sng" algn="ctr">
+                      <a:solidFill>
+                        <a:srgbClr val="666666"/>
+                      </a:solidFill>
+                      <a:prstDash val="solid"/>
+                      <a:round/>
+                      <a:headEnd type="none" w="med" len="med"/>
+                      <a:tailEnd type="none" w="med" len="med"/>
+                    </a:lnR>
+                    <a:lnT w="12700" cap="flat" cmpd="sng" algn="ctr">
+                      <a:solidFill>
+                        <a:srgbClr val="666666"/>
+                      </a:solidFill>
+                      <a:prstDash val="solid"/>
+                      <a:round/>
+                      <a:headEnd type="none" w="med" len="med"/>
+                      <a:tailEnd type="none" w="med" len="med"/>
+                    </a:lnT>
+                    <a:lnB w="12700" cap="flat" cmpd="sng" algn="ctr">
+                      <a:solidFill>
+                        <a:srgbClr val="666666"/>
+                      </a:solidFill>
+                      <a:prstDash val="solid"/>
+                      <a:round/>
+                      <a:headEnd type="none" w="med" len="med"/>
+                      <a:tailEnd type="none" w="med" len="med"/>
+                    </a:lnB>
                   </a:tcPr>
                 </a:tc>
                 <a:tc>
@@ -3128,9 +4893,6 @@
                       <a:headEnd type="none" w="med" len="med"/>
                       <a:tailEnd type="none" w="med" len="med"/>
                     </a:lnB>
-                    <a:solidFill>
-                      <a:srgbClr val="FDFDFD"/>
-                    </a:solidFill>
                   </a:tcPr>
                 </a:tc>
                 <a:tc>
@@ -3147,7 +4909,7 @@
                             <a:srgbClr val="000000"/>
                           </a:solidFill>
                         </a:rPr>
-                        <a:t>Likely position</a:t>
+                        <a:t>Notes grounded in record</a:t>
                       </a:r>
                       <a:endParaRPr lang="en-US" sz="900" dirty="0"/>
                     </a:p>
@@ -3189,192 +4951,6 @@
                       <a:headEnd type="none" w="med" len="med"/>
                       <a:tailEnd type="none" w="med" len="med"/>
                     </a:lnB>
-                    <a:solidFill>
-                      <a:srgbClr val="FDFDFD"/>
-                    </a:solidFill>
-                  </a:tcPr>
-                </a:tc>
-                <a:tc>
-                  <a:txBody>
-                    <a:bodyPr/>
-                    <a:lstStyle/>
-                    <a:p>
-                      <a:pPr indent="0" marL="0">
-                        <a:buNone/>
-                      </a:pPr>
-                      <a:r>
-                        <a:rPr lang="en-US" sz="900" dirty="0">
-                          <a:solidFill>
-                            <a:srgbClr val="000000"/>
-                          </a:solidFill>
-                        </a:rPr>
-                        <a:t>Core interests</a:t>
-                      </a:r>
-                      <a:endParaRPr lang="en-US" sz="900" dirty="0"/>
-                    </a:p>
-                  </a:txBody>
-                  <a:tcPr marL="91440" marR="91440" marT="45720" marB="45720">
-                    <a:lnL w="12700" cap="flat" cmpd="sng" algn="ctr">
-                      <a:solidFill>
-                        <a:srgbClr val="666666"/>
-                      </a:solidFill>
-                      <a:prstDash val="solid"/>
-                      <a:round/>
-                      <a:headEnd type="none" w="med" len="med"/>
-                      <a:tailEnd type="none" w="med" len="med"/>
-                    </a:lnL>
-                    <a:lnR w="12700" cap="flat" cmpd="sng" algn="ctr">
-                      <a:solidFill>
-                        <a:srgbClr val="666666"/>
-                      </a:solidFill>
-                      <a:prstDash val="solid"/>
-                      <a:round/>
-                      <a:headEnd type="none" w="med" len="med"/>
-                      <a:tailEnd type="none" w="med" len="med"/>
-                    </a:lnR>
-                    <a:lnT w="12700" cap="flat" cmpd="sng" algn="ctr">
-                      <a:solidFill>
-                        <a:srgbClr val="666666"/>
-                      </a:solidFill>
-                      <a:prstDash val="solid"/>
-                      <a:round/>
-                      <a:headEnd type="none" w="med" len="med"/>
-                      <a:tailEnd type="none" w="med" len="med"/>
-                    </a:lnT>
-                    <a:lnB w="12700" cap="flat" cmpd="sng" algn="ctr">
-                      <a:solidFill>
-                        <a:srgbClr val="666666"/>
-                      </a:solidFill>
-                      <a:prstDash val="solid"/>
-                      <a:round/>
-                      <a:headEnd type="none" w="med" len="med"/>
-                      <a:tailEnd type="none" w="med" len="med"/>
-                    </a:lnB>
-                    <a:solidFill>
-                      <a:srgbClr val="FDFDFD"/>
-                    </a:solidFill>
-                  </a:tcPr>
-                </a:tc>
-                <a:tc>
-                  <a:txBody>
-                    <a:bodyPr/>
-                    <a:lstStyle/>
-                    <a:p>
-                      <a:pPr indent="0" marL="0">
-                        <a:buNone/>
-                      </a:pPr>
-                      <a:r>
-                        <a:rPr lang="en-US" sz="900" dirty="0">
-                          <a:solidFill>
-                            <a:srgbClr val="000000"/>
-                          </a:solidFill>
-                        </a:rPr>
-                        <a:t>Justification</a:t>
-                      </a:r>
-                      <a:endParaRPr lang="en-US" sz="900" dirty="0"/>
-                    </a:p>
-                  </a:txBody>
-                  <a:tcPr marL="91440" marR="91440" marT="45720" marB="45720">
-                    <a:lnL w="12700" cap="flat" cmpd="sng" algn="ctr">
-                      <a:solidFill>
-                        <a:srgbClr val="666666"/>
-                      </a:solidFill>
-                      <a:prstDash val="solid"/>
-                      <a:round/>
-                      <a:headEnd type="none" w="med" len="med"/>
-                      <a:tailEnd type="none" w="med" len="med"/>
-                    </a:lnL>
-                    <a:lnR w="12700" cap="flat" cmpd="sng" algn="ctr">
-                      <a:solidFill>
-                        <a:srgbClr val="666666"/>
-                      </a:solidFill>
-                      <a:prstDash val="solid"/>
-                      <a:round/>
-                      <a:headEnd type="none" w="med" len="med"/>
-                      <a:tailEnd type="none" w="med" len="med"/>
-                    </a:lnR>
-                    <a:lnT w="12700" cap="flat" cmpd="sng" algn="ctr">
-                      <a:solidFill>
-                        <a:srgbClr val="666666"/>
-                      </a:solidFill>
-                      <a:prstDash val="solid"/>
-                      <a:round/>
-                      <a:headEnd type="none" w="med" len="med"/>
-                      <a:tailEnd type="none" w="med" len="med"/>
-                    </a:lnT>
-                    <a:lnB w="12700" cap="flat" cmpd="sng" algn="ctr">
-                      <a:solidFill>
-                        <a:srgbClr val="666666"/>
-                      </a:solidFill>
-                      <a:prstDash val="solid"/>
-                      <a:round/>
-                      <a:headEnd type="none" w="med" len="med"/>
-                      <a:tailEnd type="none" w="med" len="med"/>
-                    </a:lnB>
-                    <a:solidFill>
-                      <a:srgbClr val="FDFDFD"/>
-                    </a:solidFill>
-                  </a:tcPr>
-                </a:tc>
-                <a:tc>
-                  <a:txBody>
-                    <a:bodyPr/>
-                    <a:lstStyle/>
-                    <a:p>
-                      <a:pPr indent="0" marL="0">
-                        <a:buNone/>
-                      </a:pPr>
-                      <a:r>
-                        <a:rPr lang="en-US" sz="900" dirty="0">
-                          <a:solidFill>
-                            <a:srgbClr val="000000"/>
-                          </a:solidFill>
-                        </a:rPr>
-                        <a:t>Sources</a:t>
-                      </a:r>
-                      <a:endParaRPr lang="en-US" sz="900" dirty="0"/>
-                    </a:p>
-                  </a:txBody>
-                  <a:tcPr marL="91440" marR="91440" marT="45720" marB="45720">
-                    <a:lnL w="12700" cap="flat" cmpd="sng" algn="ctr">
-                      <a:solidFill>
-                        <a:srgbClr val="666666"/>
-                      </a:solidFill>
-                      <a:prstDash val="solid"/>
-                      <a:round/>
-                      <a:headEnd type="none" w="med" len="med"/>
-                      <a:tailEnd type="none" w="med" len="med"/>
-                    </a:lnL>
-                    <a:lnR w="12700" cap="flat" cmpd="sng" algn="ctr">
-                      <a:solidFill>
-                        <a:srgbClr val="666666"/>
-                      </a:solidFill>
-                      <a:prstDash val="solid"/>
-                      <a:round/>
-                      <a:headEnd type="none" w="med" len="med"/>
-                      <a:tailEnd type="none" w="med" len="med"/>
-                    </a:lnR>
-                    <a:lnT w="12700" cap="flat" cmpd="sng" algn="ctr">
-                      <a:solidFill>
-                        <a:srgbClr val="666666"/>
-                      </a:solidFill>
-                      <a:prstDash val="solid"/>
-                      <a:round/>
-                      <a:headEnd type="none" w="med" len="med"/>
-                      <a:tailEnd type="none" w="med" len="med"/>
-                    </a:lnT>
-                    <a:lnB w="12700" cap="flat" cmpd="sng" algn="ctr">
-                      <a:solidFill>
-                        <a:srgbClr val="666666"/>
-                      </a:solidFill>
-                      <a:prstDash val="solid"/>
-                      <a:round/>
-                      <a:headEnd type="none" w="med" len="med"/>
-                      <a:tailEnd type="none" w="med" len="med"/>
-                    </a:lnB>
-                    <a:solidFill>
-                      <a:srgbClr val="FDFDFD"/>
-                    </a:solidFill>
                   </a:tcPr>
                 </a:tc>
               </a:tr>
@@ -3435,9 +5011,122 @@
                       <a:headEnd type="none" w="med" len="med"/>
                       <a:tailEnd type="none" w="med" len="med"/>
                     </a:lnB>
-                    <a:solidFill>
-                      <a:srgbClr val="FDFDFD"/>
-                    </a:solidFill>
+                  </a:tcPr>
+                </a:tc>
+                <a:tc>
+                  <a:txBody>
+                    <a:bodyPr/>
+                    <a:lstStyle/>
+                    <a:p>
+                      <a:pPr indent="0" marL="0">
+                        <a:buNone/>
+                      </a:pPr>
+                      <a:r>
+                        <a:rPr lang="en-US" sz="900" dirty="0">
+                          <a:solidFill>
+                            <a:srgbClr val="000000"/>
+                          </a:solidFill>
+                        </a:rPr>
+                        <a:t>Waterfront redevelopment quality; EJ/community outcomes near Mill River/Fair Haven; maintain winter road-safety reliability.</a:t>
+                      </a:r>
+                      <a:endParaRPr lang="en-US" sz="900" dirty="0"/>
+                    </a:p>
+                  </a:txBody>
+                  <a:tcPr marL="91440" marR="91440" marT="45720" marB="45720">
+                    <a:lnL w="12700" cap="flat" cmpd="sng" algn="ctr">
+                      <a:solidFill>
+                        <a:srgbClr val="666666"/>
+                      </a:solidFill>
+                      <a:prstDash val="solid"/>
+                      <a:round/>
+                      <a:headEnd type="none" w="med" len="med"/>
+                      <a:tailEnd type="none" w="med" len="med"/>
+                    </a:lnL>
+                    <a:lnR w="12700" cap="flat" cmpd="sng" algn="ctr">
+                      <a:solidFill>
+                        <a:srgbClr val="666666"/>
+                      </a:solidFill>
+                      <a:prstDash val="solid"/>
+                      <a:round/>
+                      <a:headEnd type="none" w="med" len="med"/>
+                      <a:tailEnd type="none" w="med" len="med"/>
+                    </a:lnR>
+                    <a:lnT w="12700" cap="flat" cmpd="sng" algn="ctr">
+                      <a:solidFill>
+                        <a:srgbClr val="666666"/>
+                      </a:solidFill>
+                      <a:prstDash val="solid"/>
+                      <a:round/>
+                      <a:headEnd type="none" w="med" len="med"/>
+                      <a:tailEnd type="none" w="med" len="med"/>
+                    </a:lnT>
+                    <a:lnB w="12700" cap="flat" cmpd="sng" algn="ctr">
+                      <a:solidFill>
+                        <a:srgbClr val="666666"/>
+                      </a:solidFill>
+                      <a:prstDash val="solid"/>
+                      <a:round/>
+                      <a:headEnd type="none" w="med" len="med"/>
+                      <a:tailEnd type="none" w="med" len="med"/>
+                    </a:lnB>
+                  </a:tcPr>
+                </a:tc>
+                <a:tc>
+                  <a:txBody>
+                    <a:bodyPr/>
+                    <a:lstStyle/>
+                    <a:p>
+                      <a:pPr indent="0" marL="0">
+                        <a:buNone/>
+                      </a:pPr>
+                      <a:r>
+                        <a:rPr lang="en-US" sz="900" dirty="0">
+                          <a:solidFill>
+                            <a:srgbClr val="000000"/>
+                          </a:solidFill>
+                        </a:rPr>
+                        <a:t>Land-use planning and local political agenda-setting; coordination pressure with state and port actors; public process influence.</a:t>
+                      </a:r>
+                      <a:endParaRPr lang="en-US" sz="900" dirty="0"/>
+                    </a:p>
+                  </a:txBody>
+                  <a:tcPr marL="91440" marR="91440" marT="45720" marB="45720">
+                    <a:lnL w="12700" cap="flat" cmpd="sng" algn="ctr">
+                      <a:solidFill>
+                        <a:srgbClr val="666666"/>
+                      </a:solidFill>
+                      <a:prstDash val="solid"/>
+                      <a:round/>
+                      <a:headEnd type="none" w="med" len="med"/>
+                      <a:tailEnd type="none" w="med" len="med"/>
+                    </a:lnL>
+                    <a:lnR w="12700" cap="flat" cmpd="sng" algn="ctr">
+                      <a:solidFill>
+                        <a:srgbClr val="666666"/>
+                      </a:solidFill>
+                      <a:prstDash val="solid"/>
+                      <a:round/>
+                      <a:headEnd type="none" w="med" len="med"/>
+                      <a:tailEnd type="none" w="med" len="med"/>
+                    </a:lnR>
+                    <a:lnT w="12700" cap="flat" cmpd="sng" algn="ctr">
+                      <a:solidFill>
+                        <a:srgbClr val="666666"/>
+                      </a:solidFill>
+                      <a:prstDash val="solid"/>
+                      <a:round/>
+                      <a:headEnd type="none" w="med" len="med"/>
+                      <a:tailEnd type="none" w="med" len="med"/>
+                    </a:lnT>
+                    <a:lnB w="12700" cap="flat" cmpd="sng" algn="ctr">
+                      <a:solidFill>
+                        <a:srgbClr val="666666"/>
+                      </a:solidFill>
+                      <a:prstDash val="solid"/>
+                      <a:round/>
+                      <a:headEnd type="none" w="med" len="med"/>
+                      <a:tailEnd type="none" w="med" len="med"/>
+                    </a:lnB>
                   </a:tcPr>
                 </a:tc>
                 <a:tc>
@@ -3496,9 +5185,6 @@
                       <a:headEnd type="none" w="med" len="med"/>
                       <a:tailEnd type="none" w="med" len="med"/>
                     </a:lnB>
-                    <a:solidFill>
-                      <a:srgbClr val="FDFDFD"/>
-                    </a:solidFill>
                   </a:tcPr>
                 </a:tc>
                 <a:tc>
@@ -3515,7 +5201,7 @@
                             <a:srgbClr val="000000"/>
                           </a:solidFill>
                         </a:rPr>
-                        <a:t>Likely supportive of relocation or lower-exposure configuration if reliability/cost impacts are managed.</a:t>
+                        <a:t>Mill River planning materials and local coverage show proximity to community assets and redevelopment priorities around the waterfront corridor.</a:t>
                       </a:r>
                       <a:endParaRPr lang="en-US" sz="900" dirty="0"/>
                     </a:p>
@@ -3557,206 +5243,6 @@
                       <a:headEnd type="none" w="med" len="med"/>
                       <a:tailEnd type="none" w="med" len="med"/>
                     </a:lnB>
-                    <a:solidFill>
-                      <a:srgbClr val="FDFDFD"/>
-                    </a:solidFill>
-                  </a:tcPr>
-                </a:tc>
-                <a:tc>
-                  <a:txBody>
-                    <a:bodyPr/>
-                    <a:lstStyle/>
-                    <a:p>
-                      <a:pPr indent="0" marL="0">
-                        <a:buNone/>
-                      </a:pPr>
-                      <a:r>
-                        <a:rPr lang="en-US" sz="900" dirty="0">
-                          <a:solidFill>
-                            <a:srgbClr val="000000"/>
-                          </a:solidFill>
-                        </a:rPr>
-                        <a:t>Waterfront redevelopment quality, neighborhood impacts, winter service continuity.</a:t>
-                      </a:r>
-                      <a:endParaRPr lang="en-US" sz="900" dirty="0"/>
-                    </a:p>
-                  </a:txBody>
-                  <a:tcPr marL="91440" marR="91440" marT="45720" marB="45720">
-                    <a:lnL w="12700" cap="flat" cmpd="sng" algn="ctr">
-                      <a:solidFill>
-                        <a:srgbClr val="666666"/>
-                      </a:solidFill>
-                      <a:prstDash val="solid"/>
-                      <a:round/>
-                      <a:headEnd type="none" w="med" len="med"/>
-                      <a:tailEnd type="none" w="med" len="med"/>
-                    </a:lnL>
-                    <a:lnR w="12700" cap="flat" cmpd="sng" algn="ctr">
-                      <a:solidFill>
-                        <a:srgbClr val="666666"/>
-                      </a:solidFill>
-                      <a:prstDash val="solid"/>
-                      <a:round/>
-                      <a:headEnd type="none" w="med" len="med"/>
-                      <a:tailEnd type="none" w="med" len="med"/>
-                    </a:lnR>
-                    <a:lnT w="12700" cap="flat" cmpd="sng" algn="ctr">
-                      <a:solidFill>
-                        <a:srgbClr val="666666"/>
-                      </a:solidFill>
-                      <a:prstDash val="solid"/>
-                      <a:round/>
-                      <a:headEnd type="none" w="med" len="med"/>
-                      <a:tailEnd type="none" w="med" len="med"/>
-                    </a:lnT>
-                    <a:lnB w="12700" cap="flat" cmpd="sng" algn="ctr">
-                      <a:solidFill>
-                        <a:srgbClr val="666666"/>
-                      </a:solidFill>
-                      <a:prstDash val="solid"/>
-                      <a:round/>
-                      <a:headEnd type="none" w="med" len="med"/>
-                      <a:tailEnd type="none" w="med" len="med"/>
-                    </a:lnB>
-                    <a:solidFill>
-                      <a:srgbClr val="FDFDFD"/>
-                    </a:solidFill>
-                  </a:tcPr>
-                </a:tc>
-                <a:tc>
-                  <a:txBody>
-                    <a:bodyPr/>
-                    <a:lstStyle/>
-                    <a:p>
-                      <a:pPr indent="0" marL="0">
-                        <a:buNone/>
-                      </a:pPr>
-                      <a:r>
-                        <a:rPr lang="en-US" sz="900" dirty="0">
-                          <a:solidFill>
-                            <a:srgbClr val="000000"/>
-                          </a:solidFill>
-                        </a:rPr>
-                        <a:t>Planning/public process context shows sensitive land-use and community concerns near Mill River corridor.</a:t>
-                      </a:r>
-                      <a:endParaRPr lang="en-US" sz="900" dirty="0"/>
-                    </a:p>
-                  </a:txBody>
-                  <a:tcPr marL="91440" marR="91440" marT="45720" marB="45720">
-                    <a:lnL w="12700" cap="flat" cmpd="sng" algn="ctr">
-                      <a:solidFill>
-                        <a:srgbClr val="666666"/>
-                      </a:solidFill>
-                      <a:prstDash val="solid"/>
-                      <a:round/>
-                      <a:headEnd type="none" w="med" len="med"/>
-                      <a:tailEnd type="none" w="med" len="med"/>
-                    </a:lnL>
-                    <a:lnR w="12700" cap="flat" cmpd="sng" algn="ctr">
-                      <a:solidFill>
-                        <a:srgbClr val="666666"/>
-                      </a:solidFill>
-                      <a:prstDash val="solid"/>
-                      <a:round/>
-                      <a:headEnd type="none" w="med" len="med"/>
-                      <a:tailEnd type="none" w="med" len="med"/>
-                    </a:lnR>
-                    <a:lnT w="12700" cap="flat" cmpd="sng" algn="ctr">
-                      <a:solidFill>
-                        <a:srgbClr val="666666"/>
-                      </a:solidFill>
-                      <a:prstDash val="solid"/>
-                      <a:round/>
-                      <a:headEnd type="none" w="med" len="med"/>
-                      <a:tailEnd type="none" w="med" len="med"/>
-                    </a:lnT>
-                    <a:lnB w="12700" cap="flat" cmpd="sng" algn="ctr">
-                      <a:solidFill>
-                        <a:srgbClr val="666666"/>
-                      </a:solidFill>
-                      <a:prstDash val="solid"/>
-                      <a:round/>
-                      <a:headEnd type="none" w="med" len="med"/>
-                      <a:tailEnd type="none" w="med" len="med"/>
-                    </a:lnB>
-                    <a:solidFill>
-                      <a:srgbClr val="FDFDFD"/>
-                    </a:solidFill>
-                  </a:tcPr>
-                </a:tc>
-                <a:tc>
-                  <a:txBody>
-                    <a:bodyPr/>
-                    <a:lstStyle/>
-                    <a:p>
-                      <a:pPr indent="0" marL="0">
-                        <a:buNone/>
-                      </a:pPr>
-                      <a:r>
-                        <a:rPr lang="en-US" sz="900" dirty="0">
-                          <a:solidFill>
-                            <a:srgbClr val="000000"/>
-                          </a:solidFill>
-                        </a:rPr>
-                        <a:t>https://bpb-us-w2.wpmucdn.com/campuspress.yale.edu/dist/a/4311/files/2023/11/New-Haven-Mill-River-Planning-Study-Final-Report-FINAL-web.pdf</a:t>
-                      </a:r>
-                      <a:endParaRPr lang="en-US" sz="900" dirty="0"/>
-                    </a:p>
-                    <a:p>
-                      <a:pPr indent="0" marL="0">
-                        <a:buNone/>
-                      </a:pPr>
-                      <a:r>
-                        <a:rPr lang="en-US" sz="900" dirty="0">
-                          <a:solidFill>
-                            <a:srgbClr val="000000"/>
-                          </a:solidFill>
-                        </a:rPr>
-                        <a:t>https://www.newhavenindependent.org/2025/05/15/deep_salt_pile_hearing/</a:t>
-                      </a:r>
-                      <a:endParaRPr lang="en-US" sz="900" dirty="0"/>
-                    </a:p>
-                  </a:txBody>
-                  <a:tcPr marL="91440" marR="91440" marT="45720" marB="45720">
-                    <a:lnL w="12700" cap="flat" cmpd="sng" algn="ctr">
-                      <a:solidFill>
-                        <a:srgbClr val="666666"/>
-                      </a:solidFill>
-                      <a:prstDash val="solid"/>
-                      <a:round/>
-                      <a:headEnd type="none" w="med" len="med"/>
-                      <a:tailEnd type="none" w="med" len="med"/>
-                    </a:lnL>
-                    <a:lnR w="12700" cap="flat" cmpd="sng" algn="ctr">
-                      <a:solidFill>
-                        <a:srgbClr val="666666"/>
-                      </a:solidFill>
-                      <a:prstDash val="solid"/>
-                      <a:round/>
-                      <a:headEnd type="none" w="med" len="med"/>
-                      <a:tailEnd type="none" w="med" len="med"/>
-                    </a:lnR>
-                    <a:lnT w="12700" cap="flat" cmpd="sng" algn="ctr">
-                      <a:solidFill>
-                        <a:srgbClr val="666666"/>
-                      </a:solidFill>
-                      <a:prstDash val="solid"/>
-                      <a:round/>
-                      <a:headEnd type="none" w="med" len="med"/>
-                      <a:tailEnd type="none" w="med" len="med"/>
-                    </a:lnT>
-                    <a:lnB w="12700" cap="flat" cmpd="sng" algn="ctr">
-                      <a:solidFill>
-                        <a:srgbClr val="666666"/>
-                      </a:solidFill>
-                      <a:prstDash val="solid"/>
-                      <a:round/>
-                      <a:headEnd type="none" w="med" len="med"/>
-                      <a:tailEnd type="none" w="med" len="med"/>
-                    </a:lnB>
-                    <a:solidFill>
-                      <a:srgbClr val="FDFDFD"/>
-                    </a:solidFill>
                   </a:tcPr>
                 </a:tc>
               </a:tr>
@@ -3775,7 +5261,7 @@
                             <a:srgbClr val="000000"/>
                           </a:solidFill>
                         </a:rPr>
-                        <a:t>EPA</a:t>
+                        <a:t>EPA (program + funding context)</a:t>
                       </a:r>
                       <a:endParaRPr lang="en-US" sz="900" dirty="0"/>
                     </a:p>
@@ -3817,9 +5303,122 @@
                       <a:headEnd type="none" w="med" len="med"/>
                       <a:tailEnd type="none" w="med" len="med"/>
                     </a:lnB>
-                    <a:solidFill>
-                      <a:srgbClr val="FDFDFD"/>
-                    </a:solidFill>
+                  </a:tcPr>
+                </a:tc>
+                <a:tc>
+                  <a:txBody>
+                    <a:bodyPr/>
+                    <a:lstStyle/>
+                    <a:p>
+                      <a:pPr indent="0" marL="0">
+                        <a:buNone/>
+                      </a:pPr>
+                      <a:r>
+                        <a:rPr lang="en-US" sz="900" dirty="0">
+                          <a:solidFill>
+                            <a:srgbClr val="000000"/>
+                          </a:solidFill>
+                        </a:rPr>
+                        <a:t>NPDES program outcomes; stormwater risk reduction; climate/environmental benefits from funded port projects.</a:t>
+                      </a:r>
+                      <a:endParaRPr lang="en-US" sz="900" dirty="0"/>
+                    </a:p>
+                  </a:txBody>
+                  <a:tcPr marL="91440" marR="91440" marT="45720" marB="45720">
+                    <a:lnL w="12700" cap="flat" cmpd="sng" algn="ctr">
+                      <a:solidFill>
+                        <a:srgbClr val="666666"/>
+                      </a:solidFill>
+                      <a:prstDash val="solid"/>
+                      <a:round/>
+                      <a:headEnd type="none" w="med" len="med"/>
+                      <a:tailEnd type="none" w="med" len="med"/>
+                    </a:lnL>
+                    <a:lnR w="12700" cap="flat" cmpd="sng" algn="ctr">
+                      <a:solidFill>
+                        <a:srgbClr val="666666"/>
+                      </a:solidFill>
+                      <a:prstDash val="solid"/>
+                      <a:round/>
+                      <a:headEnd type="none" w="med" len="med"/>
+                      <a:tailEnd type="none" w="med" len="med"/>
+                    </a:lnR>
+                    <a:lnT w="12700" cap="flat" cmpd="sng" algn="ctr">
+                      <a:solidFill>
+                        <a:srgbClr val="666666"/>
+                      </a:solidFill>
+                      <a:prstDash val="solid"/>
+                      <a:round/>
+                      <a:headEnd type="none" w="med" len="med"/>
+                      <a:tailEnd type="none" w="med" len="med"/>
+                    </a:lnT>
+                    <a:lnB w="12700" cap="flat" cmpd="sng" algn="ctr">
+                      <a:solidFill>
+                        <a:srgbClr val="666666"/>
+                      </a:solidFill>
+                      <a:prstDash val="solid"/>
+                      <a:round/>
+                      <a:headEnd type="none" w="med" len="med"/>
+                      <a:tailEnd type="none" w="med" len="med"/>
+                    </a:lnB>
+                  </a:tcPr>
+                </a:tc>
+                <a:tc>
+                  <a:txBody>
+                    <a:bodyPr/>
+                    <a:lstStyle/>
+                    <a:p>
+                      <a:pPr indent="0" marL="0">
+                        <a:buNone/>
+                      </a:pPr>
+                      <a:r>
+                        <a:rPr lang="en-US" sz="900" dirty="0">
+                          <a:solidFill>
+                            <a:srgbClr val="000000"/>
+                          </a:solidFill>
+                        </a:rPr>
+                        <a:t>Federal program guidance and oversight context; grant conditions and funding signals (e.g., Clean Ports).</a:t>
+                      </a:r>
+                      <a:endParaRPr lang="en-US" sz="900" dirty="0"/>
+                    </a:p>
+                  </a:txBody>
+                  <a:tcPr marL="91440" marR="91440" marT="45720" marB="45720">
+                    <a:lnL w="12700" cap="flat" cmpd="sng" algn="ctr">
+                      <a:solidFill>
+                        <a:srgbClr val="666666"/>
+                      </a:solidFill>
+                      <a:prstDash val="solid"/>
+                      <a:round/>
+                      <a:headEnd type="none" w="med" len="med"/>
+                      <a:tailEnd type="none" w="med" len="med"/>
+                    </a:lnL>
+                    <a:lnR w="12700" cap="flat" cmpd="sng" algn="ctr">
+                      <a:solidFill>
+                        <a:srgbClr val="666666"/>
+                      </a:solidFill>
+                      <a:prstDash val="solid"/>
+                      <a:round/>
+                      <a:headEnd type="none" w="med" len="med"/>
+                      <a:tailEnd type="none" w="med" len="med"/>
+                    </a:lnR>
+                    <a:lnT w="12700" cap="flat" cmpd="sng" algn="ctr">
+                      <a:solidFill>
+                        <a:srgbClr val="666666"/>
+                      </a:solidFill>
+                      <a:prstDash val="solid"/>
+                      <a:round/>
+                      <a:headEnd type="none" w="med" len="med"/>
+                      <a:tailEnd type="none" w="med" len="med"/>
+                    </a:lnT>
+                    <a:lnB w="12700" cap="flat" cmpd="sng" algn="ctr">
+                      <a:solidFill>
+                        <a:srgbClr val="666666"/>
+                      </a:solidFill>
+                      <a:prstDash val="solid"/>
+                      <a:round/>
+                      <a:headEnd type="none" w="med" len="med"/>
+                      <a:tailEnd type="none" w="med" len="med"/>
+                    </a:lnB>
                   </a:tcPr>
                 </a:tc>
                 <a:tc>
@@ -3878,9 +5477,6 @@
                       <a:headEnd type="none" w="med" len="med"/>
                       <a:tailEnd type="none" w="med" len="med"/>
                     </a:lnB>
-                    <a:solidFill>
-                      <a:srgbClr val="FDFDFD"/>
-                    </a:solidFill>
                   </a:tcPr>
                 </a:tc>
                 <a:tc>
@@ -3897,7 +5493,7 @@
                             <a:srgbClr val="000000"/>
                           </a:solidFill>
                         </a:rPr>
-                        <a:t>Supportive of mitigation and improved environmental outcomes; direct siting role is indirect.</a:t>
+                        <a:t>EPA defines stormwater regulatory framework and publicly announced major port-related investment in New Haven context.</a:t>
                       </a:r>
                       <a:endParaRPr lang="en-US" sz="900" dirty="0"/>
                     </a:p>
@@ -3939,206 +5535,6 @@
                       <a:headEnd type="none" w="med" len="med"/>
                       <a:tailEnd type="none" w="med" len="med"/>
                     </a:lnB>
-                    <a:solidFill>
-                      <a:srgbClr val="FDFDFD"/>
-                    </a:solidFill>
-                  </a:tcPr>
-                </a:tc>
-                <a:tc>
-                  <a:txBody>
-                    <a:bodyPr/>
-                    <a:lstStyle/>
-                    <a:p>
-                      <a:pPr indent="0" marL="0">
-                        <a:buNone/>
-                      </a:pPr>
-                      <a:r>
-                        <a:rPr lang="en-US" sz="900" dirty="0">
-                          <a:solidFill>
-                            <a:srgbClr val="000000"/>
-                          </a:solidFill>
-                        </a:rPr>
-                        <a:t>Clean Water Act outcomes and funded project accountability.</a:t>
-                      </a:r>
-                      <a:endParaRPr lang="en-US" sz="900" dirty="0"/>
-                    </a:p>
-                  </a:txBody>
-                  <a:tcPr marL="91440" marR="91440" marT="45720" marB="45720">
-                    <a:lnL w="12700" cap="flat" cmpd="sng" algn="ctr">
-                      <a:solidFill>
-                        <a:srgbClr val="666666"/>
-                      </a:solidFill>
-                      <a:prstDash val="solid"/>
-                      <a:round/>
-                      <a:headEnd type="none" w="med" len="med"/>
-                      <a:tailEnd type="none" w="med" len="med"/>
-                    </a:lnL>
-                    <a:lnR w="12700" cap="flat" cmpd="sng" algn="ctr">
-                      <a:solidFill>
-                        <a:srgbClr val="666666"/>
-                      </a:solidFill>
-                      <a:prstDash val="solid"/>
-                      <a:round/>
-                      <a:headEnd type="none" w="med" len="med"/>
-                      <a:tailEnd type="none" w="med" len="med"/>
-                    </a:lnR>
-                    <a:lnT w="12700" cap="flat" cmpd="sng" algn="ctr">
-                      <a:solidFill>
-                        <a:srgbClr val="666666"/>
-                      </a:solidFill>
-                      <a:prstDash val="solid"/>
-                      <a:round/>
-                      <a:headEnd type="none" w="med" len="med"/>
-                      <a:tailEnd type="none" w="med" len="med"/>
-                    </a:lnT>
-                    <a:lnB w="12700" cap="flat" cmpd="sng" algn="ctr">
-                      <a:solidFill>
-                        <a:srgbClr val="666666"/>
-                      </a:solidFill>
-                      <a:prstDash val="solid"/>
-                      <a:round/>
-                      <a:headEnd type="none" w="med" len="med"/>
-                      <a:tailEnd type="none" w="med" len="med"/>
-                    </a:lnB>
-                    <a:solidFill>
-                      <a:srgbClr val="FDFDFD"/>
-                    </a:solidFill>
-                  </a:tcPr>
-                </a:tc>
-                <a:tc>
-                  <a:txBody>
-                    <a:bodyPr/>
-                    <a:lstStyle/>
-                    <a:p>
-                      <a:pPr indent="0" marL="0">
-                        <a:buNone/>
-                      </a:pPr>
-                      <a:r>
-                        <a:rPr lang="en-US" sz="900" dirty="0">
-                          <a:solidFill>
-                            <a:srgbClr val="000000"/>
-                          </a:solidFill>
-                        </a:rPr>
-                        <a:t>NPDES framework + Clean Ports funding create policy/funding leverage.</a:t>
-                      </a:r>
-                      <a:endParaRPr lang="en-US" sz="900" dirty="0"/>
-                    </a:p>
-                  </a:txBody>
-                  <a:tcPr marL="91440" marR="91440" marT="45720" marB="45720">
-                    <a:lnL w="12700" cap="flat" cmpd="sng" algn="ctr">
-                      <a:solidFill>
-                        <a:srgbClr val="666666"/>
-                      </a:solidFill>
-                      <a:prstDash val="solid"/>
-                      <a:round/>
-                      <a:headEnd type="none" w="med" len="med"/>
-                      <a:tailEnd type="none" w="med" len="med"/>
-                    </a:lnL>
-                    <a:lnR w="12700" cap="flat" cmpd="sng" algn="ctr">
-                      <a:solidFill>
-                        <a:srgbClr val="666666"/>
-                      </a:solidFill>
-                      <a:prstDash val="solid"/>
-                      <a:round/>
-                      <a:headEnd type="none" w="med" len="med"/>
-                      <a:tailEnd type="none" w="med" len="med"/>
-                    </a:lnR>
-                    <a:lnT w="12700" cap="flat" cmpd="sng" algn="ctr">
-                      <a:solidFill>
-                        <a:srgbClr val="666666"/>
-                      </a:solidFill>
-                      <a:prstDash val="solid"/>
-                      <a:round/>
-                      <a:headEnd type="none" w="med" len="med"/>
-                      <a:tailEnd type="none" w="med" len="med"/>
-                    </a:lnT>
-                    <a:lnB w="12700" cap="flat" cmpd="sng" algn="ctr">
-                      <a:solidFill>
-                        <a:srgbClr val="666666"/>
-                      </a:solidFill>
-                      <a:prstDash val="solid"/>
-                      <a:round/>
-                      <a:headEnd type="none" w="med" len="med"/>
-                      <a:tailEnd type="none" w="med" len="med"/>
-                    </a:lnB>
-                    <a:solidFill>
-                      <a:srgbClr val="FDFDFD"/>
-                    </a:solidFill>
-                  </a:tcPr>
-                </a:tc>
-                <a:tc>
-                  <a:txBody>
-                    <a:bodyPr/>
-                    <a:lstStyle/>
-                    <a:p>
-                      <a:pPr indent="0" marL="0">
-                        <a:buNone/>
-                      </a:pPr>
-                      <a:r>
-                        <a:rPr lang="en-US" sz="900" dirty="0">
-                          <a:solidFill>
-                            <a:srgbClr val="000000"/>
-                          </a:solidFill>
-                        </a:rPr>
-                        <a:t>https://www.epa.gov/npdes/npdes-stormwater-program</a:t>
-                      </a:r>
-                      <a:endParaRPr lang="en-US" sz="900" dirty="0"/>
-                    </a:p>
-                    <a:p>
-                      <a:pPr indent="0" marL="0">
-                        <a:buNone/>
-                      </a:pPr>
-                      <a:r>
-                        <a:rPr lang="en-US" sz="900" dirty="0">
-                          <a:solidFill>
-                            <a:srgbClr val="000000"/>
-                          </a:solidFill>
-                        </a:rPr>
-                        <a:t>https://www.epa.gov/newsreleases/biden-harris-administration-announces-nearly-40-million-clean-ports-investments</a:t>
-                      </a:r>
-                      <a:endParaRPr lang="en-US" sz="900" dirty="0"/>
-                    </a:p>
-                  </a:txBody>
-                  <a:tcPr marL="91440" marR="91440" marT="45720" marB="45720">
-                    <a:lnL w="12700" cap="flat" cmpd="sng" algn="ctr">
-                      <a:solidFill>
-                        <a:srgbClr val="666666"/>
-                      </a:solidFill>
-                      <a:prstDash val="solid"/>
-                      <a:round/>
-                      <a:headEnd type="none" w="med" len="med"/>
-                      <a:tailEnd type="none" w="med" len="med"/>
-                    </a:lnL>
-                    <a:lnR w="12700" cap="flat" cmpd="sng" algn="ctr">
-                      <a:solidFill>
-                        <a:srgbClr val="666666"/>
-                      </a:solidFill>
-                      <a:prstDash val="solid"/>
-                      <a:round/>
-                      <a:headEnd type="none" w="med" len="med"/>
-                      <a:tailEnd type="none" w="med" len="med"/>
-                    </a:lnR>
-                    <a:lnT w="12700" cap="flat" cmpd="sng" algn="ctr">
-                      <a:solidFill>
-                        <a:srgbClr val="666666"/>
-                      </a:solidFill>
-                      <a:prstDash val="solid"/>
-                      <a:round/>
-                      <a:headEnd type="none" w="med" len="med"/>
-                      <a:tailEnd type="none" w="med" len="med"/>
-                    </a:lnT>
-                    <a:lnB w="12700" cap="flat" cmpd="sng" algn="ctr">
-                      <a:solidFill>
-                        <a:srgbClr val="666666"/>
-                      </a:solidFill>
-                      <a:prstDash val="solid"/>
-                      <a:round/>
-                      <a:headEnd type="none" w="med" len="med"/>
-                      <a:tailEnd type="none" w="med" len="med"/>
-                    </a:lnB>
-                    <a:solidFill>
-                      <a:srgbClr val="FDFDFD"/>
-                    </a:solidFill>
                   </a:tcPr>
                 </a:tc>
               </a:tr>
@@ -4199,9 +5595,122 @@
                       <a:headEnd type="none" w="med" len="med"/>
                       <a:tailEnd type="none" w="med" len="med"/>
                     </a:lnB>
-                    <a:solidFill>
-                      <a:srgbClr val="FDFDFD"/>
-                    </a:solidFill>
+                  </a:tcPr>
+                </a:tc>
+                <a:tc>
+                  <a:txBody>
+                    <a:bodyPr/>
+                    <a:lstStyle/>
+                    <a:p>
+                      <a:pPr indent="0" marL="0">
+                        <a:buNone/>
+                      </a:pPr>
+                      <a:r>
+                        <a:rPr lang="en-US" sz="900" dirty="0">
+                          <a:solidFill>
+                            <a:srgbClr val="000000"/>
+                          </a:solidFill>
+                        </a:rPr>
+                        <a:t>Port competitiveness and throughput; infrastructure modernization; reduced conflict between port operations and community expectations.</a:t>
+                      </a:r>
+                      <a:endParaRPr lang="en-US" sz="900" dirty="0"/>
+                    </a:p>
+                  </a:txBody>
+                  <a:tcPr marL="91440" marR="91440" marT="45720" marB="45720">
+                    <a:lnL w="12700" cap="flat" cmpd="sng" algn="ctr">
+                      <a:solidFill>
+                        <a:srgbClr val="666666"/>
+                      </a:solidFill>
+                      <a:prstDash val="solid"/>
+                      <a:round/>
+                      <a:headEnd type="none" w="med" len="med"/>
+                      <a:tailEnd type="none" w="med" len="med"/>
+                    </a:lnL>
+                    <a:lnR w="12700" cap="flat" cmpd="sng" algn="ctr">
+                      <a:solidFill>
+                        <a:srgbClr val="666666"/>
+                      </a:solidFill>
+                      <a:prstDash val="solid"/>
+                      <a:round/>
+                      <a:headEnd type="none" w="med" len="med"/>
+                      <a:tailEnd type="none" w="med" len="med"/>
+                    </a:lnR>
+                    <a:lnT w="12700" cap="flat" cmpd="sng" algn="ctr">
+                      <a:solidFill>
+                        <a:srgbClr val="666666"/>
+                      </a:solidFill>
+                      <a:prstDash val="solid"/>
+                      <a:round/>
+                      <a:headEnd type="none" w="med" len="med"/>
+                      <a:tailEnd type="none" w="med" len="med"/>
+                    </a:lnT>
+                    <a:lnB w="12700" cap="flat" cmpd="sng" algn="ctr">
+                      <a:solidFill>
+                        <a:srgbClr val="666666"/>
+                      </a:solidFill>
+                      <a:prstDash val="solid"/>
+                      <a:round/>
+                      <a:headEnd type="none" w="med" len="med"/>
+                      <a:tailEnd type="none" w="med" len="med"/>
+                    </a:lnB>
+                  </a:tcPr>
+                </a:tc>
+                <a:tc>
+                  <a:txBody>
+                    <a:bodyPr/>
+                    <a:lstStyle/>
+                    <a:p>
+                      <a:pPr indent="0" marL="0">
+                        <a:buNone/>
+                      </a:pPr>
+                      <a:r>
+                        <a:rPr lang="en-US" sz="900" dirty="0">
+                          <a:solidFill>
+                            <a:srgbClr val="000000"/>
+                          </a:solidFill>
+                        </a:rPr>
+                        <a:t>Project partnership and infrastructure coordination; influence over port-adjacent capital program sequencing.</a:t>
+                      </a:r>
+                      <a:endParaRPr lang="en-US" sz="900" dirty="0"/>
+                    </a:p>
+                  </a:txBody>
+                  <a:tcPr marL="91440" marR="91440" marT="45720" marB="45720">
+                    <a:lnL w="12700" cap="flat" cmpd="sng" algn="ctr">
+                      <a:solidFill>
+                        <a:srgbClr val="666666"/>
+                      </a:solidFill>
+                      <a:prstDash val="solid"/>
+                      <a:round/>
+                      <a:headEnd type="none" w="med" len="med"/>
+                      <a:tailEnd type="none" w="med" len="med"/>
+                    </a:lnL>
+                    <a:lnR w="12700" cap="flat" cmpd="sng" algn="ctr">
+                      <a:solidFill>
+                        <a:srgbClr val="666666"/>
+                      </a:solidFill>
+                      <a:prstDash val="solid"/>
+                      <a:round/>
+                      <a:headEnd type="none" w="med" len="med"/>
+                      <a:tailEnd type="none" w="med" len="med"/>
+                    </a:lnR>
+                    <a:lnT w="12700" cap="flat" cmpd="sng" algn="ctr">
+                      <a:solidFill>
+                        <a:srgbClr val="666666"/>
+                      </a:solidFill>
+                      <a:prstDash val="solid"/>
+                      <a:round/>
+                      <a:headEnd type="none" w="med" len="med"/>
+                      <a:tailEnd type="none" w="med" len="med"/>
+                    </a:lnT>
+                    <a:lnB w="12700" cap="flat" cmpd="sng" algn="ctr">
+                      <a:solidFill>
+                        <a:srgbClr val="666666"/>
+                      </a:solidFill>
+                      <a:prstDash val="solid"/>
+                      <a:round/>
+                      <a:headEnd type="none" w="med" len="med"/>
+                      <a:tailEnd type="none" w="med" len="med"/>
+                    </a:lnB>
                   </a:tcPr>
                 </a:tc>
                 <a:tc>
@@ -4260,9 +5769,6 @@
                       <a:headEnd type="none" w="med" len="med"/>
                       <a:tailEnd type="none" w="med" len="med"/>
                     </a:lnB>
-                    <a:solidFill>
-                      <a:srgbClr val="FDFDFD"/>
-                    </a:solidFill>
                   </a:tcPr>
                 </a:tc>
                 <a:tc>
@@ -4279,7 +5785,7 @@
                             <a:srgbClr val="000000"/>
                           </a:solidFill>
                         </a:rPr>
-                        <a:t>Likely favors hybrid/transition solutions preserving throughput while reducing externalities.</a:t>
+                        <a:t>Port authorities appear as partners in funding/implementation context for New Haven port improvements tied to cargo/rail capability.</a:t>
                       </a:r>
                       <a:endParaRPr lang="en-US" sz="900" dirty="0"/>
                     </a:p>
@@ -4321,206 +5827,6 @@
                       <a:headEnd type="none" w="med" len="med"/>
                       <a:tailEnd type="none" w="med" len="med"/>
                     </a:lnB>
-                    <a:solidFill>
-                      <a:srgbClr val="FDFDFD"/>
-                    </a:solidFill>
-                  </a:tcPr>
-                </a:tc>
-                <a:tc>
-                  <a:txBody>
-                    <a:bodyPr/>
-                    <a:lstStyle/>
-                    <a:p>
-                      <a:pPr indent="0" marL="0">
-                        <a:buNone/>
-                      </a:pPr>
-                      <a:r>
-                        <a:rPr lang="en-US" sz="900" dirty="0">
-                          <a:solidFill>
-                            <a:srgbClr val="000000"/>
-                          </a:solidFill>
-                        </a:rPr>
-                        <a:t>Port competitiveness, cargo throughput, rail modernization, community acceptance.</a:t>
-                      </a:r>
-                      <a:endParaRPr lang="en-US" sz="900" dirty="0"/>
-                    </a:p>
-                  </a:txBody>
-                  <a:tcPr marL="91440" marR="91440" marT="45720" marB="45720">
-                    <a:lnL w="12700" cap="flat" cmpd="sng" algn="ctr">
-                      <a:solidFill>
-                        <a:srgbClr val="666666"/>
-                      </a:solidFill>
-                      <a:prstDash val="solid"/>
-                      <a:round/>
-                      <a:headEnd type="none" w="med" len="med"/>
-                      <a:tailEnd type="none" w="med" len="med"/>
-                    </a:lnL>
-                    <a:lnR w="12700" cap="flat" cmpd="sng" algn="ctr">
-                      <a:solidFill>
-                        <a:srgbClr val="666666"/>
-                      </a:solidFill>
-                      <a:prstDash val="solid"/>
-                      <a:round/>
-                      <a:headEnd type="none" w="med" len="med"/>
-                      <a:tailEnd type="none" w="med" len="med"/>
-                    </a:lnR>
-                    <a:lnT w="12700" cap="flat" cmpd="sng" algn="ctr">
-                      <a:solidFill>
-                        <a:srgbClr val="666666"/>
-                      </a:solidFill>
-                      <a:prstDash val="solid"/>
-                      <a:round/>
-                      <a:headEnd type="none" w="med" len="med"/>
-                      <a:tailEnd type="none" w="med" len="med"/>
-                    </a:lnT>
-                    <a:lnB w="12700" cap="flat" cmpd="sng" algn="ctr">
-                      <a:solidFill>
-                        <a:srgbClr val="666666"/>
-                      </a:solidFill>
-                      <a:prstDash val="solid"/>
-                      <a:round/>
-                      <a:headEnd type="none" w="med" len="med"/>
-                      <a:tailEnd type="none" w="med" len="med"/>
-                    </a:lnB>
-                    <a:solidFill>
-                      <a:srgbClr val="FDFDFD"/>
-                    </a:solidFill>
-                  </a:tcPr>
-                </a:tc>
-                <a:tc>
-                  <a:txBody>
-                    <a:bodyPr/>
-                    <a:lstStyle/>
-                    <a:p>
-                      <a:pPr indent="0" marL="0">
-                        <a:buNone/>
-                      </a:pPr>
-                      <a:r>
-                        <a:rPr lang="en-US" sz="900" dirty="0">
-                          <a:solidFill>
-                            <a:srgbClr val="000000"/>
-                          </a:solidFill>
-                        </a:rPr>
-                        <a:t>Port entities are named in New Haven funding partnerships and infrastructure initiatives.</a:t>
-                      </a:r>
-                      <a:endParaRPr lang="en-US" sz="900" dirty="0"/>
-                    </a:p>
-                  </a:txBody>
-                  <a:tcPr marL="91440" marR="91440" marT="45720" marB="45720">
-                    <a:lnL w="12700" cap="flat" cmpd="sng" algn="ctr">
-                      <a:solidFill>
-                        <a:srgbClr val="666666"/>
-                      </a:solidFill>
-                      <a:prstDash val="solid"/>
-                      <a:round/>
-                      <a:headEnd type="none" w="med" len="med"/>
-                      <a:tailEnd type="none" w="med" len="med"/>
-                    </a:lnL>
-                    <a:lnR w="12700" cap="flat" cmpd="sng" algn="ctr">
-                      <a:solidFill>
-                        <a:srgbClr val="666666"/>
-                      </a:solidFill>
-                      <a:prstDash val="solid"/>
-                      <a:round/>
-                      <a:headEnd type="none" w="med" len="med"/>
-                      <a:tailEnd type="none" w="med" len="med"/>
-                    </a:lnR>
-                    <a:lnT w="12700" cap="flat" cmpd="sng" algn="ctr">
-                      <a:solidFill>
-                        <a:srgbClr val="666666"/>
-                      </a:solidFill>
-                      <a:prstDash val="solid"/>
-                      <a:round/>
-                      <a:headEnd type="none" w="med" len="med"/>
-                      <a:tailEnd type="none" w="med" len="med"/>
-                    </a:lnT>
-                    <a:lnB w="12700" cap="flat" cmpd="sng" algn="ctr">
-                      <a:solidFill>
-                        <a:srgbClr val="666666"/>
-                      </a:solidFill>
-                      <a:prstDash val="solid"/>
-                      <a:round/>
-                      <a:headEnd type="none" w="med" len="med"/>
-                      <a:tailEnd type="none" w="med" len="med"/>
-                    </a:lnB>
-                    <a:solidFill>
-                      <a:srgbClr val="FDFDFD"/>
-                    </a:solidFill>
-                  </a:tcPr>
-                </a:tc>
-                <a:tc>
-                  <a:txBody>
-                    <a:bodyPr/>
-                    <a:lstStyle/>
-                    <a:p>
-                      <a:pPr indent="0" marL="0">
-                        <a:buNone/>
-                      </a:pPr>
-                      <a:r>
-                        <a:rPr lang="en-US" sz="900" dirty="0">
-                          <a:solidFill>
-                            <a:srgbClr val="000000"/>
-                          </a:solidFill>
-                        </a:rPr>
-                        <a:t>https://www.epa.gov/newsreleases/biden-harris-administration-announces-nearly-40-million-clean-ports-investments</a:t>
-                      </a:r>
-                      <a:endParaRPr lang="en-US" sz="900" dirty="0"/>
-                    </a:p>
-                    <a:p>
-                      <a:pPr indent="0" marL="0">
-                        <a:buNone/>
-                      </a:pPr>
-                      <a:r>
-                        <a:rPr lang="en-US" sz="900" dirty="0">
-                          <a:solidFill>
-                            <a:srgbClr val="000000"/>
-                          </a:solidFill>
-                        </a:rPr>
-                        <a:t>https://enstructure.com/enstructure-to-receive-11-2-million-federal-grant-to-add-two-new-railyards-and-new-railroad-track-in-new-haven-ct/</a:t>
-                      </a:r>
-                      <a:endParaRPr lang="en-US" sz="900" dirty="0"/>
-                    </a:p>
-                  </a:txBody>
-                  <a:tcPr marL="91440" marR="91440" marT="45720" marB="45720">
-                    <a:lnL w="12700" cap="flat" cmpd="sng" algn="ctr">
-                      <a:solidFill>
-                        <a:srgbClr val="666666"/>
-                      </a:solidFill>
-                      <a:prstDash val="solid"/>
-                      <a:round/>
-                      <a:headEnd type="none" w="med" len="med"/>
-                      <a:tailEnd type="none" w="med" len="med"/>
-                    </a:lnL>
-                    <a:lnR w="12700" cap="flat" cmpd="sng" algn="ctr">
-                      <a:solidFill>
-                        <a:srgbClr val="666666"/>
-                      </a:solidFill>
-                      <a:prstDash val="solid"/>
-                      <a:round/>
-                      <a:headEnd type="none" w="med" len="med"/>
-                      <a:tailEnd type="none" w="med" len="med"/>
-                    </a:lnR>
-                    <a:lnT w="12700" cap="flat" cmpd="sng" algn="ctr">
-                      <a:solidFill>
-                        <a:srgbClr val="666666"/>
-                      </a:solidFill>
-                      <a:prstDash val="solid"/>
-                      <a:round/>
-                      <a:headEnd type="none" w="med" len="med"/>
-                      <a:tailEnd type="none" w="med" len="med"/>
-                    </a:lnT>
-                    <a:lnB w="12700" cap="flat" cmpd="sng" algn="ctr">
-                      <a:solidFill>
-                        <a:srgbClr val="666666"/>
-                      </a:solidFill>
-                      <a:prstDash val="solid"/>
-                      <a:round/>
-                      <a:headEnd type="none" w="med" len="med"/>
-                      <a:tailEnd type="none" w="med" len="med"/>
-                    </a:lnB>
-                    <a:solidFill>
-                      <a:srgbClr val="FDFDFD"/>
-                    </a:solidFill>
                   </a:tcPr>
                 </a:tc>
               </a:tr>
@@ -4562,7 +5868,7 @@
         <p:spPr>
           <a:xfrm>
             <a:off x="274320" y="182880"/>
-            <a:ext cx="11430000" cy="365760"/>
+            <a:ext cx="10972800" cy="365760"/>
           </a:xfrm>
           <a:prstGeom prst="rect">
             <a:avLst/>
@@ -4612,12 +5918,11 @@
             <a:tbl>
               <a:tblPr/>
               <a:tblGrid>
-                <a:gridCol w="1554480"/>
-                <a:gridCol w="731520"/>
-                <a:gridCol w="2011680"/>
-                <a:gridCol w="1920240"/>
-                <a:gridCol w="2560320"/>
-                <a:gridCol w="3017520"/>
+                <a:gridCol w="1737360"/>
+                <a:gridCol w="2743200"/>
+                <a:gridCol w="2377440"/>
+                <a:gridCol w="822960"/>
+                <a:gridCol w="4114800"/>
               </a:tblGrid>
               <a:tr h="1889760">
                 <a:tc>
@@ -4676,9 +5981,122 @@
                       <a:headEnd type="none" w="med" len="med"/>
                       <a:tailEnd type="none" w="med" len="med"/>
                     </a:lnB>
-                    <a:solidFill>
-                      <a:srgbClr val="FDFDFD"/>
-                    </a:solidFill>
+                  </a:tcPr>
+                </a:tc>
+                <a:tc>
+                  <a:txBody>
+                    <a:bodyPr/>
+                    <a:lstStyle/>
+                    <a:p>
+                      <a:pPr indent="0" marL="0">
+                        <a:buNone/>
+                      </a:pPr>
+                      <a:r>
+                        <a:rPr lang="en-US" sz="900" dirty="0">
+                          <a:solidFill>
+                            <a:srgbClr val="000000"/>
+                          </a:solidFill>
+                        </a:rPr>
+                        <a:t>Likely interests</a:t>
+                      </a:r>
+                      <a:endParaRPr lang="en-US" sz="900" dirty="0"/>
+                    </a:p>
+                  </a:txBody>
+                  <a:tcPr marL="91440" marR="91440" marT="45720" marB="45720">
+                    <a:lnL w="12700" cap="flat" cmpd="sng" algn="ctr">
+                      <a:solidFill>
+                        <a:srgbClr val="666666"/>
+                      </a:solidFill>
+                      <a:prstDash val="solid"/>
+                      <a:round/>
+                      <a:headEnd type="none" w="med" len="med"/>
+                      <a:tailEnd type="none" w="med" len="med"/>
+                    </a:lnL>
+                    <a:lnR w="12700" cap="flat" cmpd="sng" algn="ctr">
+                      <a:solidFill>
+                        <a:srgbClr val="666666"/>
+                      </a:solidFill>
+                      <a:prstDash val="solid"/>
+                      <a:round/>
+                      <a:headEnd type="none" w="med" len="med"/>
+                      <a:tailEnd type="none" w="med" len="med"/>
+                    </a:lnR>
+                    <a:lnT w="12700" cap="flat" cmpd="sng" algn="ctr">
+                      <a:solidFill>
+                        <a:srgbClr val="666666"/>
+                      </a:solidFill>
+                      <a:prstDash val="solid"/>
+                      <a:round/>
+                      <a:headEnd type="none" w="med" len="med"/>
+                      <a:tailEnd type="none" w="med" len="med"/>
+                    </a:lnT>
+                    <a:lnB w="12700" cap="flat" cmpd="sng" algn="ctr">
+                      <a:solidFill>
+                        <a:srgbClr val="666666"/>
+                      </a:solidFill>
+                      <a:prstDash val="solid"/>
+                      <a:round/>
+                      <a:headEnd type="none" w="med" len="med"/>
+                      <a:tailEnd type="none" w="med" len="med"/>
+                    </a:lnB>
+                  </a:tcPr>
+                </a:tc>
+                <a:tc>
+                  <a:txBody>
+                    <a:bodyPr/>
+                    <a:lstStyle/>
+                    <a:p>
+                      <a:pPr indent="0" marL="0">
+                        <a:buNone/>
+                      </a:pPr>
+                      <a:r>
+                        <a:rPr lang="en-US" sz="900" dirty="0">
+                          <a:solidFill>
+                            <a:srgbClr val="000000"/>
+                          </a:solidFill>
+                        </a:rPr>
+                        <a:t>Practical levers</a:t>
+                      </a:r>
+                      <a:endParaRPr lang="en-US" sz="900" dirty="0"/>
+                    </a:p>
+                  </a:txBody>
+                  <a:tcPr marL="91440" marR="91440" marT="45720" marB="45720">
+                    <a:lnL w="12700" cap="flat" cmpd="sng" algn="ctr">
+                      <a:solidFill>
+                        <a:srgbClr val="666666"/>
+                      </a:solidFill>
+                      <a:prstDash val="solid"/>
+                      <a:round/>
+                      <a:headEnd type="none" w="med" len="med"/>
+                      <a:tailEnd type="none" w="med" len="med"/>
+                    </a:lnL>
+                    <a:lnR w="12700" cap="flat" cmpd="sng" algn="ctr">
+                      <a:solidFill>
+                        <a:srgbClr val="666666"/>
+                      </a:solidFill>
+                      <a:prstDash val="solid"/>
+                      <a:round/>
+                      <a:headEnd type="none" w="med" len="med"/>
+                      <a:tailEnd type="none" w="med" len="med"/>
+                    </a:lnR>
+                    <a:lnT w="12700" cap="flat" cmpd="sng" algn="ctr">
+                      <a:solidFill>
+                        <a:srgbClr val="666666"/>
+                      </a:solidFill>
+                      <a:prstDash val="solid"/>
+                      <a:round/>
+                      <a:headEnd type="none" w="med" len="med"/>
+                      <a:tailEnd type="none" w="med" len="med"/>
+                    </a:lnT>
+                    <a:lnB w="12700" cap="flat" cmpd="sng" algn="ctr">
+                      <a:solidFill>
+                        <a:srgbClr val="666666"/>
+                      </a:solidFill>
+                      <a:prstDash val="solid"/>
+                      <a:round/>
+                      <a:headEnd type="none" w="med" len="med"/>
+                      <a:tailEnd type="none" w="med" len="med"/>
+                    </a:lnB>
                   </a:tcPr>
                 </a:tc>
                 <a:tc>
@@ -4737,9 +6155,6 @@
                       <a:headEnd type="none" w="med" len="med"/>
                       <a:tailEnd type="none" w="med" len="med"/>
                     </a:lnB>
-                    <a:solidFill>
-                      <a:srgbClr val="FDFDFD"/>
-                    </a:solidFill>
                   </a:tcPr>
                 </a:tc>
                 <a:tc>
@@ -4756,7 +6171,7 @@
                             <a:srgbClr val="000000"/>
                           </a:solidFill>
                         </a:rPr>
-                        <a:t>Likely position</a:t>
+                        <a:t>Notes grounded in record</a:t>
                       </a:r>
                       <a:endParaRPr lang="en-US" sz="900" dirty="0"/>
                     </a:p>
@@ -4798,192 +6213,6 @@
                       <a:headEnd type="none" w="med" len="med"/>
                       <a:tailEnd type="none" w="med" len="med"/>
                     </a:lnB>
-                    <a:solidFill>
-                      <a:srgbClr val="FDFDFD"/>
-                    </a:solidFill>
-                  </a:tcPr>
-                </a:tc>
-                <a:tc>
-                  <a:txBody>
-                    <a:bodyPr/>
-                    <a:lstStyle/>
-                    <a:p>
-                      <a:pPr indent="0" marL="0">
-                        <a:buNone/>
-                      </a:pPr>
-                      <a:r>
-                        <a:rPr lang="en-US" sz="900" dirty="0">
-                          <a:solidFill>
-                            <a:srgbClr val="000000"/>
-                          </a:solidFill>
-                        </a:rPr>
-                        <a:t>Core interests</a:t>
-                      </a:r>
-                      <a:endParaRPr lang="en-US" sz="900" dirty="0"/>
-                    </a:p>
-                  </a:txBody>
-                  <a:tcPr marL="91440" marR="91440" marT="45720" marB="45720">
-                    <a:lnL w="12700" cap="flat" cmpd="sng" algn="ctr">
-                      <a:solidFill>
-                        <a:srgbClr val="666666"/>
-                      </a:solidFill>
-                      <a:prstDash val="solid"/>
-                      <a:round/>
-                      <a:headEnd type="none" w="med" len="med"/>
-                      <a:tailEnd type="none" w="med" len="med"/>
-                    </a:lnL>
-                    <a:lnR w="12700" cap="flat" cmpd="sng" algn="ctr">
-                      <a:solidFill>
-                        <a:srgbClr val="666666"/>
-                      </a:solidFill>
-                      <a:prstDash val="solid"/>
-                      <a:round/>
-                      <a:headEnd type="none" w="med" len="med"/>
-                      <a:tailEnd type="none" w="med" len="med"/>
-                    </a:lnR>
-                    <a:lnT w="12700" cap="flat" cmpd="sng" algn="ctr">
-                      <a:solidFill>
-                        <a:srgbClr val="666666"/>
-                      </a:solidFill>
-                      <a:prstDash val="solid"/>
-                      <a:round/>
-                      <a:headEnd type="none" w="med" len="med"/>
-                      <a:tailEnd type="none" w="med" len="med"/>
-                    </a:lnT>
-                    <a:lnB w="12700" cap="flat" cmpd="sng" algn="ctr">
-                      <a:solidFill>
-                        <a:srgbClr val="666666"/>
-                      </a:solidFill>
-                      <a:prstDash val="solid"/>
-                      <a:round/>
-                      <a:headEnd type="none" w="med" len="med"/>
-                      <a:tailEnd type="none" w="med" len="med"/>
-                    </a:lnB>
-                    <a:solidFill>
-                      <a:srgbClr val="FDFDFD"/>
-                    </a:solidFill>
-                  </a:tcPr>
-                </a:tc>
-                <a:tc>
-                  <a:txBody>
-                    <a:bodyPr/>
-                    <a:lstStyle/>
-                    <a:p>
-                      <a:pPr indent="0" marL="0">
-                        <a:buNone/>
-                      </a:pPr>
-                      <a:r>
-                        <a:rPr lang="en-US" sz="900" dirty="0">
-                          <a:solidFill>
-                            <a:srgbClr val="000000"/>
-                          </a:solidFill>
-                        </a:rPr>
-                        <a:t>Justification</a:t>
-                      </a:r>
-                      <a:endParaRPr lang="en-US" sz="900" dirty="0"/>
-                    </a:p>
-                  </a:txBody>
-                  <a:tcPr marL="91440" marR="91440" marT="45720" marB="45720">
-                    <a:lnL w="12700" cap="flat" cmpd="sng" algn="ctr">
-                      <a:solidFill>
-                        <a:srgbClr val="666666"/>
-                      </a:solidFill>
-                      <a:prstDash val="solid"/>
-                      <a:round/>
-                      <a:headEnd type="none" w="med" len="med"/>
-                      <a:tailEnd type="none" w="med" len="med"/>
-                    </a:lnL>
-                    <a:lnR w="12700" cap="flat" cmpd="sng" algn="ctr">
-                      <a:solidFill>
-                        <a:srgbClr val="666666"/>
-                      </a:solidFill>
-                      <a:prstDash val="solid"/>
-                      <a:round/>
-                      <a:headEnd type="none" w="med" len="med"/>
-                      <a:tailEnd type="none" w="med" len="med"/>
-                    </a:lnR>
-                    <a:lnT w="12700" cap="flat" cmpd="sng" algn="ctr">
-                      <a:solidFill>
-                        <a:srgbClr val="666666"/>
-                      </a:solidFill>
-                      <a:prstDash val="solid"/>
-                      <a:round/>
-                      <a:headEnd type="none" w="med" len="med"/>
-                      <a:tailEnd type="none" w="med" len="med"/>
-                    </a:lnT>
-                    <a:lnB w="12700" cap="flat" cmpd="sng" algn="ctr">
-                      <a:solidFill>
-                        <a:srgbClr val="666666"/>
-                      </a:solidFill>
-                      <a:prstDash val="solid"/>
-                      <a:round/>
-                      <a:headEnd type="none" w="med" len="med"/>
-                      <a:tailEnd type="none" w="med" len="med"/>
-                    </a:lnB>
-                    <a:solidFill>
-                      <a:srgbClr val="FDFDFD"/>
-                    </a:solidFill>
-                  </a:tcPr>
-                </a:tc>
-                <a:tc>
-                  <a:txBody>
-                    <a:bodyPr/>
-                    <a:lstStyle/>
-                    <a:p>
-                      <a:pPr indent="0" marL="0">
-                        <a:buNone/>
-                      </a:pPr>
-                      <a:r>
-                        <a:rPr lang="en-US" sz="900" dirty="0">
-                          <a:solidFill>
-                            <a:srgbClr val="000000"/>
-                          </a:solidFill>
-                        </a:rPr>
-                        <a:t>Sources</a:t>
-                      </a:r>
-                      <a:endParaRPr lang="en-US" sz="900" dirty="0"/>
-                    </a:p>
-                  </a:txBody>
-                  <a:tcPr marL="91440" marR="91440" marT="45720" marB="45720">
-                    <a:lnL w="12700" cap="flat" cmpd="sng" algn="ctr">
-                      <a:solidFill>
-                        <a:srgbClr val="666666"/>
-                      </a:solidFill>
-                      <a:prstDash val="solid"/>
-                      <a:round/>
-                      <a:headEnd type="none" w="med" len="med"/>
-                      <a:tailEnd type="none" w="med" len="med"/>
-                    </a:lnL>
-                    <a:lnR w="12700" cap="flat" cmpd="sng" algn="ctr">
-                      <a:solidFill>
-                        <a:srgbClr val="666666"/>
-                      </a:solidFill>
-                      <a:prstDash val="solid"/>
-                      <a:round/>
-                      <a:headEnd type="none" w="med" len="med"/>
-                      <a:tailEnd type="none" w="med" len="med"/>
-                    </a:lnR>
-                    <a:lnT w="12700" cap="flat" cmpd="sng" algn="ctr">
-                      <a:solidFill>
-                        <a:srgbClr val="666666"/>
-                      </a:solidFill>
-                      <a:prstDash val="solid"/>
-                      <a:round/>
-                      <a:headEnd type="none" w="med" len="med"/>
-                      <a:tailEnd type="none" w="med" len="med"/>
-                    </a:lnT>
-                    <a:lnB w="12700" cap="flat" cmpd="sng" algn="ctr">
-                      <a:solidFill>
-                        <a:srgbClr val="666666"/>
-                      </a:solidFill>
-                      <a:prstDash val="solid"/>
-                      <a:round/>
-                      <a:headEnd type="none" w="med" len="med"/>
-                      <a:tailEnd type="none" w="med" len="med"/>
-                    </a:lnB>
-                    <a:solidFill>
-                      <a:srgbClr val="FDFDFD"/>
-                    </a:solidFill>
                   </a:tcPr>
                 </a:tc>
               </a:tr>
@@ -5002,7 +6231,7 @@
                             <a:srgbClr val="000000"/>
                           </a:solidFill>
                         </a:rPr>
-                        <a:t>USACE</a:t>
+                        <a:t>US Army Corps of Engineers (USACE)</a:t>
                       </a:r>
                       <a:endParaRPr lang="en-US" sz="900" dirty="0"/>
                     </a:p>
@@ -5044,9 +6273,122 @@
                       <a:headEnd type="none" w="med" len="med"/>
                       <a:tailEnd type="none" w="med" len="med"/>
                     </a:lnB>
-                    <a:solidFill>
-                      <a:srgbClr val="FDFDFD"/>
-                    </a:solidFill>
+                  </a:tcPr>
+                </a:tc>
+                <a:tc>
+                  <a:txBody>
+                    <a:bodyPr/>
+                    <a:lstStyle/>
+                    <a:p>
+                      <a:pPr indent="0" marL="0">
+                        <a:buNone/>
+                      </a:pPr>
+                      <a:r>
+                        <a:rPr lang="en-US" sz="900" dirty="0">
+                          <a:solidFill>
+                            <a:srgbClr val="000000"/>
+                          </a:solidFill>
+                        </a:rPr>
+                        <a:t>Harbor/navigation efficiency and economic performance of commodity flow through New Haven.</a:t>
+                      </a:r>
+                      <a:endParaRPr lang="en-US" sz="900" dirty="0"/>
+                    </a:p>
+                  </a:txBody>
+                  <a:tcPr marL="91440" marR="91440" marT="45720" marB="45720">
+                    <a:lnL w="12700" cap="flat" cmpd="sng" algn="ctr">
+                      <a:solidFill>
+                        <a:srgbClr val="666666"/>
+                      </a:solidFill>
+                      <a:prstDash val="solid"/>
+                      <a:round/>
+                      <a:headEnd type="none" w="med" len="med"/>
+                      <a:tailEnd type="none" w="med" len="med"/>
+                    </a:lnL>
+                    <a:lnR w="12700" cap="flat" cmpd="sng" algn="ctr">
+                      <a:solidFill>
+                        <a:srgbClr val="666666"/>
+                      </a:solidFill>
+                      <a:prstDash val="solid"/>
+                      <a:round/>
+                      <a:headEnd type="none" w="med" len="med"/>
+                      <a:tailEnd type="none" w="med" len="med"/>
+                    </a:lnR>
+                    <a:lnT w="12700" cap="flat" cmpd="sng" algn="ctr">
+                      <a:solidFill>
+                        <a:srgbClr val="666666"/>
+                      </a:solidFill>
+                      <a:prstDash val="solid"/>
+                      <a:round/>
+                      <a:headEnd type="none" w="med" len="med"/>
+                      <a:tailEnd type="none" w="med" len="med"/>
+                    </a:lnT>
+                    <a:lnB w="12700" cap="flat" cmpd="sng" algn="ctr">
+                      <a:solidFill>
+                        <a:srgbClr val="666666"/>
+                      </a:solidFill>
+                      <a:prstDash val="solid"/>
+                      <a:round/>
+                      <a:headEnd type="none" w="med" len="med"/>
+                      <a:tailEnd type="none" w="med" len="med"/>
+                    </a:lnB>
+                  </a:tcPr>
+                </a:tc>
+                <a:tc>
+                  <a:txBody>
+                    <a:bodyPr/>
+                    <a:lstStyle/>
+                    <a:p>
+                      <a:pPr indent="0" marL="0">
+                        <a:buNone/>
+                      </a:pPr>
+                      <a:r>
+                        <a:rPr lang="en-US" sz="900" dirty="0">
+                          <a:solidFill>
+                            <a:srgbClr val="000000"/>
+                          </a:solidFill>
+                        </a:rPr>
+                        <a:t>Planning and documentation influence for navigation/economic framing; federal harbor project context.</a:t>
+                      </a:r>
+                      <a:endParaRPr lang="en-US" sz="900" dirty="0"/>
+                    </a:p>
+                  </a:txBody>
+                  <a:tcPr marL="91440" marR="91440" marT="45720" marB="45720">
+                    <a:lnL w="12700" cap="flat" cmpd="sng" algn="ctr">
+                      <a:solidFill>
+                        <a:srgbClr val="666666"/>
+                      </a:solidFill>
+                      <a:prstDash val="solid"/>
+                      <a:round/>
+                      <a:headEnd type="none" w="med" len="med"/>
+                      <a:tailEnd type="none" w="med" len="med"/>
+                    </a:lnL>
+                    <a:lnR w="12700" cap="flat" cmpd="sng" algn="ctr">
+                      <a:solidFill>
+                        <a:srgbClr val="666666"/>
+                      </a:solidFill>
+                      <a:prstDash val="solid"/>
+                      <a:round/>
+                      <a:headEnd type="none" w="med" len="med"/>
+                      <a:tailEnd type="none" w="med" len="med"/>
+                    </a:lnR>
+                    <a:lnT w="12700" cap="flat" cmpd="sng" algn="ctr">
+                      <a:solidFill>
+                        <a:srgbClr val="666666"/>
+                      </a:solidFill>
+                      <a:prstDash val="solid"/>
+                      <a:round/>
+                      <a:headEnd type="none" w="med" len="med"/>
+                      <a:tailEnd type="none" w="med" len="med"/>
+                    </a:lnT>
+                    <a:lnB w="12700" cap="flat" cmpd="sng" algn="ctr">
+                      <a:solidFill>
+                        <a:srgbClr val="666666"/>
+                      </a:solidFill>
+                      <a:prstDash val="solid"/>
+                      <a:round/>
+                      <a:headEnd type="none" w="med" len="med"/>
+                      <a:tailEnd type="none" w="med" len="med"/>
+                    </a:lnB>
                   </a:tcPr>
                 </a:tc>
                 <a:tc>
@@ -5105,9 +6447,6 @@
                       <a:headEnd type="none" w="med" len="med"/>
                       <a:tailEnd type="none" w="med" len="med"/>
                     </a:lnB>
-                    <a:solidFill>
-                      <a:srgbClr val="FDFDFD"/>
-                    </a:solidFill>
                   </a:tcPr>
                 </a:tc>
                 <a:tc>
@@ -5124,7 +6463,7 @@
                             <a:srgbClr val="000000"/>
                           </a:solidFill>
                         </a:rPr>
-                        <a:t>Neutral on local siting politics; likely favors resilient import flow.</a:t>
+                        <a:t>USACE appendix identifies salt as major imported commodity and references terminal storage role in harbor supply chain.</a:t>
                       </a:r>
                       <a:endParaRPr lang="en-US" sz="900" dirty="0"/>
                     </a:p>
@@ -5166,192 +6505,6 @@
                       <a:headEnd type="none" w="med" len="med"/>
                       <a:tailEnd type="none" w="med" len="med"/>
                     </a:lnB>
-                    <a:solidFill>
-                      <a:srgbClr val="FDFDFD"/>
-                    </a:solidFill>
-                  </a:tcPr>
-                </a:tc>
-                <a:tc>
-                  <a:txBody>
-                    <a:bodyPr/>
-                    <a:lstStyle/>
-                    <a:p>
-                      <a:pPr indent="0" marL="0">
-                        <a:buNone/>
-                      </a:pPr>
-                      <a:r>
-                        <a:rPr lang="en-US" sz="900" dirty="0">
-                          <a:solidFill>
-                            <a:srgbClr val="000000"/>
-                          </a:solidFill>
-                        </a:rPr>
-                        <a:t>Harbor/navigation performance and commodity-flow efficiency.</a:t>
-                      </a:r>
-                      <a:endParaRPr lang="en-US" sz="900" dirty="0"/>
-                    </a:p>
-                  </a:txBody>
-                  <a:tcPr marL="91440" marR="91440" marT="45720" marB="45720">
-                    <a:lnL w="12700" cap="flat" cmpd="sng" algn="ctr">
-                      <a:solidFill>
-                        <a:srgbClr val="666666"/>
-                      </a:solidFill>
-                      <a:prstDash val="solid"/>
-                      <a:round/>
-                      <a:headEnd type="none" w="med" len="med"/>
-                      <a:tailEnd type="none" w="med" len="med"/>
-                    </a:lnL>
-                    <a:lnR w="12700" cap="flat" cmpd="sng" algn="ctr">
-                      <a:solidFill>
-                        <a:srgbClr val="666666"/>
-                      </a:solidFill>
-                      <a:prstDash val="solid"/>
-                      <a:round/>
-                      <a:headEnd type="none" w="med" len="med"/>
-                      <a:tailEnd type="none" w="med" len="med"/>
-                    </a:lnR>
-                    <a:lnT w="12700" cap="flat" cmpd="sng" algn="ctr">
-                      <a:solidFill>
-                        <a:srgbClr val="666666"/>
-                      </a:solidFill>
-                      <a:prstDash val="solid"/>
-                      <a:round/>
-                      <a:headEnd type="none" w="med" len="med"/>
-                      <a:tailEnd type="none" w="med" len="med"/>
-                    </a:lnT>
-                    <a:lnB w="12700" cap="flat" cmpd="sng" algn="ctr">
-                      <a:solidFill>
-                        <a:srgbClr val="666666"/>
-                      </a:solidFill>
-                      <a:prstDash val="solid"/>
-                      <a:round/>
-                      <a:headEnd type="none" w="med" len="med"/>
-                      <a:tailEnd type="none" w="med" len="med"/>
-                    </a:lnB>
-                    <a:solidFill>
-                      <a:srgbClr val="FDFDFD"/>
-                    </a:solidFill>
-                  </a:tcPr>
-                </a:tc>
-                <a:tc>
-                  <a:txBody>
-                    <a:bodyPr/>
-                    <a:lstStyle/>
-                    <a:p>
-                      <a:pPr indent="0" marL="0">
-                        <a:buNone/>
-                      </a:pPr>
-                      <a:r>
-                        <a:rPr lang="en-US" sz="900" dirty="0">
-                          <a:solidFill>
-                            <a:srgbClr val="000000"/>
-                          </a:solidFill>
-                        </a:rPr>
-                        <a:t>USACE appendix identifies salt as major import and terminal storage role in harbor economics.</a:t>
-                      </a:r>
-                      <a:endParaRPr lang="en-US" sz="900" dirty="0"/>
-                    </a:p>
-                  </a:txBody>
-                  <a:tcPr marL="91440" marR="91440" marT="45720" marB="45720">
-                    <a:lnL w="12700" cap="flat" cmpd="sng" algn="ctr">
-                      <a:solidFill>
-                        <a:srgbClr val="666666"/>
-                      </a:solidFill>
-                      <a:prstDash val="solid"/>
-                      <a:round/>
-                      <a:headEnd type="none" w="med" len="med"/>
-                      <a:tailEnd type="none" w="med" len="med"/>
-                    </a:lnL>
-                    <a:lnR w="12700" cap="flat" cmpd="sng" algn="ctr">
-                      <a:solidFill>
-                        <a:srgbClr val="666666"/>
-                      </a:solidFill>
-                      <a:prstDash val="solid"/>
-                      <a:round/>
-                      <a:headEnd type="none" w="med" len="med"/>
-                      <a:tailEnd type="none" w="med" len="med"/>
-                    </a:lnR>
-                    <a:lnT w="12700" cap="flat" cmpd="sng" algn="ctr">
-                      <a:solidFill>
-                        <a:srgbClr val="666666"/>
-                      </a:solidFill>
-                      <a:prstDash val="solid"/>
-                      <a:round/>
-                      <a:headEnd type="none" w="med" len="med"/>
-                      <a:tailEnd type="none" w="med" len="med"/>
-                    </a:lnT>
-                    <a:lnB w="12700" cap="flat" cmpd="sng" algn="ctr">
-                      <a:solidFill>
-                        <a:srgbClr val="666666"/>
-                      </a:solidFill>
-                      <a:prstDash val="solid"/>
-                      <a:round/>
-                      <a:headEnd type="none" w="med" len="med"/>
-                      <a:tailEnd type="none" w="med" len="med"/>
-                    </a:lnB>
-                    <a:solidFill>
-                      <a:srgbClr val="FDFDFD"/>
-                    </a:solidFill>
-                  </a:tcPr>
-                </a:tc>
-                <a:tc>
-                  <a:txBody>
-                    <a:bodyPr/>
-                    <a:lstStyle/>
-                    <a:p>
-                      <a:pPr indent="0" marL="0">
-                        <a:buNone/>
-                      </a:pPr>
-                      <a:r>
-                        <a:rPr lang="en-US" sz="900" dirty="0">
-                          <a:solidFill>
-                            <a:srgbClr val="000000"/>
-                          </a:solidFill>
-                        </a:rPr>
-                        <a:t>https://www.nae.usace.army.mil/Portals/74/docs/Topics/New%20Haven/2020/05-AppendixCEconomcisNewHavenHarborNavigationImprovementProject%20_FinalJanuary2020.pdf</a:t>
-                      </a:r>
-                      <a:endParaRPr lang="en-US" sz="900" dirty="0"/>
-                    </a:p>
-                  </a:txBody>
-                  <a:tcPr marL="91440" marR="91440" marT="45720" marB="45720">
-                    <a:lnL w="12700" cap="flat" cmpd="sng" algn="ctr">
-                      <a:solidFill>
-                        <a:srgbClr val="666666"/>
-                      </a:solidFill>
-                      <a:prstDash val="solid"/>
-                      <a:round/>
-                      <a:headEnd type="none" w="med" len="med"/>
-                      <a:tailEnd type="none" w="med" len="med"/>
-                    </a:lnL>
-                    <a:lnR w="12700" cap="flat" cmpd="sng" algn="ctr">
-                      <a:solidFill>
-                        <a:srgbClr val="666666"/>
-                      </a:solidFill>
-                      <a:prstDash val="solid"/>
-                      <a:round/>
-                      <a:headEnd type="none" w="med" len="med"/>
-                      <a:tailEnd type="none" w="med" len="med"/>
-                    </a:lnR>
-                    <a:lnT w="12700" cap="flat" cmpd="sng" algn="ctr">
-                      <a:solidFill>
-                        <a:srgbClr val="666666"/>
-                      </a:solidFill>
-                      <a:prstDash val="solid"/>
-                      <a:round/>
-                      <a:headEnd type="none" w="med" len="med"/>
-                      <a:tailEnd type="none" w="med" len="med"/>
-                    </a:lnT>
-                    <a:lnB w="12700" cap="flat" cmpd="sng" algn="ctr">
-                      <a:solidFill>
-                        <a:srgbClr val="666666"/>
-                      </a:solidFill>
-                      <a:prstDash val="solid"/>
-                      <a:round/>
-                      <a:headEnd type="none" w="med" len="med"/>
-                      <a:tailEnd type="none" w="med" len="med"/>
-                    </a:lnB>
-                    <a:solidFill>
-                      <a:srgbClr val="FDFDFD"/>
-                    </a:solidFill>
                   </a:tcPr>
                 </a:tc>
               </a:tr>
@@ -5370,7 +6523,7 @@
                             <a:srgbClr val="000000"/>
                           </a:solidFill>
                         </a:rPr>
-                        <a:t>Community &amp; advocacy stakeholders (Save the Sound, EAC, nearby residents)</a:t>
+                        <a:t>Community and advocacy stakeholders (Save the Sound, EAC, nearby residents)</a:t>
                       </a:r>
                       <a:endParaRPr lang="en-US" sz="900" dirty="0"/>
                     </a:p>
@@ -5412,9 +6565,122 @@
                       <a:headEnd type="none" w="med" len="med"/>
                       <a:tailEnd type="none" w="med" len="med"/>
                     </a:lnB>
-                    <a:solidFill>
-                      <a:srgbClr val="FDFDFD"/>
-                    </a:solidFill>
+                  </a:tcPr>
+                </a:tc>
+                <a:tc>
+                  <a:txBody>
+                    <a:bodyPr/>
+                    <a:lstStyle/>
+                    <a:p>
+                      <a:pPr indent="0" marL="0">
+                        <a:buNone/>
+                      </a:pPr>
+                      <a:r>
+                        <a:rPr lang="en-US" sz="900" dirty="0">
+                          <a:solidFill>
+                            <a:srgbClr val="000000"/>
+                          </a:solidFill>
+                        </a:rPr>
+                        <a:t>Reduce river-edge exposure and nuisance impacts; stronger controls/monitoring transparency; align use of waterfront with community priorities.</a:t>
+                      </a:r>
+                      <a:endParaRPr lang="en-US" sz="900" dirty="0"/>
+                    </a:p>
+                  </a:txBody>
+                  <a:tcPr marL="91440" marR="91440" marT="45720" marB="45720">
+                    <a:lnL w="12700" cap="flat" cmpd="sng" algn="ctr">
+                      <a:solidFill>
+                        <a:srgbClr val="666666"/>
+                      </a:solidFill>
+                      <a:prstDash val="solid"/>
+                      <a:round/>
+                      <a:headEnd type="none" w="med" len="med"/>
+                      <a:tailEnd type="none" w="med" len="med"/>
+                    </a:lnL>
+                    <a:lnR w="12700" cap="flat" cmpd="sng" algn="ctr">
+                      <a:solidFill>
+                        <a:srgbClr val="666666"/>
+                      </a:solidFill>
+                      <a:prstDash val="solid"/>
+                      <a:round/>
+                      <a:headEnd type="none" w="med" len="med"/>
+                      <a:tailEnd type="none" w="med" len="med"/>
+                    </a:lnR>
+                    <a:lnT w="12700" cap="flat" cmpd="sng" algn="ctr">
+                      <a:solidFill>
+                        <a:srgbClr val="666666"/>
+                      </a:solidFill>
+                      <a:prstDash val="solid"/>
+                      <a:round/>
+                      <a:headEnd type="none" w="med" len="med"/>
+                      <a:tailEnd type="none" w="med" len="med"/>
+                    </a:lnT>
+                    <a:lnB w="12700" cap="flat" cmpd="sng" algn="ctr">
+                      <a:solidFill>
+                        <a:srgbClr val="666666"/>
+                      </a:solidFill>
+                      <a:prstDash val="solid"/>
+                      <a:round/>
+                      <a:headEnd type="none" w="med" len="med"/>
+                      <a:tailEnd type="none" w="med" len="med"/>
+                    </a:lnB>
+                  </a:tcPr>
+                </a:tc>
+                <a:tc>
+                  <a:txBody>
+                    <a:bodyPr/>
+                    <a:lstStyle/>
+                    <a:p>
+                      <a:pPr indent="0" marL="0">
+                        <a:buNone/>
+                      </a:pPr>
+                      <a:r>
+                        <a:rPr lang="en-US" sz="900" dirty="0">
+                          <a:solidFill>
+                            <a:srgbClr val="000000"/>
+                          </a:solidFill>
+                        </a:rPr>
+                        <a:t>Public testimony, comment campaigns, media visibility, issue framing in EJ/community terms.</a:t>
+                      </a:r>
+                      <a:endParaRPr lang="en-US" sz="900" dirty="0"/>
+                    </a:p>
+                  </a:txBody>
+                  <a:tcPr marL="91440" marR="91440" marT="45720" marB="45720">
+                    <a:lnL w="12700" cap="flat" cmpd="sng" algn="ctr">
+                      <a:solidFill>
+                        <a:srgbClr val="666666"/>
+                      </a:solidFill>
+                      <a:prstDash val="solid"/>
+                      <a:round/>
+                      <a:headEnd type="none" w="med" len="med"/>
+                      <a:tailEnd type="none" w="med" len="med"/>
+                    </a:lnL>
+                    <a:lnR w="12700" cap="flat" cmpd="sng" algn="ctr">
+                      <a:solidFill>
+                        <a:srgbClr val="666666"/>
+                      </a:solidFill>
+                      <a:prstDash val="solid"/>
+                      <a:round/>
+                      <a:headEnd type="none" w="med" len="med"/>
+                      <a:tailEnd type="none" w="med" len="med"/>
+                    </a:lnR>
+                    <a:lnT w="12700" cap="flat" cmpd="sng" algn="ctr">
+                      <a:solidFill>
+                        <a:srgbClr val="666666"/>
+                      </a:solidFill>
+                      <a:prstDash val="solid"/>
+                      <a:round/>
+                      <a:headEnd type="none" w="med" len="med"/>
+                      <a:tailEnd type="none" w="med" len="med"/>
+                    </a:lnT>
+                    <a:lnB w="12700" cap="flat" cmpd="sng" algn="ctr">
+                      <a:solidFill>
+                        <a:srgbClr val="666666"/>
+                      </a:solidFill>
+                      <a:prstDash val="solid"/>
+                      <a:round/>
+                      <a:headEnd type="none" w="med" len="med"/>
+                      <a:tailEnd type="none" w="med" len="med"/>
+                    </a:lnB>
                   </a:tcPr>
                 </a:tc>
                 <a:tc>
@@ -5473,9 +6739,6 @@
                       <a:headEnd type="none" w="med" len="med"/>
                       <a:tailEnd type="none" w="med" len="med"/>
                     </a:lnB>
-                    <a:solidFill>
-                      <a:srgbClr val="FDFDFD"/>
-                    </a:solidFill>
                   </a:tcPr>
                 </a:tc>
                 <a:tc>
@@ -5492,7 +6755,7 @@
                             <a:srgbClr val="000000"/>
                           </a:solidFill>
                         </a:rPr>
-                        <a:t>Likely strongly supportive of relocation or permanent enclosed/contained alternatives.</a:t>
+                        <a:t>Hearing record and reporting capture sustained public comment pressure on siting, coverage quality, and monitoring adequacy.</a:t>
                       </a:r>
                       <a:endParaRPr lang="en-US" sz="900" dirty="0"/>
                     </a:p>
@@ -5534,206 +6797,6 @@
                       <a:headEnd type="none" w="med" len="med"/>
                       <a:tailEnd type="none" w="med" len="med"/>
                     </a:lnB>
-                    <a:solidFill>
-                      <a:srgbClr val="FDFDFD"/>
-                    </a:solidFill>
-                  </a:tcPr>
-                </a:tc>
-                <a:tc>
-                  <a:txBody>
-                    <a:bodyPr/>
-                    <a:lstStyle/>
-                    <a:p>
-                      <a:pPr indent="0" marL="0">
-                        <a:buNone/>
-                      </a:pPr>
-                      <a:r>
-                        <a:rPr lang="en-US" sz="900" dirty="0">
-                          <a:solidFill>
-                            <a:srgbClr val="000000"/>
-                          </a:solidFill>
-                        </a:rPr>
-                        <a:t>Reduce river-adjacent risk, nuisance, EJ burden, and increase monitoring transparency.</a:t>
-                      </a:r>
-                      <a:endParaRPr lang="en-US" sz="900" dirty="0"/>
-                    </a:p>
-                  </a:txBody>
-                  <a:tcPr marL="91440" marR="91440" marT="45720" marB="45720">
-                    <a:lnL w="12700" cap="flat" cmpd="sng" algn="ctr">
-                      <a:solidFill>
-                        <a:srgbClr val="666666"/>
-                      </a:solidFill>
-                      <a:prstDash val="solid"/>
-                      <a:round/>
-                      <a:headEnd type="none" w="med" len="med"/>
-                      <a:tailEnd type="none" w="med" len="med"/>
-                    </a:lnL>
-                    <a:lnR w="12700" cap="flat" cmpd="sng" algn="ctr">
-                      <a:solidFill>
-                        <a:srgbClr val="666666"/>
-                      </a:solidFill>
-                      <a:prstDash val="solid"/>
-                      <a:round/>
-                      <a:headEnd type="none" w="med" len="med"/>
-                      <a:tailEnd type="none" w="med" len="med"/>
-                    </a:lnR>
-                    <a:lnT w="12700" cap="flat" cmpd="sng" algn="ctr">
-                      <a:solidFill>
-                        <a:srgbClr val="666666"/>
-                      </a:solidFill>
-                      <a:prstDash val="solid"/>
-                      <a:round/>
-                      <a:headEnd type="none" w="med" len="med"/>
-                      <a:tailEnd type="none" w="med" len="med"/>
-                    </a:lnT>
-                    <a:lnB w="12700" cap="flat" cmpd="sng" algn="ctr">
-                      <a:solidFill>
-                        <a:srgbClr val="666666"/>
-                      </a:solidFill>
-                      <a:prstDash val="solid"/>
-                      <a:round/>
-                      <a:headEnd type="none" w="med" len="med"/>
-                      <a:tailEnd type="none" w="med" len="med"/>
-                    </a:lnB>
-                    <a:solidFill>
-                      <a:srgbClr val="FDFDFD"/>
-                    </a:solidFill>
-                  </a:tcPr>
-                </a:tc>
-                <a:tc>
-                  <a:txBody>
-                    <a:bodyPr/>
-                    <a:lstStyle/>
-                    <a:p>
-                      <a:pPr indent="0" marL="0">
-                        <a:buNone/>
-                      </a:pPr>
-                      <a:r>
-                        <a:rPr lang="en-US" sz="900" dirty="0">
-                          <a:solidFill>
-                            <a:srgbClr val="000000"/>
-                          </a:solidFill>
-                        </a:rPr>
-                        <a:t>Hearing record and reporting show organized comments on siting, monitoring gaps, and precautionary controls.</a:t>
-                      </a:r>
-                      <a:endParaRPr lang="en-US" sz="900" dirty="0"/>
-                    </a:p>
-                  </a:txBody>
-                  <a:tcPr marL="91440" marR="91440" marT="45720" marB="45720">
-                    <a:lnL w="12700" cap="flat" cmpd="sng" algn="ctr">
-                      <a:solidFill>
-                        <a:srgbClr val="666666"/>
-                      </a:solidFill>
-                      <a:prstDash val="solid"/>
-                      <a:round/>
-                      <a:headEnd type="none" w="med" len="med"/>
-                      <a:tailEnd type="none" w="med" len="med"/>
-                    </a:lnL>
-                    <a:lnR w="12700" cap="flat" cmpd="sng" algn="ctr">
-                      <a:solidFill>
-                        <a:srgbClr val="666666"/>
-                      </a:solidFill>
-                      <a:prstDash val="solid"/>
-                      <a:round/>
-                      <a:headEnd type="none" w="med" len="med"/>
-                      <a:tailEnd type="none" w="med" len="med"/>
-                    </a:lnR>
-                    <a:lnT w="12700" cap="flat" cmpd="sng" algn="ctr">
-                      <a:solidFill>
-                        <a:srgbClr val="666666"/>
-                      </a:solidFill>
-                      <a:prstDash val="solid"/>
-                      <a:round/>
-                      <a:headEnd type="none" w="med" len="med"/>
-                      <a:tailEnd type="none" w="med" len="med"/>
-                    </a:lnT>
-                    <a:lnB w="12700" cap="flat" cmpd="sng" algn="ctr">
-                      <a:solidFill>
-                        <a:srgbClr val="666666"/>
-                      </a:solidFill>
-                      <a:prstDash val="solid"/>
-                      <a:round/>
-                      <a:headEnd type="none" w="med" len="med"/>
-                      <a:tailEnd type="none" w="med" len="med"/>
-                    </a:lnB>
-                    <a:solidFill>
-                      <a:srgbClr val="FDFDFD"/>
-                    </a:solidFill>
-                  </a:tcPr>
-                </a:tc>
-                <a:tc>
-                  <a:txBody>
-                    <a:bodyPr/>
-                    <a:lstStyle/>
-                    <a:p>
-                      <a:pPr indent="0" marL="0">
-                        <a:buNone/>
-                      </a:pPr>
-                      <a:r>
-                        <a:rPr lang="en-US" sz="900" dirty="0">
-                          <a:solidFill>
-                            <a:srgbClr val="000000"/>
-                          </a:solidFill>
-                        </a:rPr>
-                        <a:t>https://portal.ct.gov/-/media/deep/adjudications/hearing-officer-reports/20251029-industrial-general-permit-ctr05000093-hor.pdf</a:t>
-                      </a:r>
-                      <a:endParaRPr lang="en-US" sz="900" dirty="0"/>
-                    </a:p>
-                    <a:p>
-                      <a:pPr indent="0" marL="0">
-                        <a:buNone/>
-                      </a:pPr>
-                      <a:r>
-                        <a:rPr lang="en-US" sz="900" dirty="0">
-                          <a:solidFill>
-                            <a:srgbClr val="000000"/>
-                          </a:solidFill>
-                        </a:rPr>
-                        <a:t>https://www.newhavenindependent.org/2025/05/15/deep_salt_pile_hearing/</a:t>
-                      </a:r>
-                      <a:endParaRPr lang="en-US" sz="900" dirty="0"/>
-                    </a:p>
-                  </a:txBody>
-                  <a:tcPr marL="91440" marR="91440" marT="45720" marB="45720">
-                    <a:lnL w="12700" cap="flat" cmpd="sng" algn="ctr">
-                      <a:solidFill>
-                        <a:srgbClr val="666666"/>
-                      </a:solidFill>
-                      <a:prstDash val="solid"/>
-                      <a:round/>
-                      <a:headEnd type="none" w="med" len="med"/>
-                      <a:tailEnd type="none" w="med" len="med"/>
-                    </a:lnL>
-                    <a:lnR w="12700" cap="flat" cmpd="sng" algn="ctr">
-                      <a:solidFill>
-                        <a:srgbClr val="666666"/>
-                      </a:solidFill>
-                      <a:prstDash val="solid"/>
-                      <a:round/>
-                      <a:headEnd type="none" w="med" len="med"/>
-                      <a:tailEnd type="none" w="med" len="med"/>
-                    </a:lnR>
-                    <a:lnT w="12700" cap="flat" cmpd="sng" algn="ctr">
-                      <a:solidFill>
-                        <a:srgbClr val="666666"/>
-                      </a:solidFill>
-                      <a:prstDash val="solid"/>
-                      <a:round/>
-                      <a:headEnd type="none" w="med" len="med"/>
-                      <a:tailEnd type="none" w="med" len="med"/>
-                    </a:lnT>
-                    <a:lnB w="12700" cap="flat" cmpd="sng" algn="ctr">
-                      <a:solidFill>
-                        <a:srgbClr val="666666"/>
-                      </a:solidFill>
-                      <a:prstDash val="solid"/>
-                      <a:round/>
-                      <a:headEnd type="none" w="med" len="med"/>
-                      <a:tailEnd type="none" w="med" len="med"/>
-                    </a:lnB>
-                    <a:solidFill>
-                      <a:srgbClr val="FDFDFD"/>
-                    </a:solidFill>
                   </a:tcPr>
                 </a:tc>
               </a:tr>
@@ -5774,8 +6837,8 @@
         </p:nvSpPr>
         <p:spPr>
           <a:xfrm>
-            <a:off x="365760" y="274320"/>
-            <a:ext cx="10972800" cy="457200"/>
+            <a:off x="274320" y="182880"/>
+            <a:ext cx="11521440" cy="457200"/>
           </a:xfrm>
           <a:prstGeom prst="rect">
             <a:avLst/>
@@ -5791,14 +6854,14 @@
               <a:buNone/>
             </a:pPr>
             <a:r>
-              <a:rPr lang="en-US" sz="2200" b="1" dirty="0">
+              <a:rPr lang="en-US" sz="1800" b="1" dirty="0">
                 <a:solidFill>
                   <a:srgbClr val="000000"/>
                 </a:solidFill>
               </a:rPr>
-              <a:t>Primary Sources Used</a:t>
-            </a:r>
-            <a:endParaRPr lang="en-US" sz="2200" dirty="0"/>
+              <a:t>Justification — Enstructure / Gateway Terminal</a:t>
+            </a:r>
+            <a:endParaRPr lang="en-US" sz="1800" dirty="0"/>
           </a:p>
         </p:txBody>
       </p:sp>
@@ -5810,8 +6873,8 @@
         </p:nvSpPr>
         <p:spPr>
           <a:xfrm>
-            <a:off x="457200" y="822960"/>
-            <a:ext cx="11430000" cy="228600"/>
+            <a:off x="365760" y="822960"/>
+            <a:ext cx="11155680" cy="914400"/>
           </a:xfrm>
           <a:prstGeom prst="rect">
             <a:avLst/>
@@ -5827,14 +6890,14 @@
               <a:buNone/>
             </a:pPr>
             <a:r>
-              <a:rPr lang="en-US" sz="1000" dirty="0">
+              <a:rPr lang="en-US" sz="1200" dirty="0">
                 <a:solidFill>
-                  <a:srgbClr val="333333"/>
+                  <a:srgbClr val="000000"/>
                 </a:solidFill>
               </a:rPr>
-              <a:t>[1] https://portal.ct.gov/-/media/deep/water_regulating_and_discharges/stormwater/industrial/2025-permit-documents/2025-industrial-stormwater-general-permit-part-1--2erc.pdf</a:t>
-            </a:r>
-            <a:endParaRPr lang="en-US" sz="1000" dirty="0"/>
+              <a:t>Likely interests: Maintain centralized salt distribution role; preserve ship-barge-truck-rail connectivity; limit capex and operational disruption; protect permit coverage and reputation.</a:t>
+            </a:r>
+            <a:endParaRPr lang="en-US" sz="1200" dirty="0"/>
           </a:p>
         </p:txBody>
       </p:sp>
@@ -5846,8 +6909,8 @@
         </p:nvSpPr>
         <p:spPr>
           <a:xfrm>
-            <a:off x="457200" y="1078992"/>
-            <a:ext cx="11430000" cy="228600"/>
+            <a:off x="365760" y="1737360"/>
+            <a:ext cx="11155680" cy="1188720"/>
           </a:xfrm>
           <a:prstGeom prst="rect">
             <a:avLst/>
@@ -5863,14 +6926,14 @@
               <a:buNone/>
             </a:pPr>
             <a:r>
-              <a:rPr lang="en-US" sz="1000" dirty="0">
+              <a:rPr lang="en-US" sz="1200" dirty="0">
                 <a:solidFill>
-                  <a:srgbClr val="333333"/>
+                  <a:srgbClr val="000000"/>
                 </a:solidFill>
               </a:rPr>
-              <a:t>[2] https://portal.ct.gov/-/media/deep/adjudications/hearing-officer-reports/20251029-industrial-general-permit-ctr05000093-hor.pdf</a:t>
-            </a:r>
-            <a:endParaRPr lang="en-US" sz="1000" dirty="0"/>
+              <a:t>Influence (High) rationale: Named in DEEP hearing context as the operating salt-pile entity under industrial stormwater permit discussions; corporate materials emphasize multimodal logistics and New Haven rail investment.</a:t>
+            </a:r>
+            <a:endParaRPr lang="en-US" sz="1200" dirty="0"/>
           </a:p>
         </p:txBody>
       </p:sp>
@@ -5882,8 +6945,8 @@
         </p:nvSpPr>
         <p:spPr>
           <a:xfrm>
-            <a:off x="457200" y="1335024"/>
-            <a:ext cx="11430000" cy="228600"/>
+            <a:off x="365760" y="2926080"/>
+            <a:ext cx="11155680" cy="914400"/>
           </a:xfrm>
           <a:prstGeom prst="rect">
             <a:avLst/>
@@ -5899,14 +6962,14 @@
               <a:buNone/>
             </a:pPr>
             <a:r>
-              <a:rPr lang="en-US" sz="1000" dirty="0">
+              <a:rPr lang="en-US" sz="1200" dirty="0">
                 <a:solidFill>
-                  <a:srgbClr val="333333"/>
+                  <a:srgbClr val="000000"/>
                 </a:solidFill>
               </a:rPr>
-              <a:t>[3] https://enstructure.com/network/northeast/</a:t>
-            </a:r>
-            <a:endParaRPr lang="en-US" sz="1000" dirty="0"/>
+              <a:t>Practical levers: Operational control of stockpiles; SWPPP/BMP execution; capital investment decisions; contract terms with municipal buyers and transporters.</a:t>
+            </a:r>
+            <a:endParaRPr lang="en-US" sz="1200" dirty="0"/>
           </a:p>
         </p:txBody>
       </p:sp>
@@ -5918,8 +6981,8 @@
         </p:nvSpPr>
         <p:spPr>
           <a:xfrm>
-            <a:off x="457200" y="1591056"/>
-            <a:ext cx="11430000" cy="228600"/>
+            <a:off x="365760" y="3931920"/>
+            <a:ext cx="1828800" cy="274320"/>
           </a:xfrm>
           <a:prstGeom prst="rect">
             <a:avLst/>
@@ -5935,14 +6998,14 @@
               <a:buNone/>
             </a:pPr>
             <a:r>
-              <a:rPr lang="en-US" sz="1000" dirty="0">
+              <a:rPr lang="en-US" sz="1200" b="1" dirty="0">
                 <a:solidFill>
-                  <a:srgbClr val="333333"/>
+                  <a:srgbClr val="000000"/>
                 </a:solidFill>
               </a:rPr>
-              <a:t>[4] https://enstructure.com/gateway-terminal-announces-partnership-with-enstructure/</a:t>
-            </a:r>
-            <a:endParaRPr lang="en-US" sz="1000" dirty="0"/>
+              <a:t>Sources:</a:t>
+            </a:r>
+            <a:endParaRPr lang="en-US" sz="1200" dirty="0"/>
           </a:p>
         </p:txBody>
       </p:sp>
@@ -5954,8 +7017,8 @@
         </p:nvSpPr>
         <p:spPr>
           <a:xfrm>
-            <a:off x="457200" y="1847088"/>
-            <a:ext cx="11430000" cy="228600"/>
+            <a:off x="548640" y="4206240"/>
+            <a:ext cx="10972800" cy="320040"/>
           </a:xfrm>
           <a:prstGeom prst="rect">
             <a:avLst/>
@@ -5976,7 +7039,7 @@
                   <a:srgbClr val="333333"/>
                 </a:solidFill>
               </a:rPr>
-              <a:t>[5] https://enstructure.com/enstructure-to-receive-11-2-million-federal-grant-to-add-two-new-railyards-and-new-railroad-track-in-new-haven-ct/</a:t>
+              <a:t>• https://portal.ct.gov/-/media/deep/adjudications/hearing-officer-reports/20251029-industrial-general-permit-ctr05000093-hor.pdf</a:t>
             </a:r>
             <a:endParaRPr lang="en-US" sz="1000" dirty="0"/>
           </a:p>
@@ -5990,8 +7053,8 @@
         </p:nvSpPr>
         <p:spPr>
           <a:xfrm>
-            <a:off x="457200" y="2103120"/>
-            <a:ext cx="11430000" cy="228600"/>
+            <a:off x="548640" y="4535424"/>
+            <a:ext cx="10972800" cy="320040"/>
           </a:xfrm>
           <a:prstGeom prst="rect">
             <a:avLst/>
@@ -6012,7 +7075,7 @@
                   <a:srgbClr val="333333"/>
                 </a:solidFill>
               </a:rPr>
-              <a:t>[6] https://www.uinet.com/documents/1678076/1696637/UI_ChapelStreet_FAQ.pdf/c3fe8470-bad2-33fa-e046-e16c975afa0f</a:t>
+              <a:t>• https://enstructure.com/network/northeast/</a:t>
             </a:r>
             <a:endParaRPr lang="en-US" sz="1000" dirty="0"/>
           </a:p>
@@ -6026,8 +7089,8 @@
         </p:nvSpPr>
         <p:spPr>
           <a:xfrm>
-            <a:off x="457200" y="2359152"/>
-            <a:ext cx="11430000" cy="228600"/>
+            <a:off x="548640" y="4864608"/>
+            <a:ext cx="10972800" cy="320040"/>
           </a:xfrm>
           <a:prstGeom prst="rect">
             <a:avLst/>
@@ -6048,7 +7111,7 @@
                   <a:srgbClr val="333333"/>
                 </a:solidFill>
               </a:rPr>
-              <a:t>[7] https://bpb-us-w2.wpmucdn.com/campuspress.yale.edu/dist/a/4311/files/2023/11/New-Haven-Mill-River-Planning-Study-Final-Report-FINAL-web.pdf</a:t>
+              <a:t>• https://enstructure.com/gateway-terminal-announces-partnership-with-enstructure/</a:t>
             </a:r>
             <a:endParaRPr lang="en-US" sz="1000" dirty="0"/>
           </a:p>
@@ -6062,8 +7125,8 @@
         </p:nvSpPr>
         <p:spPr>
           <a:xfrm>
-            <a:off x="457200" y="2615184"/>
-            <a:ext cx="11430000" cy="228600"/>
+            <a:off x="548640" y="5193792"/>
+            <a:ext cx="10972800" cy="320040"/>
           </a:xfrm>
           <a:prstGeom prst="rect">
             <a:avLst/>
@@ -6084,22 +7147,47 @@
                   <a:srgbClr val="333333"/>
                 </a:solidFill>
               </a:rPr>
-              <a:t>[8] https://www.newhavenindependent.org/2025/05/15/deep_salt_pile_hearing/</a:t>
+              <a:t>• https://enstructure.com/enstructure-to-receive-11-2-million-federal-grant-to-add-two-new-railyards-and-new-railroad-track-in-new-haven-ct/</a:t>
             </a:r>
             <a:endParaRPr lang="en-US" sz="1000" dirty="0"/>
           </a:p>
         </p:txBody>
       </p:sp>
-      <p:sp>
-        <p:nvSpPr>
-          <p:cNvPr id="11" name="Text 9"/>
+    </p:spTree>
+  </p:cSld>
+  <p:clrMapOvr>
+    <a:masterClrMapping/>
+  </p:clrMapOvr>
+</p:sld>
+</file>
+
+<file path=ppt/slides/slide6.xml><?xml version="1.0" encoding="utf-8"?>
+<p:sld xmlns:a="http://schemas.openxmlformats.org/drawingml/2006/main" xmlns:r="http://schemas.openxmlformats.org/officeDocument/2006/relationships" xmlns:p="http://schemas.openxmlformats.org/presentationml/2006/main">
+  <p:cSld name="Slide 6">
+    <p:spTree>
+      <p:nvGrpSpPr>
+        <p:cNvPr id="1" name=""/>
+        <p:cNvGrpSpPr/>
+        <p:nvPr/>
+      </p:nvGrpSpPr>
+      <p:grpSpPr>
+        <a:xfrm>
+          <a:off x="0" y="0"/>
+          <a:ext cx="0" cy="0"/>
+          <a:chOff x="0" y="0"/>
+          <a:chExt cx="0" cy="0"/>
+        </a:xfrm>
+      </p:grpSpPr>
+      <p:sp>
+        <p:nvSpPr>
+          <p:cNvPr id="2" name="Text 0"/>
           <p:cNvSpPr/>
           <p:nvPr/>
         </p:nvSpPr>
         <p:spPr>
           <a:xfrm>
-            <a:off x="457200" y="2871216"/>
-            <a:ext cx="11430000" cy="228600"/>
+            <a:off x="274320" y="182880"/>
+            <a:ext cx="11521440" cy="457200"/>
           </a:xfrm>
           <a:prstGeom prst="rect">
             <a:avLst/>
@@ -6115,27 +7203,27 @@
               <a:buNone/>
             </a:pPr>
             <a:r>
-              <a:rPr lang="en-US" sz="1000" dirty="0">
+              <a:rPr lang="en-US" sz="1800" b="1" dirty="0">
                 <a:solidFill>
-                  <a:srgbClr val="333333"/>
+                  <a:srgbClr val="000000"/>
                 </a:solidFill>
               </a:rPr>
-              <a:t>[9] https://www.epa.gov/npdes/npdes-stormwater-program</a:t>
-            </a:r>
-            <a:endParaRPr lang="en-US" sz="1000" dirty="0"/>
-          </a:p>
-        </p:txBody>
-      </p:sp>
-      <p:sp>
-        <p:nvSpPr>
-          <p:cNvPr id="12" name="Text 10"/>
+              <a:t>Justification — Southern Connecticut Gas / UI (property owner context)</a:t>
+            </a:r>
+            <a:endParaRPr lang="en-US" sz="1800" dirty="0"/>
+          </a:p>
+        </p:txBody>
+      </p:sp>
+      <p:sp>
+        <p:nvSpPr>
+          <p:cNvPr id="3" name="Text 1"/>
           <p:cNvSpPr/>
           <p:nvPr/>
         </p:nvSpPr>
         <p:spPr>
           <a:xfrm>
-            <a:off x="457200" y="3127248"/>
-            <a:ext cx="11430000" cy="228600"/>
+            <a:off x="365760" y="822960"/>
+            <a:ext cx="11155680" cy="914400"/>
           </a:xfrm>
           <a:prstGeom prst="rect">
             <a:avLst/>
@@ -6151,27 +7239,27 @@
               <a:buNone/>
             </a:pPr>
             <a:r>
-              <a:rPr lang="en-US" sz="1000" dirty="0">
+              <a:rPr lang="en-US" sz="1200" dirty="0">
                 <a:solidFill>
-                  <a:srgbClr val="333333"/>
+                  <a:srgbClr val="000000"/>
                 </a:solidFill>
               </a:rPr>
-              <a:t>[10] https://www.epa.gov/newsreleases/biden-harris-administration-announces-nearly-40-million-clean-ports-investments</a:t>
-            </a:r>
-            <a:endParaRPr lang="en-US" sz="1000" dirty="0"/>
-          </a:p>
-        </p:txBody>
-      </p:sp>
-      <p:sp>
-        <p:nvSpPr>
-          <p:cNvPr id="13" name="Text 11"/>
+              <a:t>Likely interests: Limit liability and remediation conflicts; preserve lease value; reduce legal/community pressure around shoreline use.</a:t>
+            </a:r>
+            <a:endParaRPr lang="en-US" sz="1200" dirty="0"/>
+          </a:p>
+        </p:txBody>
+      </p:sp>
+      <p:sp>
+        <p:nvSpPr>
+          <p:cNvPr id="4" name="Text 2"/>
           <p:cNvSpPr/>
           <p:nvPr/>
         </p:nvSpPr>
         <p:spPr>
           <a:xfrm>
-            <a:off x="457200" y="3383280"/>
-            <a:ext cx="11430000" cy="228600"/>
+            <a:off x="365760" y="1737360"/>
+            <a:ext cx="11155680" cy="1188720"/>
           </a:xfrm>
           <a:prstGeom prst="rect">
             <a:avLst/>
@@ -6187,12 +7275,987 @@
               <a:buNone/>
             </a:pPr>
             <a:r>
+              <a:rPr lang="en-US" sz="1200" dirty="0">
+                <a:solidFill>
+                  <a:srgbClr val="000000"/>
+                </a:solidFill>
+              </a:rPr>
+              <a:t>Influence (Medium-High) rationale: UI/SCG FAQ identifies parcel ownership and lease use for bulk salt/aggregate storage and describes remediation setting of the site.</a:t>
+            </a:r>
+            <a:endParaRPr lang="en-US" sz="1200" dirty="0"/>
+          </a:p>
+        </p:txBody>
+      </p:sp>
+      <p:sp>
+        <p:nvSpPr>
+          <p:cNvPr id="5" name="Text 3"/>
+          <p:cNvSpPr/>
+          <p:nvPr/>
+        </p:nvSpPr>
+        <p:spPr>
+          <a:xfrm>
+            <a:off x="365760" y="2926080"/>
+            <a:ext cx="11155680" cy="914400"/>
+          </a:xfrm>
+          <a:prstGeom prst="rect">
+            <a:avLst/>
+          </a:prstGeom>
+          <a:noFill/>
+          <a:ln/>
+        </p:spPr>
+        <p:txBody>
+          <a:bodyPr wrap="square" rtlCol="0" anchor="ctr"/>
+          <a:lstStyle/>
+          <a:p>
+            <a:pPr indent="0" marL="0">
+              <a:buNone/>
+            </a:pPr>
+            <a:r>
+              <a:rPr lang="en-US" sz="1200" dirty="0">
+                <a:solidFill>
+                  <a:srgbClr val="000000"/>
+                </a:solidFill>
+              </a:rPr>
+              <a:t>Practical levers: Property rights and lease terms; coordination with remediation obligations and site access constraints.</a:t>
+            </a:r>
+            <a:endParaRPr lang="en-US" sz="1200" dirty="0"/>
+          </a:p>
+        </p:txBody>
+      </p:sp>
+      <p:sp>
+        <p:nvSpPr>
+          <p:cNvPr id="6" name="Text 4"/>
+          <p:cNvSpPr/>
+          <p:nvPr/>
+        </p:nvSpPr>
+        <p:spPr>
+          <a:xfrm>
+            <a:off x="365760" y="3931920"/>
+            <a:ext cx="1828800" cy="274320"/>
+          </a:xfrm>
+          <a:prstGeom prst="rect">
+            <a:avLst/>
+          </a:prstGeom>
+          <a:noFill/>
+          <a:ln/>
+        </p:spPr>
+        <p:txBody>
+          <a:bodyPr wrap="square" rtlCol="0" anchor="ctr"/>
+          <a:lstStyle/>
+          <a:p>
+            <a:pPr indent="0" marL="0">
+              <a:buNone/>
+            </a:pPr>
+            <a:r>
+              <a:rPr lang="en-US" sz="1200" b="1" dirty="0">
+                <a:solidFill>
+                  <a:srgbClr val="000000"/>
+                </a:solidFill>
+              </a:rPr>
+              <a:t>Sources:</a:t>
+            </a:r>
+            <a:endParaRPr lang="en-US" sz="1200" dirty="0"/>
+          </a:p>
+        </p:txBody>
+      </p:sp>
+      <p:sp>
+        <p:nvSpPr>
+          <p:cNvPr id="7" name="Text 5"/>
+          <p:cNvSpPr/>
+          <p:nvPr/>
+        </p:nvSpPr>
+        <p:spPr>
+          <a:xfrm>
+            <a:off x="548640" y="4206240"/>
+            <a:ext cx="10972800" cy="320040"/>
+          </a:xfrm>
+          <a:prstGeom prst="rect">
+            <a:avLst/>
+          </a:prstGeom>
+          <a:noFill/>
+          <a:ln/>
+        </p:spPr>
+        <p:txBody>
+          <a:bodyPr wrap="square" rtlCol="0" anchor="ctr"/>
+          <a:lstStyle/>
+          <a:p>
+            <a:pPr indent="0" marL="0">
+              <a:buNone/>
+            </a:pPr>
+            <a:r>
               <a:rPr lang="en-US" sz="1000" dirty="0">
                 <a:solidFill>
                   <a:srgbClr val="333333"/>
                 </a:solidFill>
               </a:rPr>
-              <a:t>[11] https://www.nae.usace.army.mil/Portals/74/docs/Topics/New%20Haven/2020/05-AppendixCEconomcisNewHavenHarborNavigationImprovementProject%20_FinalJanuary2020.pdf</a:t>
+              <a:t>• https://www.uinet.com/documents/1678076/1696637/UI_ChapelStreet_FAQ.pdf/c3fe8470-bad2-33fa-e046-e16c975afa0f</a:t>
+            </a:r>
+            <a:endParaRPr lang="en-US" sz="1000" dirty="0"/>
+          </a:p>
+        </p:txBody>
+      </p:sp>
+    </p:spTree>
+  </p:cSld>
+  <p:clrMapOvr>
+    <a:masterClrMapping/>
+  </p:clrMapOvr>
+</p:sld>
+</file>
+
+<file path=ppt/slides/slide7.xml><?xml version="1.0" encoding="utf-8"?>
+<p:sld xmlns:a="http://schemas.openxmlformats.org/drawingml/2006/main" xmlns:r="http://schemas.openxmlformats.org/officeDocument/2006/relationships" xmlns:p="http://schemas.openxmlformats.org/presentationml/2006/main">
+  <p:cSld name="Slide 7">
+    <p:spTree>
+      <p:nvGrpSpPr>
+        <p:cNvPr id="1" name=""/>
+        <p:cNvGrpSpPr/>
+        <p:nvPr/>
+      </p:nvGrpSpPr>
+      <p:grpSpPr>
+        <a:xfrm>
+          <a:off x="0" y="0"/>
+          <a:ext cx="0" cy="0"/>
+          <a:chOff x="0" y="0"/>
+          <a:chExt cx="0" cy="0"/>
+        </a:xfrm>
+      </p:grpSpPr>
+      <p:sp>
+        <p:nvSpPr>
+          <p:cNvPr id="2" name="Text 0"/>
+          <p:cNvSpPr/>
+          <p:nvPr/>
+        </p:nvSpPr>
+        <p:spPr>
+          <a:xfrm>
+            <a:off x="274320" y="182880"/>
+            <a:ext cx="11521440" cy="457200"/>
+          </a:xfrm>
+          <a:prstGeom prst="rect">
+            <a:avLst/>
+          </a:prstGeom>
+          <a:noFill/>
+          <a:ln/>
+        </p:spPr>
+        <p:txBody>
+          <a:bodyPr wrap="square" rtlCol="0" anchor="ctr"/>
+          <a:lstStyle/>
+          <a:p>
+            <a:pPr indent="0" marL="0">
+              <a:buNone/>
+            </a:pPr>
+            <a:r>
+              <a:rPr lang="en-US" sz="1800" b="1" dirty="0">
+                <a:solidFill>
+                  <a:srgbClr val="000000"/>
+                </a:solidFill>
+              </a:rPr>
+              <a:t>Justification — Connecticut DEEP</a:t>
+            </a:r>
+            <a:endParaRPr lang="en-US" sz="1800" dirty="0"/>
+          </a:p>
+        </p:txBody>
+      </p:sp>
+      <p:sp>
+        <p:nvSpPr>
+          <p:cNvPr id="3" name="Text 1"/>
+          <p:cNvSpPr/>
+          <p:nvPr/>
+        </p:nvSpPr>
+        <p:spPr>
+          <a:xfrm>
+            <a:off x="365760" y="822960"/>
+            <a:ext cx="11155680" cy="914400"/>
+          </a:xfrm>
+          <a:prstGeom prst="rect">
+            <a:avLst/>
+          </a:prstGeom>
+          <a:noFill/>
+          <a:ln/>
+        </p:spPr>
+        <p:txBody>
+          <a:bodyPr wrap="square" rtlCol="0" anchor="ctr"/>
+          <a:lstStyle/>
+          <a:p>
+            <a:pPr indent="0" marL="0">
+              <a:buNone/>
+            </a:pPr>
+            <a:r>
+              <a:rPr lang="en-US" sz="1200" dirty="0">
+                <a:solidFill>
+                  <a:srgbClr val="000000"/>
+                </a:solidFill>
+              </a:rPr>
+              <a:t>Likely interests: Prevent pollutant discharge to waters; enforce permit compliance; maintain defensible permitting process under public scrutiny.</a:t>
+            </a:r>
+            <a:endParaRPr lang="en-US" sz="1200" dirty="0"/>
+          </a:p>
+        </p:txBody>
+      </p:sp>
+      <p:sp>
+        <p:nvSpPr>
+          <p:cNvPr id="4" name="Text 2"/>
+          <p:cNvSpPr/>
+          <p:nvPr/>
+        </p:nvSpPr>
+        <p:spPr>
+          <a:xfrm>
+            <a:off x="365760" y="1737360"/>
+            <a:ext cx="11155680" cy="1188720"/>
+          </a:xfrm>
+          <a:prstGeom prst="rect">
+            <a:avLst/>
+          </a:prstGeom>
+          <a:noFill/>
+          <a:ln/>
+        </p:spPr>
+        <p:txBody>
+          <a:bodyPr wrap="square" rtlCol="0" anchor="ctr"/>
+          <a:lstStyle/>
+          <a:p>
+            <a:pPr indent="0" marL="0">
+              <a:buNone/>
+            </a:pPr>
+            <a:r>
+              <a:rPr lang="en-US" sz="1200" dirty="0">
+                <a:solidFill>
+                  <a:srgbClr val="000000"/>
+                </a:solidFill>
+              </a:rPr>
+              <a:t>Influence (High) rationale: DEEP is the permit/enforcement authority; permit text sets operational constraints and hearing record captures regulator position and process boundaries.</a:t>
+            </a:r>
+            <a:endParaRPr lang="en-US" sz="1200" dirty="0"/>
+          </a:p>
+        </p:txBody>
+      </p:sp>
+      <p:sp>
+        <p:nvSpPr>
+          <p:cNvPr id="5" name="Text 3"/>
+          <p:cNvSpPr/>
+          <p:nvPr/>
+        </p:nvSpPr>
+        <p:spPr>
+          <a:xfrm>
+            <a:off x="365760" y="2926080"/>
+            <a:ext cx="11155680" cy="914400"/>
+          </a:xfrm>
+          <a:prstGeom prst="rect">
+            <a:avLst/>
+          </a:prstGeom>
+          <a:noFill/>
+          <a:ln/>
+        </p:spPr>
+        <p:txBody>
+          <a:bodyPr wrap="square" rtlCol="0" anchor="ctr"/>
+          <a:lstStyle/>
+          <a:p>
+            <a:pPr indent="0" marL="0">
+              <a:buNone/>
+            </a:pPr>
+            <a:r>
+              <a:rPr lang="en-US" sz="1200" dirty="0">
+                <a:solidFill>
+                  <a:srgbClr val="000000"/>
+                </a:solidFill>
+              </a:rPr>
+              <a:t>Practical levers: Industrial stormwater permit conditions (CTR050000 / Sector AE); inspections; corrective-action orders; enforcement discretion.</a:t>
+            </a:r>
+            <a:endParaRPr lang="en-US" sz="1200" dirty="0"/>
+          </a:p>
+        </p:txBody>
+      </p:sp>
+      <p:sp>
+        <p:nvSpPr>
+          <p:cNvPr id="6" name="Text 4"/>
+          <p:cNvSpPr/>
+          <p:nvPr/>
+        </p:nvSpPr>
+        <p:spPr>
+          <a:xfrm>
+            <a:off x="365760" y="3931920"/>
+            <a:ext cx="1828800" cy="274320"/>
+          </a:xfrm>
+          <a:prstGeom prst="rect">
+            <a:avLst/>
+          </a:prstGeom>
+          <a:noFill/>
+          <a:ln/>
+        </p:spPr>
+        <p:txBody>
+          <a:bodyPr wrap="square" rtlCol="0" anchor="ctr"/>
+          <a:lstStyle/>
+          <a:p>
+            <a:pPr indent="0" marL="0">
+              <a:buNone/>
+            </a:pPr>
+            <a:r>
+              <a:rPr lang="en-US" sz="1200" b="1" dirty="0">
+                <a:solidFill>
+                  <a:srgbClr val="000000"/>
+                </a:solidFill>
+              </a:rPr>
+              <a:t>Sources:</a:t>
+            </a:r>
+            <a:endParaRPr lang="en-US" sz="1200" dirty="0"/>
+          </a:p>
+        </p:txBody>
+      </p:sp>
+      <p:sp>
+        <p:nvSpPr>
+          <p:cNvPr id="7" name="Text 5"/>
+          <p:cNvSpPr/>
+          <p:nvPr/>
+        </p:nvSpPr>
+        <p:spPr>
+          <a:xfrm>
+            <a:off x="548640" y="4206240"/>
+            <a:ext cx="10972800" cy="320040"/>
+          </a:xfrm>
+          <a:prstGeom prst="rect">
+            <a:avLst/>
+          </a:prstGeom>
+          <a:noFill/>
+          <a:ln/>
+        </p:spPr>
+        <p:txBody>
+          <a:bodyPr wrap="square" rtlCol="0" anchor="ctr"/>
+          <a:lstStyle/>
+          <a:p>
+            <a:pPr indent="0" marL="0">
+              <a:buNone/>
+            </a:pPr>
+            <a:r>
+              <a:rPr lang="en-US" sz="1000" dirty="0">
+                <a:solidFill>
+                  <a:srgbClr val="333333"/>
+                </a:solidFill>
+              </a:rPr>
+              <a:t>• https://portal.ct.gov/-/media/deep/water_regulating_and_discharges/stormwater/industrial/2025-permit-documents/2025-industrial-stormwater-general-permit-part-1--2erc.pdf</a:t>
+            </a:r>
+            <a:endParaRPr lang="en-US" sz="1000" dirty="0"/>
+          </a:p>
+        </p:txBody>
+      </p:sp>
+      <p:sp>
+        <p:nvSpPr>
+          <p:cNvPr id="8" name="Text 6"/>
+          <p:cNvSpPr/>
+          <p:nvPr/>
+        </p:nvSpPr>
+        <p:spPr>
+          <a:xfrm>
+            <a:off x="548640" y="4535424"/>
+            <a:ext cx="10972800" cy="320040"/>
+          </a:xfrm>
+          <a:prstGeom prst="rect">
+            <a:avLst/>
+          </a:prstGeom>
+          <a:noFill/>
+          <a:ln/>
+        </p:spPr>
+        <p:txBody>
+          <a:bodyPr wrap="square" rtlCol="0" anchor="ctr"/>
+          <a:lstStyle/>
+          <a:p>
+            <a:pPr indent="0" marL="0">
+              <a:buNone/>
+            </a:pPr>
+            <a:r>
+              <a:rPr lang="en-US" sz="1000" dirty="0">
+                <a:solidFill>
+                  <a:srgbClr val="333333"/>
+                </a:solidFill>
+              </a:rPr>
+              <a:t>• https://portal.ct.gov/DEEP/Water-Regulating-and-Discharges/Stormwater/Industrial-Stormwater-GP</a:t>
+            </a:r>
+            <a:endParaRPr lang="en-US" sz="1000" dirty="0"/>
+          </a:p>
+        </p:txBody>
+      </p:sp>
+      <p:sp>
+        <p:nvSpPr>
+          <p:cNvPr id="9" name="Text 7"/>
+          <p:cNvSpPr/>
+          <p:nvPr/>
+        </p:nvSpPr>
+        <p:spPr>
+          <a:xfrm>
+            <a:off x="548640" y="4864608"/>
+            <a:ext cx="10972800" cy="320040"/>
+          </a:xfrm>
+          <a:prstGeom prst="rect">
+            <a:avLst/>
+          </a:prstGeom>
+          <a:noFill/>
+          <a:ln/>
+        </p:spPr>
+        <p:txBody>
+          <a:bodyPr wrap="square" rtlCol="0" anchor="ctr"/>
+          <a:lstStyle/>
+          <a:p>
+            <a:pPr indent="0" marL="0">
+              <a:buNone/>
+            </a:pPr>
+            <a:r>
+              <a:rPr lang="en-US" sz="1000" dirty="0">
+                <a:solidFill>
+                  <a:srgbClr val="333333"/>
+                </a:solidFill>
+              </a:rPr>
+              <a:t>• https://portal.ct.gov/-/media/deep/adjudications/hearing-officer-reports/20251029-industrial-general-permit-ctr05000093-hor.pdf</a:t>
+            </a:r>
+            <a:endParaRPr lang="en-US" sz="1000" dirty="0"/>
+          </a:p>
+        </p:txBody>
+      </p:sp>
+    </p:spTree>
+  </p:cSld>
+  <p:clrMapOvr>
+    <a:masterClrMapping/>
+  </p:clrMapOvr>
+</p:sld>
+</file>
+
+<file path=ppt/slides/slide8.xml><?xml version="1.0" encoding="utf-8"?>
+<p:sld xmlns:a="http://schemas.openxmlformats.org/drawingml/2006/main" xmlns:r="http://schemas.openxmlformats.org/officeDocument/2006/relationships" xmlns:p="http://schemas.openxmlformats.org/presentationml/2006/main">
+  <p:cSld name="Slide 8">
+    <p:spTree>
+      <p:nvGrpSpPr>
+        <p:cNvPr id="1" name=""/>
+        <p:cNvGrpSpPr/>
+        <p:nvPr/>
+      </p:nvGrpSpPr>
+      <p:grpSpPr>
+        <a:xfrm>
+          <a:off x="0" y="0"/>
+          <a:ext cx="0" cy="0"/>
+          <a:chOff x="0" y="0"/>
+          <a:chExt cx="0" cy="0"/>
+        </a:xfrm>
+      </p:grpSpPr>
+      <p:sp>
+        <p:nvSpPr>
+          <p:cNvPr id="2" name="Text 0"/>
+          <p:cNvSpPr/>
+          <p:nvPr/>
+        </p:nvSpPr>
+        <p:spPr>
+          <a:xfrm>
+            <a:off x="274320" y="182880"/>
+            <a:ext cx="11521440" cy="457200"/>
+          </a:xfrm>
+          <a:prstGeom prst="rect">
+            <a:avLst/>
+          </a:prstGeom>
+          <a:noFill/>
+          <a:ln/>
+        </p:spPr>
+        <p:txBody>
+          <a:bodyPr wrap="square" rtlCol="0" anchor="ctr"/>
+          <a:lstStyle/>
+          <a:p>
+            <a:pPr indent="0" marL="0">
+              <a:buNone/>
+            </a:pPr>
+            <a:r>
+              <a:rPr lang="en-US" sz="1800" b="1" dirty="0">
+                <a:solidFill>
+                  <a:srgbClr val="000000"/>
+                </a:solidFill>
+              </a:rPr>
+              <a:t>Justification — City of New Haven</a:t>
+            </a:r>
+            <a:endParaRPr lang="en-US" sz="1800" dirty="0"/>
+          </a:p>
+        </p:txBody>
+      </p:sp>
+      <p:sp>
+        <p:nvSpPr>
+          <p:cNvPr id="3" name="Text 1"/>
+          <p:cNvSpPr/>
+          <p:nvPr/>
+        </p:nvSpPr>
+        <p:spPr>
+          <a:xfrm>
+            <a:off x="365760" y="822960"/>
+            <a:ext cx="11155680" cy="914400"/>
+          </a:xfrm>
+          <a:prstGeom prst="rect">
+            <a:avLst/>
+          </a:prstGeom>
+          <a:noFill/>
+          <a:ln/>
+        </p:spPr>
+        <p:txBody>
+          <a:bodyPr wrap="square" rtlCol="0" anchor="ctr"/>
+          <a:lstStyle/>
+          <a:p>
+            <a:pPr indent="0" marL="0">
+              <a:buNone/>
+            </a:pPr>
+            <a:r>
+              <a:rPr lang="en-US" sz="1200" dirty="0">
+                <a:solidFill>
+                  <a:srgbClr val="000000"/>
+                </a:solidFill>
+              </a:rPr>
+              <a:t>Likely interests: Waterfront redevelopment quality; EJ/community outcomes near Mill River/Fair Haven; maintain winter road-safety reliability.</a:t>
+            </a:r>
+            <a:endParaRPr lang="en-US" sz="1200" dirty="0"/>
+          </a:p>
+        </p:txBody>
+      </p:sp>
+      <p:sp>
+        <p:nvSpPr>
+          <p:cNvPr id="4" name="Text 2"/>
+          <p:cNvSpPr/>
+          <p:nvPr/>
+        </p:nvSpPr>
+        <p:spPr>
+          <a:xfrm>
+            <a:off x="365760" y="1737360"/>
+            <a:ext cx="11155680" cy="1188720"/>
+          </a:xfrm>
+          <a:prstGeom prst="rect">
+            <a:avLst/>
+          </a:prstGeom>
+          <a:noFill/>
+          <a:ln/>
+        </p:spPr>
+        <p:txBody>
+          <a:bodyPr wrap="square" rtlCol="0" anchor="ctr"/>
+          <a:lstStyle/>
+          <a:p>
+            <a:pPr indent="0" marL="0">
+              <a:buNone/>
+            </a:pPr>
+            <a:r>
+              <a:rPr lang="en-US" sz="1200" dirty="0">
+                <a:solidFill>
+                  <a:srgbClr val="000000"/>
+                </a:solidFill>
+              </a:rPr>
+              <a:t>Influence (Medium-High) rationale: Mill River planning materials and local coverage show proximity to community assets and redevelopment priorities around the waterfront corridor.</a:t>
+            </a:r>
+            <a:endParaRPr lang="en-US" sz="1200" dirty="0"/>
+          </a:p>
+        </p:txBody>
+      </p:sp>
+      <p:sp>
+        <p:nvSpPr>
+          <p:cNvPr id="5" name="Text 3"/>
+          <p:cNvSpPr/>
+          <p:nvPr/>
+        </p:nvSpPr>
+        <p:spPr>
+          <a:xfrm>
+            <a:off x="365760" y="2926080"/>
+            <a:ext cx="11155680" cy="914400"/>
+          </a:xfrm>
+          <a:prstGeom prst="rect">
+            <a:avLst/>
+          </a:prstGeom>
+          <a:noFill/>
+          <a:ln/>
+        </p:spPr>
+        <p:txBody>
+          <a:bodyPr wrap="square" rtlCol="0" anchor="ctr"/>
+          <a:lstStyle/>
+          <a:p>
+            <a:pPr indent="0" marL="0">
+              <a:buNone/>
+            </a:pPr>
+            <a:r>
+              <a:rPr lang="en-US" sz="1200" dirty="0">
+                <a:solidFill>
+                  <a:srgbClr val="000000"/>
+                </a:solidFill>
+              </a:rPr>
+              <a:t>Practical levers: Land-use planning and local political agenda-setting; coordination pressure with state and port actors; public process influence.</a:t>
+            </a:r>
+            <a:endParaRPr lang="en-US" sz="1200" dirty="0"/>
+          </a:p>
+        </p:txBody>
+      </p:sp>
+      <p:sp>
+        <p:nvSpPr>
+          <p:cNvPr id="6" name="Text 4"/>
+          <p:cNvSpPr/>
+          <p:nvPr/>
+        </p:nvSpPr>
+        <p:spPr>
+          <a:xfrm>
+            <a:off x="365760" y="3931920"/>
+            <a:ext cx="1828800" cy="274320"/>
+          </a:xfrm>
+          <a:prstGeom prst="rect">
+            <a:avLst/>
+          </a:prstGeom>
+          <a:noFill/>
+          <a:ln/>
+        </p:spPr>
+        <p:txBody>
+          <a:bodyPr wrap="square" rtlCol="0" anchor="ctr"/>
+          <a:lstStyle/>
+          <a:p>
+            <a:pPr indent="0" marL="0">
+              <a:buNone/>
+            </a:pPr>
+            <a:r>
+              <a:rPr lang="en-US" sz="1200" b="1" dirty="0">
+                <a:solidFill>
+                  <a:srgbClr val="000000"/>
+                </a:solidFill>
+              </a:rPr>
+              <a:t>Sources:</a:t>
+            </a:r>
+            <a:endParaRPr lang="en-US" sz="1200" dirty="0"/>
+          </a:p>
+        </p:txBody>
+      </p:sp>
+      <p:sp>
+        <p:nvSpPr>
+          <p:cNvPr id="7" name="Text 5"/>
+          <p:cNvSpPr/>
+          <p:nvPr/>
+        </p:nvSpPr>
+        <p:spPr>
+          <a:xfrm>
+            <a:off x="548640" y="4206240"/>
+            <a:ext cx="10972800" cy="320040"/>
+          </a:xfrm>
+          <a:prstGeom prst="rect">
+            <a:avLst/>
+          </a:prstGeom>
+          <a:noFill/>
+          <a:ln/>
+        </p:spPr>
+        <p:txBody>
+          <a:bodyPr wrap="square" rtlCol="0" anchor="ctr"/>
+          <a:lstStyle/>
+          <a:p>
+            <a:pPr indent="0" marL="0">
+              <a:buNone/>
+            </a:pPr>
+            <a:r>
+              <a:rPr lang="en-US" sz="1000" dirty="0">
+                <a:solidFill>
+                  <a:srgbClr val="333333"/>
+                </a:solidFill>
+              </a:rPr>
+              <a:t>• https://bpb-us-w2.wpmucdn.com/campuspress.yale.edu/dist/a/4311/files/2023/11/New-Haven-Mill-River-Planning-Study-Final-Report-FINAL-web.pdf</a:t>
+            </a:r>
+            <a:endParaRPr lang="en-US" sz="1000" dirty="0"/>
+          </a:p>
+        </p:txBody>
+      </p:sp>
+      <p:sp>
+        <p:nvSpPr>
+          <p:cNvPr id="8" name="Text 6"/>
+          <p:cNvSpPr/>
+          <p:nvPr/>
+        </p:nvSpPr>
+        <p:spPr>
+          <a:xfrm>
+            <a:off x="548640" y="4535424"/>
+            <a:ext cx="10972800" cy="320040"/>
+          </a:xfrm>
+          <a:prstGeom prst="rect">
+            <a:avLst/>
+          </a:prstGeom>
+          <a:noFill/>
+          <a:ln/>
+        </p:spPr>
+        <p:txBody>
+          <a:bodyPr wrap="square" rtlCol="0" anchor="ctr"/>
+          <a:lstStyle/>
+          <a:p>
+            <a:pPr indent="0" marL="0">
+              <a:buNone/>
+            </a:pPr>
+            <a:r>
+              <a:rPr lang="en-US" sz="1000" dirty="0">
+                <a:solidFill>
+                  <a:srgbClr val="333333"/>
+                </a:solidFill>
+              </a:rPr>
+              <a:t>• https://www.newhavenindependent.org/2025/05/15/deep_salt_pile_hearing/</a:t>
+            </a:r>
+            <a:endParaRPr lang="en-US" sz="1000" dirty="0"/>
+          </a:p>
+        </p:txBody>
+      </p:sp>
+    </p:spTree>
+  </p:cSld>
+  <p:clrMapOvr>
+    <a:masterClrMapping/>
+  </p:clrMapOvr>
+</p:sld>
+</file>
+
+<file path=ppt/slides/slide9.xml><?xml version="1.0" encoding="utf-8"?>
+<p:sld xmlns:a="http://schemas.openxmlformats.org/drawingml/2006/main" xmlns:r="http://schemas.openxmlformats.org/officeDocument/2006/relationships" xmlns:p="http://schemas.openxmlformats.org/presentationml/2006/main">
+  <p:cSld name="Slide 9">
+    <p:spTree>
+      <p:nvGrpSpPr>
+        <p:cNvPr id="1" name=""/>
+        <p:cNvGrpSpPr/>
+        <p:nvPr/>
+      </p:nvGrpSpPr>
+      <p:grpSpPr>
+        <a:xfrm>
+          <a:off x="0" y="0"/>
+          <a:ext cx="0" cy="0"/>
+          <a:chOff x="0" y="0"/>
+          <a:chExt cx="0" cy="0"/>
+        </a:xfrm>
+      </p:grpSpPr>
+      <p:sp>
+        <p:nvSpPr>
+          <p:cNvPr id="2" name="Text 0"/>
+          <p:cNvSpPr/>
+          <p:nvPr/>
+        </p:nvSpPr>
+        <p:spPr>
+          <a:xfrm>
+            <a:off x="274320" y="182880"/>
+            <a:ext cx="11521440" cy="457200"/>
+          </a:xfrm>
+          <a:prstGeom prst="rect">
+            <a:avLst/>
+          </a:prstGeom>
+          <a:noFill/>
+          <a:ln/>
+        </p:spPr>
+        <p:txBody>
+          <a:bodyPr wrap="square" rtlCol="0" anchor="ctr"/>
+          <a:lstStyle/>
+          <a:p>
+            <a:pPr indent="0" marL="0">
+              <a:buNone/>
+            </a:pPr>
+            <a:r>
+              <a:rPr lang="en-US" sz="1800" b="1" dirty="0">
+                <a:solidFill>
+                  <a:srgbClr val="000000"/>
+                </a:solidFill>
+              </a:rPr>
+              <a:t>Justification — EPA (program + funding context)</a:t>
+            </a:r>
+            <a:endParaRPr lang="en-US" sz="1800" dirty="0"/>
+          </a:p>
+        </p:txBody>
+      </p:sp>
+      <p:sp>
+        <p:nvSpPr>
+          <p:cNvPr id="3" name="Text 1"/>
+          <p:cNvSpPr/>
+          <p:nvPr/>
+        </p:nvSpPr>
+        <p:spPr>
+          <a:xfrm>
+            <a:off x="365760" y="822960"/>
+            <a:ext cx="11155680" cy="914400"/>
+          </a:xfrm>
+          <a:prstGeom prst="rect">
+            <a:avLst/>
+          </a:prstGeom>
+          <a:noFill/>
+          <a:ln/>
+        </p:spPr>
+        <p:txBody>
+          <a:bodyPr wrap="square" rtlCol="0" anchor="ctr"/>
+          <a:lstStyle/>
+          <a:p>
+            <a:pPr indent="0" marL="0">
+              <a:buNone/>
+            </a:pPr>
+            <a:r>
+              <a:rPr lang="en-US" sz="1200" dirty="0">
+                <a:solidFill>
+                  <a:srgbClr val="000000"/>
+                </a:solidFill>
+              </a:rPr>
+              <a:t>Likely interests: NPDES program outcomes; stormwater risk reduction; climate/environmental benefits from funded port projects.</a:t>
+            </a:r>
+            <a:endParaRPr lang="en-US" sz="1200" dirty="0"/>
+          </a:p>
+        </p:txBody>
+      </p:sp>
+      <p:sp>
+        <p:nvSpPr>
+          <p:cNvPr id="4" name="Text 2"/>
+          <p:cNvSpPr/>
+          <p:nvPr/>
+        </p:nvSpPr>
+        <p:spPr>
+          <a:xfrm>
+            <a:off x="365760" y="1737360"/>
+            <a:ext cx="11155680" cy="1188720"/>
+          </a:xfrm>
+          <a:prstGeom prst="rect">
+            <a:avLst/>
+          </a:prstGeom>
+          <a:noFill/>
+          <a:ln/>
+        </p:spPr>
+        <p:txBody>
+          <a:bodyPr wrap="square" rtlCol="0" anchor="ctr"/>
+          <a:lstStyle/>
+          <a:p>
+            <a:pPr indent="0" marL="0">
+              <a:buNone/>
+            </a:pPr>
+            <a:r>
+              <a:rPr lang="en-US" sz="1200" dirty="0">
+                <a:solidFill>
+                  <a:srgbClr val="000000"/>
+                </a:solidFill>
+              </a:rPr>
+              <a:t>Influence (Medium) rationale: EPA defines stormwater regulatory framework and publicly announced major port-related investment in New Haven context.</a:t>
+            </a:r>
+            <a:endParaRPr lang="en-US" sz="1200" dirty="0"/>
+          </a:p>
+        </p:txBody>
+      </p:sp>
+      <p:sp>
+        <p:nvSpPr>
+          <p:cNvPr id="5" name="Text 3"/>
+          <p:cNvSpPr/>
+          <p:nvPr/>
+        </p:nvSpPr>
+        <p:spPr>
+          <a:xfrm>
+            <a:off x="365760" y="2926080"/>
+            <a:ext cx="11155680" cy="914400"/>
+          </a:xfrm>
+          <a:prstGeom prst="rect">
+            <a:avLst/>
+          </a:prstGeom>
+          <a:noFill/>
+          <a:ln/>
+        </p:spPr>
+        <p:txBody>
+          <a:bodyPr wrap="square" rtlCol="0" anchor="ctr"/>
+          <a:lstStyle/>
+          <a:p>
+            <a:pPr indent="0" marL="0">
+              <a:buNone/>
+            </a:pPr>
+            <a:r>
+              <a:rPr lang="en-US" sz="1200" dirty="0">
+                <a:solidFill>
+                  <a:srgbClr val="000000"/>
+                </a:solidFill>
+              </a:rPr>
+              <a:t>Practical levers: Federal program guidance and oversight context; grant conditions and funding signals (e.g., Clean Ports).</a:t>
+            </a:r>
+            <a:endParaRPr lang="en-US" sz="1200" dirty="0"/>
+          </a:p>
+        </p:txBody>
+      </p:sp>
+      <p:sp>
+        <p:nvSpPr>
+          <p:cNvPr id="6" name="Text 4"/>
+          <p:cNvSpPr/>
+          <p:nvPr/>
+        </p:nvSpPr>
+        <p:spPr>
+          <a:xfrm>
+            <a:off x="365760" y="3931920"/>
+            <a:ext cx="1828800" cy="274320"/>
+          </a:xfrm>
+          <a:prstGeom prst="rect">
+            <a:avLst/>
+          </a:prstGeom>
+          <a:noFill/>
+          <a:ln/>
+        </p:spPr>
+        <p:txBody>
+          <a:bodyPr wrap="square" rtlCol="0" anchor="ctr"/>
+          <a:lstStyle/>
+          <a:p>
+            <a:pPr indent="0" marL="0">
+              <a:buNone/>
+            </a:pPr>
+            <a:r>
+              <a:rPr lang="en-US" sz="1200" b="1" dirty="0">
+                <a:solidFill>
+                  <a:srgbClr val="000000"/>
+                </a:solidFill>
+              </a:rPr>
+              <a:t>Sources:</a:t>
+            </a:r>
+            <a:endParaRPr lang="en-US" sz="1200" dirty="0"/>
+          </a:p>
+        </p:txBody>
+      </p:sp>
+      <p:sp>
+        <p:nvSpPr>
+          <p:cNvPr id="7" name="Text 5"/>
+          <p:cNvSpPr/>
+          <p:nvPr/>
+        </p:nvSpPr>
+        <p:spPr>
+          <a:xfrm>
+            <a:off x="548640" y="4206240"/>
+            <a:ext cx="10972800" cy="320040"/>
+          </a:xfrm>
+          <a:prstGeom prst="rect">
+            <a:avLst/>
+          </a:prstGeom>
+          <a:noFill/>
+          <a:ln/>
+        </p:spPr>
+        <p:txBody>
+          <a:bodyPr wrap="square" rtlCol="0" anchor="ctr"/>
+          <a:lstStyle/>
+          <a:p>
+            <a:pPr indent="0" marL="0">
+              <a:buNone/>
+            </a:pPr>
+            <a:r>
+              <a:rPr lang="en-US" sz="1000" dirty="0">
+                <a:solidFill>
+                  <a:srgbClr val="333333"/>
+                </a:solidFill>
+              </a:rPr>
+              <a:t>• https://www.epa.gov/npdes/npdes-stormwater-program</a:t>
+            </a:r>
+            <a:endParaRPr lang="en-US" sz="1000" dirty="0"/>
+          </a:p>
+        </p:txBody>
+      </p:sp>
+      <p:sp>
+        <p:nvSpPr>
+          <p:cNvPr id="8" name="Text 6"/>
+          <p:cNvSpPr/>
+          <p:nvPr/>
+        </p:nvSpPr>
+        <p:spPr>
+          <a:xfrm>
+            <a:off x="548640" y="4535424"/>
+            <a:ext cx="10972800" cy="320040"/>
+          </a:xfrm>
+          <a:prstGeom prst="rect">
+            <a:avLst/>
+          </a:prstGeom>
+          <a:noFill/>
+          <a:ln/>
+        </p:spPr>
+        <p:txBody>
+          <a:bodyPr wrap="square" rtlCol="0" anchor="ctr"/>
+          <a:lstStyle/>
+          <a:p>
+            <a:pPr indent="0" marL="0">
+              <a:buNone/>
+            </a:pPr>
+            <a:r>
+              <a:rPr lang="en-US" sz="1000" dirty="0">
+                <a:solidFill>
+                  <a:srgbClr val="333333"/>
+                </a:solidFill>
+              </a:rPr>
+              <a:t>• https://www.epa.gov/newsreleases/biden-harris-administration-announces-nearly-40-million-clean-ports-investments</a:t>
             </a:r>
             <a:endParaRPr lang="en-US" sz="1000" dirty="0"/>
           </a:p>
